--- a/Claude outputs/mental-models.pptx
+++ b/Claude outputs/mental-models.pptx
@@ -10,9 +10,12 @@
     <p:sldId id="258" r:id="rId4"/>
     <p:sldId id="259" r:id="rId5"/>
     <p:sldId id="260" r:id="rId6"/>
+    <p:sldId id="261" r:id="rId7"/>
+    <p:sldId id="262" r:id="rId8"/>
+    <p:sldId id="263" r:id="rId9"/>
   </p:sldIdLst>
   <p:notesMasterIdLst>
-    <p:notesMasterId r:id="rId7"/>
+    <p:notesMasterId r:id="rId10"/>
   </p:notesMasterIdLst>
   <p:sldSz cx="9144000" cy="5143500"/>
   <p:notesSz cx="5143500" cy="9144000"/>
@@ -506,7 +509,7 @@
           <a:p>
             <a:r>
               <a:rPr lang="en-US" dirty="0"/>
-              <a:t>Framing for the room: this is not a talk about documentation. It is about the difference between a team that owns a pile of runbooks and a team that owns a map. The three phrases on the slide are the three models the site already ships — each one is eleven words you can say in an incident channel. Four questions follow: why models matter, how we help people build one, how they spread, and what ours look like.</a:t>
+              <a:t>Framing: this is not a talk about documentation. It is the difference between a team that owns a pile of runbooks and a team that owns a map. The three phrases are the models the site already ships — each is a handful of words you can say in an incident channel. Four questions: why they matter, how we help someone build one, how they spread, and what ours look like.</a:t>
             </a:r>
             <a:endParaRPr lang="en-US" dirty="0"/>
           </a:p>
@@ -594,7 +597,7 @@
           <a:p>
             <a:r>
               <a:rPr lang="en-US" dirty="0"/>
-              <a:t>The compression number is real: the site is 284 pages, and the three models sit above all of it. The 'disagreement' example is the throttled-app field note — a week lost because two correct numbers were read as a contradiction instead of as two lenses. The point for leaders: incident length is mostly the time between the first command and the right command; a model shortens that gap, and it is the one thing a runbook cannot do, because a runbook assumes you already know which one to open.</a:t>
+              <a:t>The compression number is real: 284 pages, and four models sit above all of it. The disagreement example is the throttled-app field note — a week lost because two correct numbers were read as a contradiction instead of as two lenses. For leaders: incident length is mostly the time between the first command and the right command. A runbook cannot close that gap, because a runbook assumes you already know which one to open.</a:t>
             </a:r>
             <a:endParaRPr lang="en-US" dirty="0"/>
           </a:p>
@@ -682,7 +685,7 @@
           <a:p>
             <a:r>
               <a:rPr lang="en-US" dirty="0"/>
-              <a:t>This is how the three site models were actually written, and it is teachable. Step 2 is the hard one and the one people skip: the discipline is not finding three things, it is arguing why there is not a fourth. Step 4 is where a model earns belief — every model page ends with a gallery of real misreadings, most of them incidents this team lived through. Step 5 is what separates a poster from a practice: the Two Roads page ships a script; the Lenses page ships a query. When coaching someone building their own — for a data pipeline, for the CI system — walk them through these six in this order and stop them at step 2 until they can say why not N+1.</a:t>
+              <a:t>This is how the four were actually written, and it is teachable. Step 2 is the one people skip: the discipline is not finding three things, it is arguing why there is not a fourth. Step 4 is where a model earns belief. Step 5 has the order that matters — tactics hang off the model, they are not the entry point. When coaching someone building one for their own domain — the CI pipeline, the data platform — walk these six and hold them at step 2 until they can say why not N+1.</a:t>
             </a:r>
             <a:endParaRPr lang="en-US" dirty="0"/>
           </a:p>
@@ -770,7 +773,7 @@
           <a:p>
             <a:r>
               <a:rPr lang="en-US" dirty="0"/>
-              <a:t>Three channels, and the third is the one leaders control. Meeting the model at the moment of need is what the hooks do: someone lands on the pod-pending runbook and reads 'this is verb 2 of the Two Roads' — they learn the model while fixing the thing. Putting it in the tools is why the tactical pages exist: a model you run survives; a model you recall fades. Speaking it is where the platform team comes in — when tenants and platform use the same words for who owns what (the seat marker) and what evidence looks like (the evidence pack), the tickets change shape and the relationship changes with them. The measures at the bottom are the ones to actually watch; vocabulary is the leading indicator.</a:t>
+              <a:t>This is the correction worth making explicitly. A model is not a tactic and cannot be rolled out like one. Instructions spread by being published and required; orientation spreads by being demonstrated at the moment someone is disoriented — which means the people with the most airtime in an incident channel are the distribution mechanism, not the wiki. The 'dies when' row is the warning for leaders: the fastest way to kill a model is to make it a mandatory field in a review template, because that converts a way of seeing into a compliance task and everyone starts performing it instead of using it. The measure is linguistic — you hear the vocabulary come back from someone who never read the page — and that is a lagging-free signal available in week one.</a:t>
             </a:r>
             <a:endParaRPr lang="en-US" dirty="0"/>
           </a:p>
@@ -858,7 +861,7 @@
           <a:p>
             <a:r>
               <a:rPr lang="en-US" dirty="0"/>
-              <a:t>Read the four cards as one sentence: the Doors are what you set, the Lenses what you measure, the Roads where you look, and the use cases what you type. Each model follows the recipe on slide three — a stripped-down job, a smallest complete set with an argument for why not one more, a shape, a gallery of real misreadings, and tactics. The Two Roads was built last, this week, with the commands captured on a live cluster: the script on it tells three CrashLoopBackOffs apart in one line — the kubelet, the kernel, and the app. If the room takes one thing away: the next model to build is whichever domain currently has a pile of runbooks and no map — the CI pipeline and the data platform are the obvious candidates, and the six moves apply unchanged.</a:t>
+              <a:t>The shape is a loop, and that is the load-bearing part: the request you set at Door 1 is the denominator the autoscaler divides by at Door 3, and Door 2 decides whether either number is believable. Nine gallery rows, all real: the readiness probe that took down prod is a Door 2 setting causing a Door 3-looking outage.</a:t>
             </a:r>
             <a:endParaRPr lang="en-US" dirty="0"/>
           </a:p>
@@ -882,6 +885,270 @@
             <a:fld id="{F7021451-1387-4CA6-816F-3879F97B5CBC}" type="slidenum">
               <a:rPr lang="en-US"/>
               <a:t>5</a:t>
+            </a:fld>
+            <a:endParaRPr lang="en-US"/>
+          </a:p>
+        </p:txBody>
+      </p:sp>
+    </p:spTree>
+    <p:extLst>
+      <p:ext uri="{BB962C8B-B14F-4D97-AF65-F5344CB8AC3E}">
+        <p14:creationId xmlns:p14="http://schemas.microsoft.com/office/powerpoint/2010/main" val="1024086991"/>
+      </p:ext>
+    </p:extLst>
+  </p:cSld>
+  <p:clrMapOvr>
+    <a:masterClrMapping/>
+  </p:clrMapOvr>
+</p:notes>
+</file>
+
+<file path=ppt/notesSlides/notesSlide6.xml><?xml version="1.0" encoding="utf-8"?>
+<p:notes xmlns:a="http://schemas.openxmlformats.org/drawingml/2006/main" xmlns:r="http://schemas.openxmlformats.org/officeDocument/2006/relationships" xmlns:p="http://schemas.openxmlformats.org/presentationml/2006/main">
+  <p:cSld>
+    <p:spTree>
+      <p:nvGrpSpPr>
+        <p:cNvPr id="1" name=""/>
+        <p:cNvGrpSpPr/>
+        <p:nvPr/>
+      </p:nvGrpSpPr>
+      <p:grpSpPr>
+        <a:xfrm>
+          <a:off x="0" y="0"/>
+          <a:ext cx="0" cy="0"/>
+          <a:chOff x="0" y="0"/>
+          <a:chExt cx="0" cy="0"/>
+        </a:xfrm>
+      </p:grpSpPr>
+      <p:sp>
+        <p:nvSpPr>
+          <p:cNvPr id="2" name="Slide Image Placeholder 1"/>
+          <p:cNvSpPr>
+            <a:spLocks noGrp="1" noRot="1" noChangeAspect="1"/>
+          </p:cNvSpPr>
+          <p:nvPr>
+            <p:ph type="sldImg"/>
+          </p:nvPr>
+        </p:nvSpPr>
+        <p:spPr/>
+      </p:sp>
+      <p:sp>
+        <p:nvSpPr>
+          <p:cNvPr id="3" name="Notes Placeholder 2"/>
+          <p:cNvSpPr>
+            <a:spLocks noGrp="1"/>
+          </p:cNvSpPr>
+          <p:nvPr>
+            <p:ph type="body" idx="1"/>
+          </p:nvPr>
+        </p:nvSpPr>
+        <p:spPr/>
+        <p:txBody>
+          <a:bodyPr/>
+          <a:lstStyle/>
+          <a:p>
+            <a:r>
+              <a:rPr lang="en-US" dirty="0"/>
+              <a:t>The shape is a zoom, not a toolbox: each lens's blind spot is precisely the next lens's field of view, which is why a confusing number is resolved by changing lens rather than by staring harder through the same one. Thirteen gallery rows. This is the model that pays for itself the first time kubectl top and a JVM gauge disagree.</a:t>
+            </a:r>
+            <a:endParaRPr lang="en-US" dirty="0"/>
+          </a:p>
+        </p:txBody>
+      </p:sp>
+      <p:sp>
+        <p:nvSpPr>
+          <p:cNvPr id="4" name="Slide Number Placeholder 3"/>
+          <p:cNvSpPr>
+            <a:spLocks noGrp="1"/>
+          </p:cNvSpPr>
+          <p:nvPr>
+            <p:ph type="sldNum" sz="quarter" idx="10"/>
+          </p:nvPr>
+        </p:nvSpPr>
+        <p:spPr/>
+        <p:txBody>
+          <a:bodyPr/>
+          <a:lstStyle/>
+          <a:p>
+            <a:fld id="{F7021451-1387-4CA6-816F-3879F97B5CBC}" type="slidenum">
+              <a:rPr lang="en-US"/>
+              <a:t>6</a:t>
+            </a:fld>
+            <a:endParaRPr lang="en-US"/>
+          </a:p>
+        </p:txBody>
+      </p:sp>
+    </p:spTree>
+    <p:extLst>
+      <p:ext uri="{BB962C8B-B14F-4D97-AF65-F5344CB8AC3E}">
+        <p14:creationId xmlns:p14="http://schemas.microsoft.com/office/powerpoint/2010/main" val="1024086991"/>
+      </p:ext>
+    </p:extLst>
+  </p:cSld>
+  <p:clrMapOvr>
+    <a:masterClrMapping/>
+  </p:clrMapOvr>
+</p:notes>
+</file>
+
+<file path=ppt/notesSlides/notesSlide7.xml><?xml version="1.0" encoding="utf-8"?>
+<p:notes xmlns:a="http://schemas.openxmlformats.org/drawingml/2006/main" xmlns:r="http://schemas.openxmlformats.org/officeDocument/2006/relationships" xmlns:p="http://schemas.openxmlformats.org/presentationml/2006/main">
+  <p:cSld>
+    <p:spTree>
+      <p:nvGrpSpPr>
+        <p:cNvPr id="1" name=""/>
+        <p:cNvGrpSpPr/>
+        <p:nvPr/>
+      </p:nvGrpSpPr>
+      <p:grpSpPr>
+        <a:xfrm>
+          <a:off x="0" y="0"/>
+          <a:ext cx="0" cy="0"/>
+          <a:chOff x="0" y="0"/>
+          <a:chExt cx="0" cy="0"/>
+        </a:xfrm>
+      </p:grpSpPr>
+      <p:sp>
+        <p:nvSpPr>
+          <p:cNvPr id="2" name="Slide Image Placeholder 1"/>
+          <p:cNvSpPr>
+            <a:spLocks noGrp="1" noRot="1" noChangeAspect="1"/>
+          </p:cNvSpPr>
+          <p:nvPr>
+            <p:ph type="sldImg"/>
+          </p:nvPr>
+        </p:nvSpPr>
+        <p:spPr/>
+      </p:sp>
+      <p:sp>
+        <p:nvSpPr>
+          <p:cNvPr id="3" name="Notes Placeholder 2"/>
+          <p:cNvSpPr>
+            <a:spLocks noGrp="1"/>
+          </p:cNvSpPr>
+          <p:nvPr>
+            <p:ph type="body" idx="1"/>
+          </p:nvPr>
+        </p:nvSpPr>
+        <p:spPr/>
+        <p:txBody>
+          <a:bodyPr/>
+          <a:lstStyle/>
+          <a:p>
+            <a:r>
+              <a:rPr lang="en-US" dirty="0"/>
+              <a:t>Built last, with every console line captured on a live cluster. The crossroads is the practical payoff: lifecycle failures present as path failures, so glance down the vertical road first — thirty seconds — and only bisect across when all five verbs pass. All five passing with the service still wrong is the sixth question, which hands back to the Lenses.</a:t>
+            </a:r>
+            <a:endParaRPr lang="en-US" dirty="0"/>
+          </a:p>
+        </p:txBody>
+      </p:sp>
+      <p:sp>
+        <p:nvSpPr>
+          <p:cNvPr id="4" name="Slide Number Placeholder 3"/>
+          <p:cNvSpPr>
+            <a:spLocks noGrp="1"/>
+          </p:cNvSpPr>
+          <p:nvPr>
+            <p:ph type="sldNum" sz="quarter" idx="10"/>
+          </p:nvPr>
+        </p:nvSpPr>
+        <p:spPr/>
+        <p:txBody>
+          <a:bodyPr/>
+          <a:lstStyle/>
+          <a:p>
+            <a:fld id="{F7021451-1387-4CA6-816F-3879F97B5CBC}" type="slidenum">
+              <a:rPr lang="en-US"/>
+              <a:t>7</a:t>
+            </a:fld>
+            <a:endParaRPr lang="en-US"/>
+          </a:p>
+        </p:txBody>
+      </p:sp>
+    </p:spTree>
+    <p:extLst>
+      <p:ext uri="{BB962C8B-B14F-4D97-AF65-F5344CB8AC3E}">
+        <p14:creationId xmlns:p14="http://schemas.microsoft.com/office/powerpoint/2010/main" val="1024086991"/>
+      </p:ext>
+    </p:extLst>
+  </p:cSld>
+  <p:clrMapOvr>
+    <a:masterClrMapping/>
+  </p:clrMapOvr>
+</p:notes>
+</file>
+
+<file path=ppt/notesSlides/notesSlide8.xml><?xml version="1.0" encoding="utf-8"?>
+<p:notes xmlns:a="http://schemas.openxmlformats.org/drawingml/2006/main" xmlns:r="http://schemas.openxmlformats.org/officeDocument/2006/relationships" xmlns:p="http://schemas.openxmlformats.org/presentationml/2006/main">
+  <p:cSld>
+    <p:spTree>
+      <p:nvGrpSpPr>
+        <p:cNvPr id="1" name=""/>
+        <p:cNvGrpSpPr/>
+        <p:nvPr/>
+      </p:nvGrpSpPr>
+      <p:grpSpPr>
+        <a:xfrm>
+          <a:off x="0" y="0"/>
+          <a:ext cx="0" cy="0"/>
+          <a:chOff x="0" y="0"/>
+          <a:chExt cx="0" cy="0"/>
+        </a:xfrm>
+      </p:grpSpPr>
+      <p:sp>
+        <p:nvSpPr>
+          <p:cNvPr id="2" name="Slide Image Placeholder 1"/>
+          <p:cNvSpPr>
+            <a:spLocks noGrp="1" noRot="1" noChangeAspect="1"/>
+          </p:cNvSpPr>
+          <p:nvPr>
+            <p:ph type="sldImg"/>
+          </p:nvPr>
+        </p:nvSpPr>
+        <p:spPr/>
+      </p:sp>
+      <p:sp>
+        <p:nvSpPr>
+          <p:cNvPr id="3" name="Notes Placeholder 2"/>
+          <p:cNvSpPr>
+            <a:spLocks noGrp="1"/>
+          </p:cNvSpPr>
+          <p:nvPr>
+            <p:ph type="body" idx="1"/>
+          </p:nvPr>
+        </p:nvSpPr>
+        <p:spPr/>
+        <p:txBody>
+          <a:bodyPr/>
+          <a:lstStyle/>
+          <a:p>
+            <a:r>
+              <a:rPr lang="en-US" dirty="0"/>
+              <a:t>Deliberately last. This is what step 5 of the recipe means: the tactics are real and detailed, but they are reached through the model, not instead of it. Note the ordering inside each question — the symptoms are a rule-out list with the one number that rules each in, which is orientation applied to a tactical page.</a:t>
+            </a:r>
+            <a:endParaRPr lang="en-US" dirty="0"/>
+          </a:p>
+        </p:txBody>
+      </p:sp>
+      <p:sp>
+        <p:nvSpPr>
+          <p:cNvPr id="4" name="Slide Number Placeholder 3"/>
+          <p:cNvSpPr>
+            <a:spLocks noGrp="1"/>
+          </p:cNvSpPr>
+          <p:nvPr>
+            <p:ph type="sldNum" sz="quarter" idx="10"/>
+          </p:nvPr>
+        </p:nvSpPr>
+        <p:spPr/>
+        <p:txBody>
+          <a:bodyPr/>
+          <a:lstStyle/>
+          <a:p>
+            <a:fld id="{F7021451-1387-4CA6-816F-3879F97B5CBC}" type="slidenum">
+              <a:rPr lang="en-US"/>
+              <a:t>8</a:t>
             </a:fld>
             <a:endParaRPr lang="en-US"/>
           </a:p>
@@ -1213,7 +1480,7 @@
     <p:bg>
       <p:bgPr>
         <a:solidFill>
-          <a:srgbClr val="1F2933"/>
+          <a:srgbClr val="102A43"/>
         </a:solidFill>
       </p:bgPr>
     </p:bg>
@@ -1239,18 +1506,18 @@
         </p:nvSpPr>
         <p:spPr>
           <a:xfrm>
-            <a:off x="6675120" y="1234440"/>
-            <a:ext cx="1737360" cy="1737360"/>
+            <a:off x="6720840" y="1280160"/>
+            <a:ext cx="1691640" cy="1691640"/>
           </a:xfrm>
           <a:prstGeom prst="ellipse">
             <a:avLst/>
           </a:prstGeom>
           <a:solidFill>
-            <a:srgbClr val="D9822B"/>
+            <a:srgbClr val="2680C2"/>
           </a:solidFill>
           <a:ln w="12700">
             <a:solidFill>
-              <a:srgbClr val="D9822B"/>
+              <a:srgbClr val="2680C2"/>
             </a:solidFill>
             <a:prstDash val="solid"/>
           </a:ln>
@@ -1272,8 +1539,8 @@
         </p:blipFill>
         <p:spPr>
           <a:xfrm>
-            <a:off x="7092086" y="1651406"/>
-            <a:ext cx="903427" cy="903427"/>
+            <a:off x="7126834" y="1686154"/>
+            <a:ext cx="879653" cy="879653"/>
           </a:xfrm>
           <a:prstGeom prst="rect">
             <a:avLst/>
@@ -1288,7 +1555,7 @@
         </p:nvSpPr>
         <p:spPr>
           <a:xfrm>
-            <a:off x="548640" y="1234440"/>
+            <a:off x="548640" y="1207008"/>
             <a:ext cx="5852160" cy="914400"/>
           </a:xfrm>
           <a:prstGeom prst="rect">
@@ -1327,34 +1594,34 @@
         </p:nvSpPr>
         <p:spPr>
           <a:xfrm>
-            <a:off x="548640" y="2194560"/>
-            <a:ext cx="5669280" cy="822960"/>
-          </a:xfrm>
-          <a:prstGeom prst="rect">
-            <a:avLst/>
-          </a:prstGeom>
-          <a:noFill/>
-          <a:ln/>
-        </p:spPr>
-        <p:txBody>
-          <a:bodyPr wrap="square" lIns="0" tIns="0" rIns="0" bIns="0" rtlCol="0" anchor="ctr"/>
-          <a:lstStyle/>
-          <a:p>
-            <a:pPr indent="0" marL="0">
-              <a:buNone/>
-            </a:pPr>
-            <a:r>
-              <a:rPr lang="en-US" sz="1800" dirty="0">
-                <a:solidFill>
-                  <a:srgbClr val="E4E7EB"/>
-                </a:solidFill>
-                <a:latin typeface="Calibri" pitchFamily="34" charset="0"/>
-                <a:ea typeface="Calibri" pitchFamily="34" charset="-122"/>
-                <a:cs typeface="Calibri" pitchFamily="34" charset="-120"/>
-              </a:rPr>
-              <a:t>Why they matter, how we build them, how they spread — with three we have already built.</a:t>
-            </a:r>
-            <a:endParaRPr lang="en-US" sz="1800" dirty="0"/>
+            <a:off x="548640" y="2176272"/>
+            <a:ext cx="5760720" cy="822960"/>
+          </a:xfrm>
+          <a:prstGeom prst="rect">
+            <a:avLst/>
+          </a:prstGeom>
+          <a:noFill/>
+          <a:ln/>
+        </p:spPr>
+        <p:txBody>
+          <a:bodyPr wrap="square" lIns="0" tIns="0" rIns="0" bIns="0" rtlCol="0" anchor="ctr"/>
+          <a:lstStyle/>
+          <a:p>
+            <a:pPr indent="0" marL="0">
+              <a:buNone/>
+            </a:pPr>
+            <a:r>
+              <a:rPr lang="en-US" sz="1700" dirty="0">
+                <a:solidFill>
+                  <a:srgbClr val="D9E2EC"/>
+                </a:solidFill>
+                <a:latin typeface="Calibri" pitchFamily="34" charset="0"/>
+                <a:ea typeface="Calibri" pitchFamily="34" charset="-122"/>
+                <a:cs typeface="Calibri" pitchFamily="34" charset="-120"/>
+              </a:rPr>
+              <a:t>Why they matter, how we help people build them, how they spread — three we have already built, and the tactical layer they carry.</a:t>
+            </a:r>
+            <a:endParaRPr lang="en-US" sz="1700" dirty="0"/>
           </a:p>
         </p:txBody>
       </p:sp>
@@ -1366,7 +1633,7 @@
         </p:nvSpPr>
         <p:spPr>
           <a:xfrm>
-            <a:off x="548640" y="3200400"/>
+            <a:off x="548640" y="3246120"/>
             <a:ext cx="8046720" cy="365760"/>
           </a:xfrm>
           <a:prstGeom prst="rect">
@@ -1385,7 +1652,7 @@
             <a:r>
               <a:rPr lang="en-US" sz="1400" b="1" dirty="0">
                 <a:solidFill>
-                  <a:srgbClr val="D9822B"/>
+                  <a:srgbClr val="4098D7"/>
                 </a:solidFill>
                 <a:latin typeface="Calibri" pitchFamily="34" charset="0"/>
                 <a:ea typeface="Calibri" pitchFamily="34" charset="-122"/>
@@ -1399,7 +1666,7 @@
             <a:r>
               <a:rPr lang="en-US" sz="1400" b="1" dirty="0">
                 <a:solidFill>
-                  <a:srgbClr val="D9822B"/>
+                  <a:srgbClr val="4098D7"/>
                 </a:solidFill>
                 <a:latin typeface="Calibri" pitchFamily="34" charset="0"/>
                 <a:ea typeface="Calibri" pitchFamily="34" charset="-122"/>
@@ -1413,7 +1680,7 @@
             <a:r>
               <a:rPr lang="en-US" sz="1400" b="1" dirty="0">
                 <a:solidFill>
-                  <a:srgbClr val="D9822B"/>
+                  <a:srgbClr val="4098D7"/>
                 </a:solidFill>
                 <a:latin typeface="Calibri" pitchFamily="34" charset="0"/>
                 <a:ea typeface="Calibri" pitchFamily="34" charset="-122"/>
@@ -1433,7 +1700,7 @@
         </p:nvSpPr>
         <p:spPr>
           <a:xfrm>
-            <a:off x="548640" y="4343400"/>
+            <a:off x="548640" y="4389120"/>
             <a:ext cx="8046720" cy="320040"/>
           </a:xfrm>
           <a:prstGeom prst="rect">
@@ -1452,7 +1719,7 @@
             <a:r>
               <a:rPr lang="en-US" sz="1100" dirty="0">
                 <a:solidFill>
-                  <a:srgbClr val="9AA5B1"/>
+                  <a:srgbClr val="829AB1"/>
                 </a:solidFill>
                 <a:latin typeface="Calibri" pitchFamily="34" charset="0"/>
                 <a:ea typeface="Calibri" pitchFamily="34" charset="-122"/>
@@ -1505,7 +1772,7 @@
         <p:spPr>
           <a:xfrm>
             <a:off x="457200" y="320040"/>
-            <a:ext cx="8229600" cy="640080"/>
+            <a:ext cx="8229600" cy="566928"/>
           </a:xfrm>
           <a:prstGeom prst="rect">
             <a:avLst/>
@@ -1523,7 +1790,7 @@
             <a:r>
               <a:rPr lang="en-US" sz="3200" b="1" dirty="0">
                 <a:solidFill>
-                  <a:srgbClr val="1F2933"/>
+                  <a:srgbClr val="102A43"/>
                 </a:solidFill>
                 <a:latin typeface="Cambria" pitchFamily="34" charset="0"/>
                 <a:ea typeface="Cambria" pitchFamily="34" charset="-122"/>
@@ -1562,13 +1829,13 @@
             <a:r>
               <a:rPr lang="en-US" sz="1300" i="1" dirty="0">
                 <a:solidFill>
-                  <a:srgbClr val="52606D"/>
-                </a:solidFill>
-                <a:latin typeface="Calibri" pitchFamily="34" charset="0"/>
-                <a:ea typeface="Calibri" pitchFamily="34" charset="-122"/>
-                <a:cs typeface="Calibri" pitchFamily="34" charset="-120"/>
-              </a:rPr>
-              <a:t>A runbook answers one question. A model answers the next hundred.</a:t>
+                  <a:srgbClr val="486581"/>
+                </a:solidFill>
+                <a:latin typeface="Calibri" pitchFamily="34" charset="0"/>
+                <a:ea typeface="Calibri" pitchFamily="34" charset="-122"/>
+                <a:cs typeface="Calibri" pitchFamily="34" charset="-120"/>
+              </a:rPr>
+              <a:t>A runbook tells you what to do. A model tells you where you are — which is what decides what to do.</a:t>
             </a:r>
             <a:endParaRPr lang="en-US" sz="1300" dirty="0"/>
           </a:p>
@@ -1583,19 +1850,19 @@
         <p:spPr>
           <a:xfrm>
             <a:off x="457200" y="1371600"/>
-            <a:ext cx="3291840" cy="2743200"/>
+            <a:ext cx="3246120" cy="2788920"/>
           </a:xfrm>
           <a:prstGeom prst="roundRect">
             <a:avLst>
-              <a:gd name="adj" fmla="val 2667"/>
+              <a:gd name="adj" fmla="val 2623"/>
             </a:avLst>
           </a:prstGeom>
           <a:solidFill>
-            <a:srgbClr val="1F2933"/>
+            <a:srgbClr val="102A43"/>
           </a:solidFill>
           <a:ln w="12700">
             <a:solidFill>
-              <a:srgbClr val="1F2933"/>
+              <a:srgbClr val="102A43"/>
             </a:solidFill>
             <a:prstDash val="solid"/>
           </a:ln>
@@ -1609,26 +1876,26 @@
         </p:nvSpPr>
         <p:spPr>
           <a:xfrm>
-            <a:off x="640080" y="1463040"/>
-            <a:ext cx="2926080" cy="731520"/>
-          </a:xfrm>
-          <a:prstGeom prst="rect">
-            <a:avLst/>
-          </a:prstGeom>
-          <a:noFill/>
-          <a:ln/>
-        </p:spPr>
-        <p:txBody>
-          <a:bodyPr wrap="square" lIns="0" tIns="0" rIns="0" bIns="0" rtlCol="0" anchor="ctr"/>
-          <a:lstStyle/>
-          <a:p>
-            <a:pPr indent="0" marL="0">
-              <a:buNone/>
-            </a:pPr>
-            <a:r>
-              <a:rPr lang="en-US" sz="5400" b="1" dirty="0">
-                <a:solidFill>
-                  <a:srgbClr val="D9822B"/>
+            <a:off x="658368" y="1463040"/>
+            <a:ext cx="2834640" cy="731520"/>
+          </a:xfrm>
+          <a:prstGeom prst="rect">
+            <a:avLst/>
+          </a:prstGeom>
+          <a:noFill/>
+          <a:ln/>
+        </p:spPr>
+        <p:txBody>
+          <a:bodyPr wrap="square" lIns="0" tIns="0" rIns="0" bIns="0" rtlCol="0" anchor="ctr"/>
+          <a:lstStyle/>
+          <a:p>
+            <a:pPr indent="0" marL="0">
+              <a:buNone/>
+            </a:pPr>
+            <a:r>
+              <a:rPr lang="en-US" sz="5200" b="1" dirty="0">
+                <a:solidFill>
+                  <a:srgbClr val="4098D7"/>
                 </a:solidFill>
                 <a:latin typeface="Cambria" pitchFamily="34" charset="0"/>
                 <a:ea typeface="Cambria" pitchFamily="34" charset="-122"/>
@@ -1636,7 +1903,7 @@
               </a:rPr>
               <a:t>284</a:t>
             </a:r>
-            <a:endParaRPr lang="en-US" sz="5400" dirty="0"/>
+            <a:endParaRPr lang="en-US" sz="5200" dirty="0"/>
           </a:p>
         </p:txBody>
       </p:sp>
@@ -1648,26 +1915,26 @@
         </p:nvSpPr>
         <p:spPr>
           <a:xfrm>
-            <a:off x="640080" y="2194560"/>
-            <a:ext cx="2926080" cy="457200"/>
-          </a:xfrm>
-          <a:prstGeom prst="rect">
-            <a:avLst/>
-          </a:prstGeom>
-          <a:noFill/>
-          <a:ln/>
-        </p:spPr>
-        <p:txBody>
-          <a:bodyPr wrap="square" lIns="0" tIns="0" rIns="0" bIns="0" rtlCol="0" anchor="ctr"/>
-          <a:lstStyle/>
-          <a:p>
-            <a:pPr indent="0" marL="0">
-              <a:buNone/>
-            </a:pPr>
-            <a:r>
-              <a:rPr lang="en-US" sz="1300" dirty="0">
-                <a:solidFill>
-                  <a:srgbClr val="E4E7EB"/>
+            <a:off x="658368" y="2194560"/>
+            <a:ext cx="2834640" cy="457200"/>
+          </a:xfrm>
+          <a:prstGeom prst="rect">
+            <a:avLst/>
+          </a:prstGeom>
+          <a:noFill/>
+          <a:ln/>
+        </p:spPr>
+        <p:txBody>
+          <a:bodyPr wrap="square" lIns="0" tIns="0" rIns="0" bIns="0" rtlCol="0" anchor="ctr"/>
+          <a:lstStyle/>
+          <a:p>
+            <a:pPr indent="0" marL="0">
+              <a:buNone/>
+            </a:pPr>
+            <a:r>
+              <a:rPr lang="en-US" sz="1250" dirty="0">
+                <a:solidFill>
+                  <a:srgbClr val="D9E2EC"/>
                 </a:solidFill>
                 <a:latin typeface="Calibri" pitchFamily="34" charset="0"/>
                 <a:ea typeface="Calibri" pitchFamily="34" charset="-122"/>
@@ -1675,7 +1942,7 @@
               </a:rPr>
               <a:t>pages, 21 runbooks, 16 field notes on the site —</a:t>
             </a:r>
-            <a:endParaRPr lang="en-US" sz="1300" dirty="0"/>
+            <a:endParaRPr lang="en-US" sz="1250" dirty="0"/>
           </a:p>
         </p:txBody>
       </p:sp>
@@ -1687,34 +1954,34 @@
         </p:nvSpPr>
         <p:spPr>
           <a:xfrm>
-            <a:off x="640080" y="2606040"/>
-            <a:ext cx="2926080" cy="731520"/>
-          </a:xfrm>
-          <a:prstGeom prst="rect">
-            <a:avLst/>
-          </a:prstGeom>
-          <a:noFill/>
-          <a:ln/>
-        </p:spPr>
-        <p:txBody>
-          <a:bodyPr wrap="square" lIns="0" tIns="0" rIns="0" bIns="0" rtlCol="0" anchor="ctr"/>
-          <a:lstStyle/>
-          <a:p>
-            <a:pPr indent="0" marL="0">
-              <a:buNone/>
-            </a:pPr>
-            <a:r>
-              <a:rPr lang="en-US" sz="5400" b="1" dirty="0">
-                <a:solidFill>
-                  <a:srgbClr val="D9822B"/>
+            <a:off x="658368" y="2633472"/>
+            <a:ext cx="2834640" cy="731520"/>
+          </a:xfrm>
+          <a:prstGeom prst="rect">
+            <a:avLst/>
+          </a:prstGeom>
+          <a:noFill/>
+          <a:ln/>
+        </p:spPr>
+        <p:txBody>
+          <a:bodyPr wrap="square" lIns="0" tIns="0" rIns="0" bIns="0" rtlCol="0" anchor="ctr"/>
+          <a:lstStyle/>
+          <a:p>
+            <a:pPr indent="0" marL="0">
+              <a:buNone/>
+            </a:pPr>
+            <a:r>
+              <a:rPr lang="en-US" sz="5200" b="1" dirty="0">
+                <a:solidFill>
+                  <a:srgbClr val="4098D7"/>
                 </a:solidFill>
                 <a:latin typeface="Cambria" pitchFamily="34" charset="0"/>
                 <a:ea typeface="Cambria" pitchFamily="34" charset="-122"/>
                 <a:cs typeface="Cambria" pitchFamily="34" charset="-120"/>
               </a:rPr>
-              <a:t>3</a:t>
-            </a:r>
-            <a:endParaRPr lang="en-US" sz="5400" dirty="0"/>
+              <a:t>4</a:t>
+            </a:r>
+            <a:endParaRPr lang="en-US" sz="5200" dirty="0"/>
           </a:p>
         </p:txBody>
       </p:sp>
@@ -1726,34 +1993,34 @@
         </p:nvSpPr>
         <p:spPr>
           <a:xfrm>
-            <a:off x="640080" y="3337560"/>
-            <a:ext cx="2926080" cy="731520"/>
-          </a:xfrm>
-          <a:prstGeom prst="rect">
-            <a:avLst/>
-          </a:prstGeom>
-          <a:noFill/>
-          <a:ln/>
-        </p:spPr>
-        <p:txBody>
-          <a:bodyPr wrap="square" lIns="0" tIns="0" rIns="0" bIns="0" rtlCol="0" anchor="ctr"/>
-          <a:lstStyle/>
-          <a:p>
-            <a:pPr indent="0" marL="0">
-              <a:buNone/>
-            </a:pPr>
-            <a:r>
-              <a:rPr lang="en-US" sz="1300" dirty="0">
-                <a:solidFill>
-                  <a:srgbClr val="E4E7EB"/>
-                </a:solidFill>
-                <a:latin typeface="Calibri" pitchFamily="34" charset="0"/>
-                <a:ea typeface="Calibri" pitchFamily="34" charset="-122"/>
-                <a:cs typeface="Calibri" pitchFamily="34" charset="-120"/>
-              </a:rPr>
-              <a:t>models, eleven words, that a new engineer can hold on day one. Everything else is a refinement inside one of them.</a:t>
-            </a:r>
-            <a:endParaRPr lang="en-US" sz="1300" dirty="0"/>
+            <a:off x="658368" y="3364992"/>
+            <a:ext cx="2834640" cy="731520"/>
+          </a:xfrm>
+          <a:prstGeom prst="rect">
+            <a:avLst/>
+          </a:prstGeom>
+          <a:noFill/>
+          <a:ln/>
+        </p:spPr>
+        <p:txBody>
+          <a:bodyPr wrap="square" lIns="0" tIns="0" rIns="0" bIns="0" rtlCol="0" anchor="ctr"/>
+          <a:lstStyle/>
+          <a:p>
+            <a:pPr indent="0" marL="0">
+              <a:buNone/>
+            </a:pPr>
+            <a:r>
+              <a:rPr lang="en-US" sz="1250" dirty="0">
+                <a:solidFill>
+                  <a:srgbClr val="D9E2EC"/>
+                </a:solidFill>
+                <a:latin typeface="Calibri" pitchFamily="34" charset="0"/>
+                <a:ea typeface="Calibri" pitchFamily="34" charset="-122"/>
+                <a:cs typeface="Calibri" pitchFamily="34" charset="-120"/>
+              </a:rPr>
+              <a:t>models a new engineer can hold on day one. Everything else is a refinement inside one of them.</a:t>
+            </a:r>
+            <a:endParaRPr lang="en-US" sz="1250" dirty="0"/>
           </a:p>
         </p:txBody>
       </p:sp>
@@ -1772,11 +2039,11 @@
             <a:avLst/>
           </a:prstGeom>
           <a:solidFill>
-            <a:srgbClr val="D9822B"/>
+            <a:srgbClr val="2680C2"/>
           </a:solidFill>
           <a:ln w="12700">
             <a:solidFill>
-              <a:srgbClr val="D9822B"/>
+              <a:srgbClr val="2680C2"/>
             </a:solidFill>
             <a:prstDash val="solid"/>
           </a:ln>
@@ -1833,7 +2100,7 @@
             <a:r>
               <a:rPr lang="en-US" sz="1400" b="1" dirty="0">
                 <a:solidFill>
-                  <a:srgbClr val="1F2933"/>
+                  <a:srgbClr val="102A43"/>
                 </a:solidFill>
                 <a:latin typeface="Calibri" pitchFamily="34" charset="0"/>
                 <a:ea typeface="Calibri" pitchFamily="34" charset="-122"/>
@@ -1872,7 +2139,7 @@
             <a:r>
               <a:rPr lang="en-US" sz="1050" dirty="0">
                 <a:solidFill>
-                  <a:srgbClr val="52606D"/>
+                  <a:srgbClr val="486581"/>
                 </a:solidFill>
                 <a:latin typeface="Calibri" pitchFamily="34" charset="0"/>
                 <a:ea typeface="Calibri" pitchFamily="34" charset="-122"/>
@@ -1899,11 +2166,11 @@
             <a:avLst/>
           </a:prstGeom>
           <a:solidFill>
-            <a:srgbClr val="D9822B"/>
+            <a:srgbClr val="2680C2"/>
           </a:solidFill>
           <a:ln w="12700">
             <a:solidFill>
-              <a:srgbClr val="D9822B"/>
+              <a:srgbClr val="2680C2"/>
             </a:solidFill>
             <a:prstDash val="solid"/>
           </a:ln>
@@ -1960,7 +2227,7 @@
             <a:r>
               <a:rPr lang="en-US" sz="1400" b="1" dirty="0">
                 <a:solidFill>
-                  <a:srgbClr val="1F2933"/>
+                  <a:srgbClr val="102A43"/>
                 </a:solidFill>
                 <a:latin typeface="Calibri" pitchFamily="34" charset="0"/>
                 <a:ea typeface="Calibri" pitchFamily="34" charset="-122"/>
@@ -1999,7 +2266,7 @@
             <a:r>
               <a:rPr lang="en-US" sz="1050" dirty="0">
                 <a:solidFill>
-                  <a:srgbClr val="52606D"/>
+                  <a:srgbClr val="486581"/>
                 </a:solidFill>
                 <a:latin typeface="Calibri" pitchFamily="34" charset="0"/>
                 <a:ea typeface="Calibri" pitchFamily="34" charset="-122"/>
@@ -2026,11 +2293,11 @@
             <a:avLst/>
           </a:prstGeom>
           <a:solidFill>
-            <a:srgbClr val="D9822B"/>
+            <a:srgbClr val="2680C2"/>
           </a:solidFill>
           <a:ln w="12700">
             <a:solidFill>
-              <a:srgbClr val="D9822B"/>
+              <a:srgbClr val="2680C2"/>
             </a:solidFill>
             <a:prstDash val="solid"/>
           </a:ln>
@@ -2087,7 +2354,7 @@
             <a:r>
               <a:rPr lang="en-US" sz="1400" b="1" dirty="0">
                 <a:solidFill>
-                  <a:srgbClr val="1F2933"/>
+                  <a:srgbClr val="102A43"/>
                 </a:solidFill>
                 <a:latin typeface="Calibri" pitchFamily="34" charset="0"/>
                 <a:ea typeface="Calibri" pitchFamily="34" charset="-122"/>
@@ -2126,13 +2393,13 @@
             <a:r>
               <a:rPr lang="en-US" sz="1050" dirty="0">
                 <a:solidFill>
-                  <a:srgbClr val="52606D"/>
-                </a:solidFill>
-                <a:latin typeface="Calibri" pitchFamily="34" charset="0"/>
-                <a:ea typeface="Calibri" pitchFamily="34" charset="-122"/>
-                <a:cs typeface="Calibri" pitchFamily="34" charset="-120"/>
-              </a:rPr>
-              <a:t>Which verb failed? Which hop? Which rung? The map chooses the first command in an incident; the runbook finishes the job.</a:t>
+                  <a:srgbClr val="486581"/>
+                </a:solidFill>
+                <a:latin typeface="Calibri" pitchFamily="34" charset="0"/>
+                <a:ea typeface="Calibri" pitchFamily="34" charset="-122"/>
+                <a:cs typeface="Calibri" pitchFamily="34" charset="-120"/>
+              </a:rPr>
+              <a:t>Which door? which lens? which verb? Orientation is most of an incident's length — the model shortens the gap a runbook cannot.</a:t>
             </a:r>
             <a:endParaRPr lang="en-US" sz="1050" dirty="0"/>
           </a:p>
@@ -2153,11 +2420,11 @@
             <a:avLst/>
           </a:prstGeom>
           <a:solidFill>
-            <a:srgbClr val="D9822B"/>
+            <a:srgbClr val="2680C2"/>
           </a:solidFill>
           <a:ln w="12700">
             <a:solidFill>
-              <a:srgbClr val="D9822B"/>
+              <a:srgbClr val="2680C2"/>
             </a:solidFill>
             <a:prstDash val="solid"/>
           </a:ln>
@@ -2214,7 +2481,7 @@
             <a:r>
               <a:rPr lang="en-US" sz="1400" b="1" dirty="0">
                 <a:solidFill>
-                  <a:srgbClr val="1F2933"/>
+                  <a:srgbClr val="102A43"/>
                 </a:solidFill>
                 <a:latin typeface="Calibri" pitchFamily="34" charset="0"/>
                 <a:ea typeface="Calibri" pitchFamily="34" charset="-122"/>
@@ -2253,13 +2520,13 @@
             <a:r>
               <a:rPr lang="en-US" sz="1050" dirty="0">
                 <a:solidFill>
-                  <a:srgbClr val="52606D"/>
-                </a:solidFill>
-                <a:latin typeface="Calibri" pitchFamily="34" charset="0"/>
-                <a:ea typeface="Calibri" pitchFamily="34" charset="-122"/>
-                <a:cs typeface="Calibri" pitchFamily="34" charset="-120"/>
-              </a:rPr>
-              <a:t>Runbooks are a list; a model is a way to navigate the list. Onboarding becomes three pictures and the habit of asking their questions.</a:t>
+                  <a:srgbClr val="486581"/>
+                </a:solidFill>
+                <a:latin typeface="Calibri" pitchFamily="34" charset="0"/>
+                <a:ea typeface="Calibri" pitchFamily="34" charset="-122"/>
+                <a:cs typeface="Calibri" pitchFamily="34" charset="-120"/>
+              </a:rPr>
+              <a:t>Runbooks are a list; a model is how you navigate the list. Onboarding becomes four pictures and the habit of asking their questions.</a:t>
             </a:r>
             <a:endParaRPr lang="en-US" sz="1050" dirty="0"/>
           </a:p>
@@ -2292,13 +2559,13 @@
             <a:r>
               <a:rPr lang="en-US" sz="1100" i="1" dirty="0">
                 <a:solidFill>
-                  <a:srgbClr val="52606D"/>
-                </a:solidFill>
-                <a:latin typeface="Calibri" pitchFamily="34" charset="0"/>
-                <a:ea typeface="Calibri" pitchFamily="34" charset="-122"/>
-                <a:cs typeface="Calibri" pitchFamily="34" charset="-120"/>
-              </a:rPr>
-              <a:t>The failure galleries — nearly thirty documented misreadings — are the evidence: every one is a correct number read at the wrong door, through the wrong lens, or a road away from the fault.</a:t>
+                  <a:srgbClr val="486581"/>
+                </a:solidFill>
+                <a:latin typeface="Calibri" pitchFamily="34" charset="0"/>
+                <a:ea typeface="Calibri" pitchFamily="34" charset="-122"/>
+                <a:cs typeface="Calibri" pitchFamily="34" charset="-120"/>
+              </a:rPr>
+              <a:t>The failure galleries — nearly forty documented misreadings — are the evidence: every one is a correct number read at the wrong door, through the wrong lens, or a road away from the fault.</a:t>
             </a:r>
             <a:endParaRPr lang="en-US" sz="1100" dirty="0"/>
           </a:p>
@@ -2345,7 +2612,7 @@
         <p:spPr>
           <a:xfrm>
             <a:off x="457200" y="320040"/>
-            <a:ext cx="8229600" cy="640080"/>
+            <a:ext cx="8229600" cy="566928"/>
           </a:xfrm>
           <a:prstGeom prst="rect">
             <a:avLst/>
@@ -2363,7 +2630,7 @@
             <a:r>
               <a:rPr lang="en-US" sz="3200" b="1" dirty="0">
                 <a:solidFill>
-                  <a:srgbClr val="1F2933"/>
+                  <a:srgbClr val="102A43"/>
                 </a:solidFill>
                 <a:latin typeface="Cambria" pitchFamily="34" charset="0"/>
                 <a:ea typeface="Cambria" pitchFamily="34" charset="-122"/>
@@ -2402,13 +2669,13 @@
             <a:r>
               <a:rPr lang="en-US" sz="1300" i="1" dirty="0">
                 <a:solidFill>
-                  <a:srgbClr val="52606D"/>
-                </a:solidFill>
-                <a:latin typeface="Calibri" pitchFamily="34" charset="0"/>
-                <a:ea typeface="Calibri" pitchFamily="34" charset="-122"/>
-                <a:cs typeface="Calibri" pitchFamily="34" charset="-120"/>
-              </a:rPr>
-              <a:t>The recipe behind all three of ours — six moves, in order.</a:t>
+                  <a:srgbClr val="486581"/>
+                </a:solidFill>
+                <a:latin typeface="Calibri" pitchFamily="34" charset="0"/>
+                <a:ea typeface="Calibri" pitchFamily="34" charset="-122"/>
+                <a:cs typeface="Calibri" pitchFamily="34" charset="-120"/>
+              </a:rPr>
+              <a:t>The recipe behind all four of ours — six moves, in order.</a:t>
             </a:r>
             <a:endParaRPr lang="en-US" sz="1300" dirty="0"/>
           </a:p>
@@ -2431,11 +2698,11 @@
             </a:avLst>
           </a:prstGeom>
           <a:solidFill>
-            <a:srgbClr val="E4E7EB"/>
+            <a:srgbClr val="F0F4F8"/>
           </a:solidFill>
           <a:ln w="12700">
             <a:solidFill>
-              <a:srgbClr val="E4E7EB"/>
+              <a:srgbClr val="D9E2EC"/>
             </a:solidFill>
             <a:prstDash val="solid"/>
           </a:ln>
@@ -2456,11 +2723,11 @@
             <a:avLst/>
           </a:prstGeom>
           <a:solidFill>
-            <a:srgbClr val="1F2933"/>
+            <a:srgbClr val="102A43"/>
           </a:solidFill>
           <a:ln w="12700">
             <a:solidFill>
-              <a:srgbClr val="1F2933"/>
+              <a:srgbClr val="102A43"/>
             </a:solidFill>
             <a:prstDash val="solid"/>
           </a:ln>
@@ -2491,7 +2758,7 @@
               <a:buNone/>
             </a:pPr>
             <a:r>
-              <a:rPr lang="en-US" sz="1600" b="1" dirty="0">
+              <a:rPr lang="en-US" sz="1200" b="1" dirty="0">
                 <a:solidFill>
                   <a:srgbClr val="FFFFFF"/>
                 </a:solidFill>
@@ -2501,7 +2768,7 @@
               </a:rPr>
               <a:t>1</a:t>
             </a:r>
-            <a:endParaRPr lang="en-US" sz="1600" dirty="0"/>
+            <a:endParaRPr lang="en-US" sz="1200" dirty="0"/>
           </a:p>
         </p:txBody>
       </p:sp>
@@ -2532,7 +2799,7 @@
             <a:r>
               <a:rPr lang="en-US" sz="1300" b="1" dirty="0">
                 <a:solidFill>
-                  <a:srgbClr val="1F2933"/>
+                  <a:srgbClr val="102A43"/>
                 </a:solidFill>
                 <a:latin typeface="Calibri" pitchFamily="34" charset="0"/>
                 <a:ea typeface="Calibri" pitchFamily="34" charset="-122"/>
@@ -2571,13 +2838,13 @@
             <a:r>
               <a:rPr lang="en-US" sz="1000" dirty="0">
                 <a:solidFill>
-                  <a:srgbClr val="52606D"/>
-                </a:solidFill>
-                <a:latin typeface="Calibri" pitchFamily="34" charset="0"/>
-                <a:ea typeface="Calibri" pitchFamily="34" charset="-122"/>
-                <a:cs typeface="Calibri" pitchFamily="34" charset="-120"/>
-              </a:rPr>
-              <a:t>“Kubernetes is a control system; to run one workload it needs exactly three things.” Start from what the system is for, not from its features.</a:t>
+                  <a:srgbClr val="486581"/>
+                </a:solidFill>
+                <a:latin typeface="Calibri" pitchFamily="34" charset="0"/>
+                <a:ea typeface="Calibri" pitchFamily="34" charset="-122"/>
+                <a:cs typeface="Calibri" pitchFamily="34" charset="-120"/>
+              </a:rPr>
+              <a:t>“Kubernetes is a control system; to run one workload it needs exactly three things.” Start from what the system is for, not from its feature list.</a:t>
             </a:r>
             <a:endParaRPr lang="en-US" sz="1000" dirty="0"/>
           </a:p>
@@ -2600,11 +2867,11 @@
             </a:avLst>
           </a:prstGeom>
           <a:solidFill>
-            <a:srgbClr val="E4E7EB"/>
+            <a:srgbClr val="F0F4F8"/>
           </a:solidFill>
           <a:ln w="12700">
             <a:solidFill>
-              <a:srgbClr val="E4E7EB"/>
+              <a:srgbClr val="D9E2EC"/>
             </a:solidFill>
             <a:prstDash val="solid"/>
           </a:ln>
@@ -2625,11 +2892,11 @@
             <a:avLst/>
           </a:prstGeom>
           <a:solidFill>
-            <a:srgbClr val="1F2933"/>
+            <a:srgbClr val="102A43"/>
           </a:solidFill>
           <a:ln w="12700">
             <a:solidFill>
-              <a:srgbClr val="1F2933"/>
+              <a:srgbClr val="102A43"/>
             </a:solidFill>
             <a:prstDash val="solid"/>
           </a:ln>
@@ -2660,7 +2927,7 @@
               <a:buNone/>
             </a:pPr>
             <a:r>
-              <a:rPr lang="en-US" sz="1600" b="1" dirty="0">
+              <a:rPr lang="en-US" sz="1200" b="1" dirty="0">
                 <a:solidFill>
                   <a:srgbClr val="FFFFFF"/>
                 </a:solidFill>
@@ -2670,7 +2937,7 @@
               </a:rPr>
               <a:t>2</a:t>
             </a:r>
-            <a:endParaRPr lang="en-US" sz="1600" dirty="0"/>
+            <a:endParaRPr lang="en-US" sz="1200" dirty="0"/>
           </a:p>
         </p:txBody>
       </p:sp>
@@ -2701,7 +2968,7 @@
             <a:r>
               <a:rPr lang="en-US" sz="1300" b="1" dirty="0">
                 <a:solidFill>
-                  <a:srgbClr val="1F2933"/>
+                  <a:srgbClr val="102A43"/>
                 </a:solidFill>
                 <a:latin typeface="Calibri" pitchFamily="34" charset="0"/>
                 <a:ea typeface="Calibri" pitchFamily="34" charset="-122"/>
@@ -2740,13 +3007,13 @@
             <a:r>
               <a:rPr lang="en-US" sz="1000" dirty="0">
                 <a:solidFill>
-                  <a:srgbClr val="52606D"/>
-                </a:solidFill>
-                <a:latin typeface="Calibri" pitchFamily="34" charset="0"/>
-                <a:ea typeface="Calibri" pitchFamily="34" charset="-122"/>
-                <a:cs typeface="Calibri" pitchFamily="34" charset="-120"/>
-              </a:rPr>
-              <a:t>Three doors, three lenses, five verbs — and say why there is no N+1. If a fourth thing fits, the set was not complete; if it is a refinement of one, the set holds.</a:t>
+                  <a:srgbClr val="486581"/>
+                </a:solidFill>
+                <a:latin typeface="Calibri" pitchFamily="34" charset="0"/>
+                <a:ea typeface="Calibri" pitchFamily="34" charset="-122"/>
+                <a:cs typeface="Calibri" pitchFamily="34" charset="-120"/>
+              </a:rPr>
+              <a:t>Three doors, three lenses, five verbs — and say why there is no N+1. If a fourth fits, the set was not complete; if it is a refinement of one, the set holds.</a:t>
             </a:r>
             <a:endParaRPr lang="en-US" sz="1000" dirty="0"/>
           </a:p>
@@ -2769,11 +3036,11 @@
             </a:avLst>
           </a:prstGeom>
           <a:solidFill>
-            <a:srgbClr val="E4E7EB"/>
+            <a:srgbClr val="F0F4F8"/>
           </a:solidFill>
           <a:ln w="12700">
             <a:solidFill>
-              <a:srgbClr val="E4E7EB"/>
+              <a:srgbClr val="D9E2EC"/>
             </a:solidFill>
             <a:prstDash val="solid"/>
           </a:ln>
@@ -2794,11 +3061,11 @@
             <a:avLst/>
           </a:prstGeom>
           <a:solidFill>
-            <a:srgbClr val="1F2933"/>
+            <a:srgbClr val="102A43"/>
           </a:solidFill>
           <a:ln w="12700">
             <a:solidFill>
-              <a:srgbClr val="1F2933"/>
+              <a:srgbClr val="102A43"/>
             </a:solidFill>
             <a:prstDash val="solid"/>
           </a:ln>
@@ -2829,7 +3096,7 @@
               <a:buNone/>
             </a:pPr>
             <a:r>
-              <a:rPr lang="en-US" sz="1600" b="1" dirty="0">
+              <a:rPr lang="en-US" sz="1200" b="1" dirty="0">
                 <a:solidFill>
                   <a:srgbClr val="FFFFFF"/>
                 </a:solidFill>
@@ -2839,7 +3106,7 @@
               </a:rPr>
               <a:t>3</a:t>
             </a:r>
-            <a:endParaRPr lang="en-US" sz="1600" dirty="0"/>
+            <a:endParaRPr lang="en-US" sz="1200" dirty="0"/>
           </a:p>
         </p:txBody>
       </p:sp>
@@ -2870,7 +3137,7 @@
             <a:r>
               <a:rPr lang="en-US" sz="1300" b="1" dirty="0">
                 <a:solidFill>
-                  <a:srgbClr val="1F2933"/>
+                  <a:srgbClr val="102A43"/>
                 </a:solidFill>
                 <a:latin typeface="Calibri" pitchFamily="34" charset="0"/>
                 <a:ea typeface="Calibri" pitchFamily="34" charset="-122"/>
@@ -2909,7 +3176,7 @@
             <a:r>
               <a:rPr lang="en-US" sz="1000" dirty="0">
                 <a:solidFill>
-                  <a:srgbClr val="52606D"/>
+                  <a:srgbClr val="486581"/>
                 </a:solidFill>
                 <a:latin typeface="Calibri" pitchFamily="34" charset="0"/>
                 <a:ea typeface="Calibri" pitchFamily="34" charset="-122"/>
@@ -2938,11 +3205,11 @@
             </a:avLst>
           </a:prstGeom>
           <a:solidFill>
-            <a:srgbClr val="E4E7EB"/>
+            <a:srgbClr val="F0F4F8"/>
           </a:solidFill>
           <a:ln w="12700">
             <a:solidFill>
-              <a:srgbClr val="E4E7EB"/>
+              <a:srgbClr val="D9E2EC"/>
             </a:solidFill>
             <a:prstDash val="solid"/>
           </a:ln>
@@ -2963,11 +3230,11 @@
             <a:avLst/>
           </a:prstGeom>
           <a:solidFill>
-            <a:srgbClr val="1F2933"/>
+            <a:srgbClr val="102A43"/>
           </a:solidFill>
           <a:ln w="12700">
             <a:solidFill>
-              <a:srgbClr val="1F2933"/>
+              <a:srgbClr val="102A43"/>
             </a:solidFill>
             <a:prstDash val="solid"/>
           </a:ln>
@@ -2998,7 +3265,7 @@
               <a:buNone/>
             </a:pPr>
             <a:r>
-              <a:rPr lang="en-US" sz="1600" b="1" dirty="0">
+              <a:rPr lang="en-US" sz="1200" b="1" dirty="0">
                 <a:solidFill>
                   <a:srgbClr val="FFFFFF"/>
                 </a:solidFill>
@@ -3008,7 +3275,7 @@
               </a:rPr>
               <a:t>4</a:t>
             </a:r>
-            <a:endParaRPr lang="en-US" sz="1600" dirty="0"/>
+            <a:endParaRPr lang="en-US" sz="1200" dirty="0"/>
           </a:p>
         </p:txBody>
       </p:sp>
@@ -3039,7 +3306,7 @@
             <a:r>
               <a:rPr lang="en-US" sz="1300" b="1" dirty="0">
                 <a:solidFill>
-                  <a:srgbClr val="1F2933"/>
+                  <a:srgbClr val="102A43"/>
                 </a:solidFill>
                 <a:latin typeface="Calibri" pitchFamily="34" charset="0"/>
                 <a:ea typeface="Calibri" pitchFamily="34" charset="-122"/>
@@ -3078,13 +3345,13 @@
             <a:r>
               <a:rPr lang="en-US" sz="1000" dirty="0">
                 <a:solidFill>
-                  <a:srgbClr val="52606D"/>
-                </a:solidFill>
-                <a:latin typeface="Calibri" pitchFamily="34" charset="0"/>
-                <a:ea typeface="Calibri" pitchFamily="34" charset="-122"/>
-                <a:cs typeface="Calibri" pitchFamily="34" charset="-120"/>
-              </a:rPr>
-              <a:t>A gallery of incidents people remember, each explained as a correct number seen through the wrong part. Trust comes from the gallery, not the diagram.</a:t>
+                  <a:srgbClr val="486581"/>
+                </a:solidFill>
+                <a:latin typeface="Calibri" pitchFamily="34" charset="0"/>
+                <a:ea typeface="Calibri" pitchFamily="34" charset="-122"/>
+                <a:cs typeface="Calibri" pitchFamily="34" charset="-120"/>
+              </a:rPr>
+              <a:t>A gallery of incidents people lived through, each explained as a correct number seen through the wrong part. Trust comes from the gallery, not the diagram.</a:t>
             </a:r>
             <a:endParaRPr lang="en-US" sz="1000" dirty="0"/>
           </a:p>
@@ -3107,11 +3374,11 @@
             </a:avLst>
           </a:prstGeom>
           <a:solidFill>
-            <a:srgbClr val="E4E7EB"/>
+            <a:srgbClr val="F0F4F8"/>
           </a:solidFill>
           <a:ln w="12700">
             <a:solidFill>
-              <a:srgbClr val="E4E7EB"/>
+              <a:srgbClr val="D9E2EC"/>
             </a:solidFill>
             <a:prstDash val="solid"/>
           </a:ln>
@@ -3132,11 +3399,11 @@
             <a:avLst/>
           </a:prstGeom>
           <a:solidFill>
-            <a:srgbClr val="1F2933"/>
+            <a:srgbClr val="102A43"/>
           </a:solidFill>
           <a:ln w="12700">
             <a:solidFill>
-              <a:srgbClr val="1F2933"/>
+              <a:srgbClr val="102A43"/>
             </a:solidFill>
             <a:prstDash val="solid"/>
           </a:ln>
@@ -3167,7 +3434,7 @@
               <a:buNone/>
             </a:pPr>
             <a:r>
-              <a:rPr lang="en-US" sz="1600" b="1" dirty="0">
+              <a:rPr lang="en-US" sz="1200" b="1" dirty="0">
                 <a:solidFill>
                   <a:srgbClr val="FFFFFF"/>
                 </a:solidFill>
@@ -3177,7 +3444,7 @@
               </a:rPr>
               <a:t>5</a:t>
             </a:r>
-            <a:endParaRPr lang="en-US" sz="1600" dirty="0"/>
+            <a:endParaRPr lang="en-US" sz="1200" dirty="0"/>
           </a:p>
         </p:txBody>
       </p:sp>
@@ -3208,13 +3475,13 @@
             <a:r>
               <a:rPr lang="en-US" sz="1300" b="1" dirty="0">
                 <a:solidFill>
-                  <a:srgbClr val="1F2933"/>
-                </a:solidFill>
-                <a:latin typeface="Calibri" pitchFamily="34" charset="0"/>
-                <a:ea typeface="Calibri" pitchFamily="34" charset="-122"/>
-                <a:cs typeface="Calibri" pitchFamily="34" charset="-120"/>
-              </a:rPr>
-              <a:t>Attach the tactics</a:t>
+                  <a:srgbClr val="102A43"/>
+                </a:solidFill>
+                <a:latin typeface="Calibri" pitchFamily="34" charset="0"/>
+                <a:ea typeface="Calibri" pitchFamily="34" charset="-122"/>
+                <a:cs typeface="Calibri" pitchFamily="34" charset="-120"/>
+              </a:rPr>
+              <a:t>Attach the tactics — behind it</a:t>
             </a:r>
             <a:endParaRPr lang="en-US" sz="1300" dirty="0"/>
           </a:p>
@@ -3247,13 +3514,13 @@
             <a:r>
               <a:rPr lang="en-US" sz="1000" dirty="0">
                 <a:solidFill>
-                  <a:srgbClr val="52606D"/>
-                </a:solidFill>
-                <a:latin typeface="Calibri" pitchFamily="34" charset="0"/>
-                <a:ea typeface="Calibri" pitchFamily="34" charset="-122"/>
-                <a:cs typeface="Calibri" pitchFamily="34" charset="-120"/>
-              </a:rPr>
-              <a:t>The commands, the console output, the artifact table, a script. A model people can do — verbs.sh, the two-lens query — is one they keep.</a:t>
+                  <a:srgbClr val="486581"/>
+                </a:solidFill>
+                <a:latin typeface="Calibri" pitchFamily="34" charset="0"/>
+                <a:ea typeface="Calibri" pitchFamily="34" charset="-122"/>
+                <a:cs typeface="Calibri" pitchFamily="34" charset="-120"/>
+              </a:rPr>
+              <a:t>Commands, console output, the artifact table, a script. The tactics are the payoff for orienting; they are never the way in.</a:t>
             </a:r>
             <a:endParaRPr lang="en-US" sz="1000" dirty="0"/>
           </a:p>
@@ -3276,11 +3543,11 @@
             </a:avLst>
           </a:prstGeom>
           <a:solidFill>
-            <a:srgbClr val="E4E7EB"/>
+            <a:srgbClr val="F0F4F8"/>
           </a:solidFill>
           <a:ln w="12700">
             <a:solidFill>
-              <a:srgbClr val="E4E7EB"/>
+              <a:srgbClr val="D9E2EC"/>
             </a:solidFill>
             <a:prstDash val="solid"/>
           </a:ln>
@@ -3301,11 +3568,11 @@
             <a:avLst/>
           </a:prstGeom>
           <a:solidFill>
-            <a:srgbClr val="D9822B"/>
+            <a:srgbClr val="2680C2"/>
           </a:solidFill>
           <a:ln w="12700">
             <a:solidFill>
-              <a:srgbClr val="D9822B"/>
+              <a:srgbClr val="2680C2"/>
             </a:solidFill>
             <a:prstDash val="solid"/>
           </a:ln>
@@ -3336,7 +3603,7 @@
               <a:buNone/>
             </a:pPr>
             <a:r>
-              <a:rPr lang="en-US" sz="1600" b="1" dirty="0">
+              <a:rPr lang="en-US" sz="1200" b="1" dirty="0">
                 <a:solidFill>
                   <a:srgbClr val="FFFFFF"/>
                 </a:solidFill>
@@ -3346,7 +3613,7 @@
               </a:rPr>
               <a:t>6</a:t>
             </a:r>
-            <a:endParaRPr lang="en-US" sz="1600" dirty="0"/>
+            <a:endParaRPr lang="en-US" sz="1200" dirty="0"/>
           </a:p>
         </p:txBody>
       </p:sp>
@@ -3377,7 +3644,7 @@
             <a:r>
               <a:rPr lang="en-US" sz="1300" b="1" dirty="0">
                 <a:solidFill>
-                  <a:srgbClr val="1F2933"/>
+                  <a:srgbClr val="102A43"/>
                 </a:solidFill>
                 <a:latin typeface="Calibri" pitchFamily="34" charset="0"/>
                 <a:ea typeface="Calibri" pitchFamily="34" charset="-122"/>
@@ -3416,13 +3683,13 @@
             <a:r>
               <a:rPr lang="en-US" sz="1000" dirty="0">
                 <a:solidFill>
-                  <a:srgbClr val="52606D"/>
-                </a:solidFill>
-                <a:latin typeface="Calibri" pitchFamily="34" charset="0"/>
-                <a:ea typeface="Calibri" pitchFamily="34" charset="-122"/>
-                <a:cs typeface="Calibri" pitchFamily="34" charset="-120"/>
-              </a:rPr>
-              <a:t>Short enough to say in a channel: “that’s a Door 2 problem”, “which verb failed?”. A model without a name cannot be asked for.</a:t>
+                  <a:srgbClr val="486581"/>
+                </a:solidFill>
+                <a:latin typeface="Calibri" pitchFamily="34" charset="0"/>
+                <a:ea typeface="Calibri" pitchFamily="34" charset="-122"/>
+                <a:cs typeface="Calibri" pitchFamily="34" charset="-120"/>
+              </a:rPr>
+              <a:t>Short enough to say out loud: “that’s a Door 2 problem”, “which verb failed?”. A model without a name cannot be asked for.</a:t>
             </a:r>
             <a:endParaRPr lang="en-US" sz="1000" dirty="0"/>
           </a:p>
@@ -3455,7 +3722,7 @@
             <a:r>
               <a:rPr lang="en-US" sz="1100" i="1" dirty="0">
                 <a:solidFill>
-                  <a:srgbClr val="B86A1E"/>
+                  <a:srgbClr val="0A558C"/>
                 </a:solidFill>
                 <a:latin typeface="Calibri" pitchFamily="34" charset="0"/>
                 <a:ea typeface="Calibri" pitchFamily="34" charset="-122"/>
@@ -3508,7 +3775,7 @@
         <p:spPr>
           <a:xfrm>
             <a:off x="457200" y="320040"/>
-            <a:ext cx="8229600" cy="640080"/>
+            <a:ext cx="8229600" cy="566928"/>
           </a:xfrm>
           <a:prstGeom prst="rect">
             <a:avLst/>
@@ -3526,7 +3793,7 @@
             <a:r>
               <a:rPr lang="en-US" sz="3200" b="1" dirty="0">
                 <a:solidFill>
-                  <a:srgbClr val="1F2933"/>
+                  <a:srgbClr val="102A43"/>
                 </a:solidFill>
                 <a:latin typeface="Cambria" pitchFamily="34" charset="0"/>
                 <a:ea typeface="Cambria" pitchFamily="34" charset="-122"/>
@@ -3565,13 +3832,13 @@
             <a:r>
               <a:rPr lang="en-US" sz="1300" i="1" dirty="0">
                 <a:solidFill>
-                  <a:srgbClr val="52606D"/>
-                </a:solidFill>
-                <a:latin typeface="Calibri" pitchFamily="34" charset="0"/>
-                <a:ea typeface="Calibri" pitchFamily="34" charset="-122"/>
-                <a:cs typeface="Calibri" pitchFamily="34" charset="-120"/>
-              </a:rPr>
-              <a:t>Adoption is not a launch — it is meeting the model at the moment of need, in the tools, and in the words people use.</a:t>
+                  <a:srgbClr val="486581"/>
+                </a:solidFill>
+                <a:latin typeface="Calibri" pitchFamily="34" charset="0"/>
+                <a:ea typeface="Calibri" pitchFamily="34" charset="-122"/>
+                <a:cs typeface="Calibri" pitchFamily="34" charset="-120"/>
+              </a:rPr>
+              <a:t>A model is an orientation tool, not an instruction. You cannot mandate a way of seeing — you can only show it to someone who is lost.</a:t>
             </a:r>
             <a:endParaRPr lang="en-US" sz="1300" dirty="0"/>
           </a:p>
@@ -3586,617 +3853,1215 @@
         <p:spPr>
           <a:xfrm>
             <a:off x="457200" y="1371600"/>
-            <a:ext cx="457200" cy="457200"/>
-          </a:xfrm>
-          <a:prstGeom prst="ellipse">
-            <a:avLst/>
+            <a:ext cx="4023360" cy="2359152"/>
+          </a:xfrm>
+          <a:prstGeom prst="roundRect">
+            <a:avLst>
+              <a:gd name="adj" fmla="val 2713"/>
+            </a:avLst>
           </a:prstGeom>
           <a:solidFill>
-            <a:srgbClr val="1F2933"/>
+            <a:srgbClr val="102A43"/>
           </a:solidFill>
           <a:ln w="12700">
             <a:solidFill>
-              <a:srgbClr val="1F2933"/>
+              <a:srgbClr val="102A43"/>
             </a:solidFill>
             <a:prstDash val="solid"/>
           </a:ln>
         </p:spPr>
       </p:sp>
-      <p:pic>
-        <p:nvPicPr>
-          <p:cNvPr id="5" name="Image 0" descr="preencoded.png">    </p:cNvPr>
-          <p:cNvPicPr>
-            <a:picLocks noChangeAspect="1"/>
-          </p:cNvPicPr>
-          <p:nvPr/>
-        </p:nvPicPr>
-        <p:blipFill>
-          <a:blip r:embed="rId1"/>
-          <a:stretch>
-            <a:fillRect/>
-          </a:stretch>
-        </p:blipFill>
-        <p:spPr>
-          <a:xfrm>
-            <a:off x="566928" y="1481328"/>
-            <a:ext cx="237744" cy="237744"/>
-          </a:xfrm>
-          <a:prstGeom prst="rect">
-            <a:avLst/>
-          </a:prstGeom>
-        </p:spPr>
-      </p:pic>
-      <p:sp>
-        <p:nvSpPr>
-          <p:cNvPr id="6" name="Text 3"/>
-          <p:cNvSpPr txBox="1"/>
-          <p:nvPr/>
-        </p:nvSpPr>
-        <p:spPr>
-          <a:xfrm>
-            <a:off x="1024128" y="1371600"/>
-            <a:ext cx="2084832" cy="457200"/>
-          </a:xfrm>
-          <a:prstGeom prst="rect">
-            <a:avLst/>
-          </a:prstGeom>
-          <a:noFill/>
-          <a:ln/>
-        </p:spPr>
-        <p:txBody>
-          <a:bodyPr wrap="square" lIns="0" tIns="0" rIns="0" bIns="0" rtlCol="0" anchor="ctr"/>
-          <a:lstStyle/>
-          <a:p>
-            <a:pPr indent="0" marL="0">
-              <a:buNone/>
-            </a:pPr>
-            <a:r>
-              <a:rPr lang="en-US" sz="1300" b="1" dirty="0">
-                <a:solidFill>
-                  <a:srgbClr val="1F2933"/>
-                </a:solidFill>
-                <a:latin typeface="Calibri" pitchFamily="34" charset="0"/>
-                <a:ea typeface="Calibri" pitchFamily="34" charset="-122"/>
-                <a:cs typeface="Calibri" pitchFamily="34" charset="-120"/>
-              </a:rPr>
-              <a:t>Meet it at the moment of need</a:t>
-            </a:r>
-            <a:endParaRPr lang="en-US" sz="1300" dirty="0"/>
-          </a:p>
-        </p:txBody>
-      </p:sp>
-      <p:sp>
-        <p:nvSpPr>
-          <p:cNvPr id="7" name="Text 4"/>
-          <p:cNvSpPr txBox="1"/>
-          <p:nvPr/>
-        </p:nvSpPr>
-        <p:spPr>
-          <a:xfrm>
-            <a:off x="457200" y="1920240"/>
-            <a:ext cx="2651760" cy="2148840"/>
-          </a:xfrm>
-          <a:prstGeom prst="rect">
-            <a:avLst/>
-          </a:prstGeom>
-          <a:noFill/>
-          <a:ln/>
-        </p:spPr>
-        <p:txBody>
-          <a:bodyPr wrap="square" lIns="0" tIns="0" rIns="0" bIns="0" rtlCol="0" anchor="t"/>
-          <a:lstStyle/>
-          <a:p>
-            <a:pPr marL="152400" indent="-152400">
-              <a:spcAft>
-                <a:spcPts val="500"/>
-              </a:spcAft>
-              <a:buSzPct val="100000"/>
-              <a:buChar char="•"/>
-            </a:pPr>
-            <a:r>
-              <a:rPr lang="en-US" sz="1000" dirty="0">
-                <a:solidFill>
-                  <a:srgbClr val="52606D"/>
-                </a:solidFill>
-                <a:latin typeface="Calibri" pitchFamily="34" charset="0"/>
-                <a:ea typeface="Calibri" pitchFamily="34" charset="-122"/>
-                <a:cs typeface="Calibri" pitchFamily="34" charset="-120"/>
-              </a:rPr>
-              <a:t>Start Here reads Doors → Lenses → Roads on day one; the learning path says “keep it open during your first incident”.</a:t>
-            </a:r>
-            <a:endParaRPr lang="en-US" sz="1000" dirty="0"/>
-          </a:p>
-          <a:p>
-            <a:pPr marL="152400" indent="-152400">
-              <a:spcAft>
-                <a:spcPts val="500"/>
-              </a:spcAft>
-              <a:buSzPct val="100000"/>
-              <a:buChar char="•"/>
-            </a:pPr>
-            <a:r>
-              <a:rPr lang="en-US" sz="1000" dirty="0">
-                <a:solidFill>
-                  <a:srgbClr val="52606D"/>
-                </a:solidFill>
-                <a:latin typeface="Calibri" pitchFamily="34" charset="0"/>
-                <a:ea typeface="Calibri" pitchFamily="34" charset="-122"/>
-                <a:cs typeface="Calibri" pitchFamily="34" charset="-120"/>
-              </a:rPr>
-              <a:t>Every runbook carries a one-line hook — “this is verb 4”, “this is Lens 1” — so the model is met on the page someone is already on.</a:t>
-            </a:r>
-            <a:endParaRPr lang="en-US" sz="1000" dirty="0"/>
-          </a:p>
-          <a:p>
-            <a:pPr marL="152400" indent="-152400">
-              <a:spcAft>
-                <a:spcPts val="500"/>
-              </a:spcAft>
-              <a:buSzPct val="100000"/>
-              <a:buChar char="•"/>
-            </a:pPr>
-            <a:r>
-              <a:rPr lang="en-US" sz="1000" dirty="0">
-                <a:solidFill>
-                  <a:srgbClr val="52606D"/>
-                </a:solidFill>
-                <a:latin typeface="Calibri" pitchFamily="34" charset="0"/>
-                <a:ea typeface="Calibri" pitchFamily="34" charset="-122"/>
-                <a:cs typeface="Calibri" pitchFamily="34" charset="-120"/>
-              </a:rPr>
-              <a:t>The solutions index and the error index are the same map, indexed by task and by the string on the screen.</a:t>
-            </a:r>
-            <a:endParaRPr lang="en-US" sz="1000" dirty="0"/>
-          </a:p>
-        </p:txBody>
-      </p:sp>
-      <p:sp>
-        <p:nvSpPr>
-          <p:cNvPr id="8" name="Shape 5"/>
+      <p:sp>
+        <p:nvSpPr>
+          <p:cNvPr id="5" name="Text 3"/>
+          <p:cNvSpPr txBox="1"/>
+          <p:nvPr/>
+        </p:nvSpPr>
+        <p:spPr>
+          <a:xfrm>
+            <a:off x="658368" y="1481328"/>
+            <a:ext cx="3621024" cy="274320"/>
+          </a:xfrm>
+          <a:prstGeom prst="rect">
+            <a:avLst/>
+          </a:prstGeom>
+          <a:noFill/>
+          <a:ln/>
+        </p:spPr>
+        <p:txBody>
+          <a:bodyPr wrap="square" lIns="0" tIns="0" rIns="0" bIns="0" rtlCol="0" anchor="ctr"/>
+          <a:lstStyle/>
+          <a:p>
+            <a:pPr indent="0" marL="0">
+              <a:buNone/>
+            </a:pPr>
+            <a:r>
+              <a:rPr lang="en-US" sz="1250" b="1" dirty="0">
+                <a:solidFill>
+                  <a:srgbClr val="FFFFFF"/>
+                </a:solidFill>
+                <a:latin typeface="Calibri" pitchFamily="34" charset="0"/>
+                <a:ea typeface="Calibri" pitchFamily="34" charset="-122"/>
+                <a:cs typeface="Calibri" pitchFamily="34" charset="-120"/>
+              </a:rPr>
+              <a:t>Orientation — the model</a:t>
+            </a:r>
+            <a:endParaRPr lang="en-US" sz="1250" dirty="0"/>
+          </a:p>
+        </p:txBody>
+      </p:sp>
+      <p:sp>
+        <p:nvSpPr>
+          <p:cNvPr id="6" name="Text 4"/>
+          <p:cNvSpPr txBox="1"/>
+          <p:nvPr/>
+        </p:nvSpPr>
+        <p:spPr>
+          <a:xfrm>
+            <a:off x="658368" y="1847088"/>
+            <a:ext cx="1051560" cy="219456"/>
+          </a:xfrm>
+          <a:prstGeom prst="rect">
+            <a:avLst/>
+          </a:prstGeom>
+          <a:noFill/>
+          <a:ln/>
+        </p:spPr>
+        <p:txBody>
+          <a:bodyPr wrap="square" lIns="0" tIns="0" rIns="0" bIns="0" rtlCol="0" anchor="ctr"/>
+          <a:lstStyle/>
+          <a:p>
+            <a:pPr indent="0" marL="0">
+              <a:buNone/>
+            </a:pPr>
+            <a:r>
+              <a:rPr lang="en-US" sz="800" b="1" spc="80" kern="0" dirty="0">
+                <a:solidFill>
+                  <a:srgbClr val="4098D7"/>
+                </a:solidFill>
+                <a:latin typeface="Calibri" pitchFamily="34" charset="0"/>
+                <a:ea typeface="Calibri" pitchFamily="34" charset="-122"/>
+                <a:cs typeface="Calibri" pitchFamily="34" charset="-120"/>
+              </a:rPr>
+              <a:t>ANSWERS</a:t>
+            </a:r>
+            <a:endParaRPr lang="en-US" sz="800" dirty="0"/>
+          </a:p>
+        </p:txBody>
+      </p:sp>
+      <p:sp>
+        <p:nvSpPr>
+          <p:cNvPr id="7" name="Text 5"/>
+          <p:cNvSpPr txBox="1"/>
+          <p:nvPr/>
+        </p:nvSpPr>
+        <p:spPr>
+          <a:xfrm>
+            <a:off x="1755648" y="1819656"/>
+            <a:ext cx="2523744" cy="384048"/>
+          </a:xfrm>
+          <a:prstGeom prst="rect">
+            <a:avLst/>
+          </a:prstGeom>
+          <a:noFill/>
+          <a:ln/>
+        </p:spPr>
+        <p:txBody>
+          <a:bodyPr wrap="square" lIns="0" tIns="0" rIns="0" bIns="0" rtlCol="0" anchor="ctr"/>
+          <a:lstStyle/>
+          <a:p>
+            <a:pPr indent="0" marL="0">
+              <a:buNone/>
+            </a:pPr>
+            <a:r>
+              <a:rPr lang="en-US" sz="1050" dirty="0">
+                <a:solidFill>
+                  <a:srgbClr val="D9E2EC"/>
+                </a:solidFill>
+                <a:latin typeface="Calibri" pitchFamily="34" charset="0"/>
+                <a:ea typeface="Calibri" pitchFamily="34" charset="-122"/>
+                <a:cs typeface="Calibri" pitchFamily="34" charset="-120"/>
+              </a:rPr>
+              <a:t>Where am I? What kind of problem is this?</a:t>
+            </a:r>
+            <a:endParaRPr lang="en-US" sz="1050" dirty="0"/>
+          </a:p>
+        </p:txBody>
+      </p:sp>
+      <p:sp>
+        <p:nvSpPr>
+          <p:cNvPr id="8" name="Text 6"/>
+          <p:cNvSpPr txBox="1"/>
+          <p:nvPr/>
+        </p:nvSpPr>
+        <p:spPr>
+          <a:xfrm>
+            <a:off x="658368" y="2304288"/>
+            <a:ext cx="1051560" cy="219456"/>
+          </a:xfrm>
+          <a:prstGeom prst="rect">
+            <a:avLst/>
+          </a:prstGeom>
+          <a:noFill/>
+          <a:ln/>
+        </p:spPr>
+        <p:txBody>
+          <a:bodyPr wrap="square" lIns="0" tIns="0" rIns="0" bIns="0" rtlCol="0" anchor="ctr"/>
+          <a:lstStyle/>
+          <a:p>
+            <a:pPr indent="0" marL="0">
+              <a:buNone/>
+            </a:pPr>
+            <a:r>
+              <a:rPr lang="en-US" sz="800" b="1" spc="80" kern="0" dirty="0">
+                <a:solidFill>
+                  <a:srgbClr val="4098D7"/>
+                </a:solidFill>
+                <a:latin typeface="Calibri" pitchFamily="34" charset="0"/>
+                <a:ea typeface="Calibri" pitchFamily="34" charset="-122"/>
+                <a:cs typeface="Calibri" pitchFamily="34" charset="-120"/>
+              </a:rPr>
+              <a:t>SPREADS BY</a:t>
+            </a:r>
+            <a:endParaRPr lang="en-US" sz="800" dirty="0"/>
+          </a:p>
+        </p:txBody>
+      </p:sp>
+      <p:sp>
+        <p:nvSpPr>
+          <p:cNvPr id="9" name="Text 7"/>
+          <p:cNvSpPr txBox="1"/>
+          <p:nvPr/>
+        </p:nvSpPr>
+        <p:spPr>
+          <a:xfrm>
+            <a:off x="1755648" y="2276856"/>
+            <a:ext cx="2523744" cy="384048"/>
+          </a:xfrm>
+          <a:prstGeom prst="rect">
+            <a:avLst/>
+          </a:prstGeom>
+          <a:noFill/>
+          <a:ln/>
+        </p:spPr>
+        <p:txBody>
+          <a:bodyPr wrap="square" lIns="0" tIns="0" rIns="0" bIns="0" rtlCol="0" anchor="ctr"/>
+          <a:lstStyle/>
+          <a:p>
+            <a:pPr indent="0" marL="0">
+              <a:buNone/>
+            </a:pPr>
+            <a:r>
+              <a:rPr lang="en-US" sz="1050" dirty="0">
+                <a:solidFill>
+                  <a:srgbClr val="D9E2EC"/>
+                </a:solidFill>
+                <a:latin typeface="Calibri" pitchFamily="34" charset="0"/>
+                <a:ea typeface="Calibri" pitchFamily="34" charset="-122"/>
+                <a:cs typeface="Calibri" pitchFamily="34" charset="-120"/>
+              </a:rPr>
+              <a:t>Being used out loud at the moment of confusion</a:t>
+            </a:r>
+            <a:endParaRPr lang="en-US" sz="1050" dirty="0"/>
+          </a:p>
+        </p:txBody>
+      </p:sp>
+      <p:sp>
+        <p:nvSpPr>
+          <p:cNvPr id="10" name="Text 8"/>
+          <p:cNvSpPr txBox="1"/>
+          <p:nvPr/>
+        </p:nvSpPr>
+        <p:spPr>
+          <a:xfrm>
+            <a:off x="658368" y="2761488"/>
+            <a:ext cx="1051560" cy="219456"/>
+          </a:xfrm>
+          <a:prstGeom prst="rect">
+            <a:avLst/>
+          </a:prstGeom>
+          <a:noFill/>
+          <a:ln/>
+        </p:spPr>
+        <p:txBody>
+          <a:bodyPr wrap="square" lIns="0" tIns="0" rIns="0" bIns="0" rtlCol="0" anchor="ctr"/>
+          <a:lstStyle/>
+          <a:p>
+            <a:pPr indent="0" marL="0">
+              <a:buNone/>
+            </a:pPr>
+            <a:r>
+              <a:rPr lang="en-US" sz="800" b="1" spc="80" kern="0" dirty="0">
+                <a:solidFill>
+                  <a:srgbClr val="4098D7"/>
+                </a:solidFill>
+                <a:latin typeface="Calibri" pitchFamily="34" charset="0"/>
+                <a:ea typeface="Calibri" pitchFamily="34" charset="-122"/>
+                <a:cs typeface="Calibri" pitchFamily="34" charset="-120"/>
+              </a:rPr>
+              <a:t>ADOPTED WHEN</a:t>
+            </a:r>
+            <a:endParaRPr lang="en-US" sz="800" dirty="0"/>
+          </a:p>
+        </p:txBody>
+      </p:sp>
+      <p:sp>
+        <p:nvSpPr>
+          <p:cNvPr id="11" name="Text 9"/>
+          <p:cNvSpPr txBox="1"/>
+          <p:nvPr/>
+        </p:nvSpPr>
+        <p:spPr>
+          <a:xfrm>
+            <a:off x="1755648" y="2734056"/>
+            <a:ext cx="2523744" cy="384048"/>
+          </a:xfrm>
+          <a:prstGeom prst="rect">
+            <a:avLst/>
+          </a:prstGeom>
+          <a:noFill/>
+          <a:ln/>
+        </p:spPr>
+        <p:txBody>
+          <a:bodyPr wrap="square" lIns="0" tIns="0" rIns="0" bIns="0" rtlCol="0" anchor="ctr"/>
+          <a:lstStyle/>
+          <a:p>
+            <a:pPr indent="0" marL="0">
+              <a:buNone/>
+            </a:pPr>
+            <a:r>
+              <a:rPr lang="en-US" sz="1050" dirty="0">
+                <a:solidFill>
+                  <a:srgbClr val="D9E2EC"/>
+                </a:solidFill>
+                <a:latin typeface="Calibri" pitchFamily="34" charset="0"/>
+                <a:ea typeface="Calibri" pitchFamily="34" charset="-122"/>
+                <a:cs typeface="Calibri" pitchFamily="34" charset="-120"/>
+              </a:rPr>
+              <a:t>People use the words without being asked</a:t>
+            </a:r>
+            <a:endParaRPr lang="en-US" sz="1050" dirty="0"/>
+          </a:p>
+        </p:txBody>
+      </p:sp>
+      <p:sp>
+        <p:nvSpPr>
+          <p:cNvPr id="12" name="Text 10"/>
+          <p:cNvSpPr txBox="1"/>
+          <p:nvPr/>
+        </p:nvSpPr>
+        <p:spPr>
+          <a:xfrm>
+            <a:off x="658368" y="3218688"/>
+            <a:ext cx="1051560" cy="219456"/>
+          </a:xfrm>
+          <a:prstGeom prst="rect">
+            <a:avLst/>
+          </a:prstGeom>
+          <a:noFill/>
+          <a:ln/>
+        </p:spPr>
+        <p:txBody>
+          <a:bodyPr wrap="square" lIns="0" tIns="0" rIns="0" bIns="0" rtlCol="0" anchor="ctr"/>
+          <a:lstStyle/>
+          <a:p>
+            <a:pPr indent="0" marL="0">
+              <a:buNone/>
+            </a:pPr>
+            <a:r>
+              <a:rPr lang="en-US" sz="800" b="1" spc="80" kern="0" dirty="0">
+                <a:solidFill>
+                  <a:srgbClr val="4098D7"/>
+                </a:solidFill>
+                <a:latin typeface="Calibri" pitchFamily="34" charset="0"/>
+                <a:ea typeface="Calibri" pitchFamily="34" charset="-122"/>
+                <a:cs typeface="Calibri" pitchFamily="34" charset="-120"/>
+              </a:rPr>
+              <a:t>DIES WHEN</a:t>
+            </a:r>
+            <a:endParaRPr lang="en-US" sz="800" dirty="0"/>
+          </a:p>
+        </p:txBody>
+      </p:sp>
+      <p:sp>
+        <p:nvSpPr>
+          <p:cNvPr id="13" name="Text 11"/>
+          <p:cNvSpPr txBox="1"/>
+          <p:nvPr/>
+        </p:nvSpPr>
+        <p:spPr>
+          <a:xfrm>
+            <a:off x="1755648" y="3191256"/>
+            <a:ext cx="2523744" cy="384048"/>
+          </a:xfrm>
+          <a:prstGeom prst="rect">
+            <a:avLst/>
+          </a:prstGeom>
+          <a:noFill/>
+          <a:ln/>
+        </p:spPr>
+        <p:txBody>
+          <a:bodyPr wrap="square" lIns="0" tIns="0" rIns="0" bIns="0" rtlCol="0" anchor="ctr"/>
+          <a:lstStyle/>
+          <a:p>
+            <a:pPr indent="0" marL="0">
+              <a:buNone/>
+            </a:pPr>
+            <a:r>
+              <a:rPr lang="en-US" sz="1050" dirty="0">
+                <a:solidFill>
+                  <a:srgbClr val="D9E2EC"/>
+                </a:solidFill>
+                <a:latin typeface="Calibri" pitchFamily="34" charset="0"/>
+                <a:ea typeface="Calibri" pitchFamily="34" charset="-122"/>
+                <a:cs typeface="Calibri" pitchFamily="34" charset="-120"/>
+              </a:rPr>
+              <a:t>It is mandated, quizzed, or made a checkbox</a:t>
+            </a:r>
+            <a:endParaRPr lang="en-US" sz="1050" dirty="0"/>
+          </a:p>
+        </p:txBody>
+      </p:sp>
+      <p:sp>
+        <p:nvSpPr>
+          <p:cNvPr id="14" name="Shape 12"/>
           <p:cNvSpPr/>
           <p:nvPr/>
         </p:nvSpPr>
         <p:spPr>
           <a:xfrm>
-            <a:off x="3429000" y="1371600"/>
-            <a:ext cx="457200" cy="457200"/>
-          </a:xfrm>
-          <a:prstGeom prst="ellipse">
-            <a:avLst/>
+            <a:off x="4663440" y="1371600"/>
+            <a:ext cx="4023360" cy="2359152"/>
+          </a:xfrm>
+          <a:prstGeom prst="roundRect">
+            <a:avLst>
+              <a:gd name="adj" fmla="val 2713"/>
+            </a:avLst>
           </a:prstGeom>
           <a:solidFill>
-            <a:srgbClr val="1F2933"/>
+            <a:srgbClr val="F0F4F8"/>
           </a:solidFill>
           <a:ln w="12700">
             <a:solidFill>
-              <a:srgbClr val="1F2933"/>
+              <a:srgbClr val="D9E2EC"/>
             </a:solidFill>
             <a:prstDash val="solid"/>
           </a:ln>
         </p:spPr>
       </p:sp>
-      <p:pic>
-        <p:nvPicPr>
-          <p:cNvPr id="9" name="Image 1" descr="preencoded.png">    </p:cNvPr>
-          <p:cNvPicPr>
-            <a:picLocks noChangeAspect="1"/>
-          </p:cNvPicPr>
-          <p:nvPr/>
-        </p:nvPicPr>
-        <p:blipFill>
-          <a:blip r:embed="rId2"/>
-          <a:stretch>
-            <a:fillRect/>
-          </a:stretch>
-        </p:blipFill>
-        <p:spPr>
-          <a:xfrm>
-            <a:off x="3538728" y="1481328"/>
-            <a:ext cx="237744" cy="237744"/>
-          </a:xfrm>
-          <a:prstGeom prst="rect">
-            <a:avLst/>
-          </a:prstGeom>
-        </p:spPr>
-      </p:pic>
-      <p:sp>
-        <p:nvSpPr>
-          <p:cNvPr id="10" name="Text 6"/>
-          <p:cNvSpPr txBox="1"/>
-          <p:nvPr/>
-        </p:nvSpPr>
-        <p:spPr>
-          <a:xfrm>
-            <a:off x="3995928" y="1371600"/>
-            <a:ext cx="2084832" cy="457200"/>
-          </a:xfrm>
-          <a:prstGeom prst="rect">
-            <a:avLst/>
-          </a:prstGeom>
-          <a:noFill/>
-          <a:ln/>
-        </p:spPr>
-        <p:txBody>
-          <a:bodyPr wrap="square" lIns="0" tIns="0" rIns="0" bIns="0" rtlCol="0" anchor="ctr"/>
-          <a:lstStyle/>
-          <a:p>
-            <a:pPr indent="0" marL="0">
-              <a:buNone/>
-            </a:pPr>
-            <a:r>
-              <a:rPr lang="en-US" sz="1300" b="1" dirty="0">
-                <a:solidFill>
-                  <a:srgbClr val="1F2933"/>
-                </a:solidFill>
-                <a:latin typeface="Calibri" pitchFamily="34" charset="0"/>
-                <a:ea typeface="Calibri" pitchFamily="34" charset="-122"/>
-                <a:cs typeface="Calibri" pitchFamily="34" charset="-120"/>
-              </a:rPr>
-              <a:t>Put it in the tools</a:t>
-            </a:r>
-            <a:endParaRPr lang="en-US" sz="1300" dirty="0"/>
-          </a:p>
-        </p:txBody>
-      </p:sp>
-      <p:sp>
-        <p:nvSpPr>
-          <p:cNvPr id="11" name="Text 7"/>
-          <p:cNvSpPr txBox="1"/>
-          <p:nvPr/>
-        </p:nvSpPr>
-        <p:spPr>
-          <a:xfrm>
-            <a:off x="3429000" y="1920240"/>
-            <a:ext cx="2651760" cy="2148840"/>
-          </a:xfrm>
-          <a:prstGeom prst="rect">
-            <a:avLst/>
-          </a:prstGeom>
-          <a:noFill/>
-          <a:ln/>
-        </p:spPr>
-        <p:txBody>
-          <a:bodyPr wrap="square" lIns="0" tIns="0" rIns="0" bIns="0" rtlCol="0" anchor="t"/>
-          <a:lstStyle/>
-          <a:p>
-            <a:pPr marL="152400" indent="-152400">
-              <a:spcAft>
-                <a:spcPts val="500"/>
-              </a:spcAft>
-              <a:buSzPct val="100000"/>
-              <a:buChar char="•"/>
-            </a:pPr>
-            <a:r>
-              <a:rPr lang="en-US" sz="1000" dirty="0">
-                <a:solidFill>
-                  <a:srgbClr val="52606D"/>
-                </a:solidFill>
-                <a:latin typeface="Calibri" pitchFamily="34" charset="0"/>
-                <a:ea typeface="Calibri" pitchFamily="34" charset="-122"/>
-                <a:cs typeface="Calibri" pitchFamily="34" charset="-120"/>
-              </a:rPr>
-              <a:t>The seat marker on every command block; verbs.sh; the two-lens query; the use-case tables — the model as something you run, not something you recall.</a:t>
-            </a:r>
-            <a:endParaRPr lang="en-US" sz="1000" dirty="0"/>
-          </a:p>
-          <a:p>
-            <a:pPr marL="152400" indent="-152400">
-              <a:spcAft>
-                <a:spcPts val="500"/>
-              </a:spcAft>
-              <a:buSzPct val="100000"/>
-              <a:buChar char="•"/>
-            </a:pPr>
-            <a:r>
-              <a:rPr lang="en-US" sz="1000" dirty="0">
-                <a:solidFill>
-                  <a:srgbClr val="52606D"/>
-                </a:solidFill>
-                <a:latin typeface="Calibri" pitchFamily="34" charset="0"/>
-                <a:ea typeface="Calibri" pitchFamily="34" charset="-122"/>
-                <a:cs typeface="Calibri" pitchFamily="34" charset="-120"/>
-              </a:rPr>
-              <a:t>Derivation comments in values files, which the review checklist reads. The model becomes the review’s questions.</a:t>
-            </a:r>
-            <a:endParaRPr lang="en-US" sz="1000" dirty="0"/>
-          </a:p>
-          <a:p>
-            <a:pPr marL="152400" indent="-152400">
-              <a:spcAft>
-                <a:spcPts val="500"/>
-              </a:spcAft>
-              <a:buSzPct val="100000"/>
-              <a:buChar char="•"/>
-            </a:pPr>
-            <a:r>
-              <a:rPr lang="en-US" sz="1000" dirty="0">
-                <a:solidFill>
-                  <a:srgbClr val="52606D"/>
-                </a:solidFill>
-                <a:latin typeface="Calibri" pitchFamily="34" charset="0"/>
-                <a:ea typeface="Calibri" pitchFamily="34" charset="-122"/>
-                <a:cs typeface="Calibri" pitchFamily="34" charset="-120"/>
-              </a:rPr>
-              <a:t>Habit beats slides: nobody re-reads a model page, everybody re-runs a command.</a:t>
-            </a:r>
-            <a:endParaRPr lang="en-US" sz="1000" dirty="0"/>
-          </a:p>
-        </p:txBody>
-      </p:sp>
-      <p:sp>
-        <p:nvSpPr>
-          <p:cNvPr id="12" name="Shape 8"/>
+      <p:sp>
+        <p:nvSpPr>
+          <p:cNvPr id="15" name="Text 13"/>
+          <p:cNvSpPr txBox="1"/>
+          <p:nvPr/>
+        </p:nvSpPr>
+        <p:spPr>
+          <a:xfrm>
+            <a:off x="4864608" y="1481328"/>
+            <a:ext cx="3621024" cy="274320"/>
+          </a:xfrm>
+          <a:prstGeom prst="rect">
+            <a:avLst/>
+          </a:prstGeom>
+          <a:noFill/>
+          <a:ln/>
+        </p:spPr>
+        <p:txBody>
+          <a:bodyPr wrap="square" lIns="0" tIns="0" rIns="0" bIns="0" rtlCol="0" anchor="ctr"/>
+          <a:lstStyle/>
+          <a:p>
+            <a:pPr indent="0" marL="0">
+              <a:buNone/>
+            </a:pPr>
+            <a:r>
+              <a:rPr lang="en-US" sz="1250" b="1" dirty="0">
+                <a:solidFill>
+                  <a:srgbClr val="102A43"/>
+                </a:solidFill>
+                <a:latin typeface="Calibri" pitchFamily="34" charset="0"/>
+                <a:ea typeface="Calibri" pitchFamily="34" charset="-122"/>
+                <a:cs typeface="Calibri" pitchFamily="34" charset="-120"/>
+              </a:rPr>
+              <a:t>Instruction — runbooks, scripts, checklists</a:t>
+            </a:r>
+            <a:endParaRPr lang="en-US" sz="1250" dirty="0"/>
+          </a:p>
+        </p:txBody>
+      </p:sp>
+      <p:sp>
+        <p:nvSpPr>
+          <p:cNvPr id="16" name="Text 14"/>
+          <p:cNvSpPr txBox="1"/>
+          <p:nvPr/>
+        </p:nvSpPr>
+        <p:spPr>
+          <a:xfrm>
+            <a:off x="4864608" y="1847088"/>
+            <a:ext cx="1051560" cy="219456"/>
+          </a:xfrm>
+          <a:prstGeom prst="rect">
+            <a:avLst/>
+          </a:prstGeom>
+          <a:noFill/>
+          <a:ln/>
+        </p:spPr>
+        <p:txBody>
+          <a:bodyPr wrap="square" lIns="0" tIns="0" rIns="0" bIns="0" rtlCol="0" anchor="ctr"/>
+          <a:lstStyle/>
+          <a:p>
+            <a:pPr indent="0" marL="0">
+              <a:buNone/>
+            </a:pPr>
+            <a:r>
+              <a:rPr lang="en-US" sz="800" b="1" spc="80" kern="0" dirty="0">
+                <a:solidFill>
+                  <a:srgbClr val="486581"/>
+                </a:solidFill>
+                <a:latin typeface="Calibri" pitchFamily="34" charset="0"/>
+                <a:ea typeface="Calibri" pitchFamily="34" charset="-122"/>
+                <a:cs typeface="Calibri" pitchFamily="34" charset="-120"/>
+              </a:rPr>
+              <a:t>ANSWERS</a:t>
+            </a:r>
+            <a:endParaRPr lang="en-US" sz="800" dirty="0"/>
+          </a:p>
+        </p:txBody>
+      </p:sp>
+      <p:sp>
+        <p:nvSpPr>
+          <p:cNvPr id="17" name="Text 15"/>
+          <p:cNvSpPr txBox="1"/>
+          <p:nvPr/>
+        </p:nvSpPr>
+        <p:spPr>
+          <a:xfrm>
+            <a:off x="5961888" y="1819656"/>
+            <a:ext cx="2523744" cy="384048"/>
+          </a:xfrm>
+          <a:prstGeom prst="rect">
+            <a:avLst/>
+          </a:prstGeom>
+          <a:noFill/>
+          <a:ln/>
+        </p:spPr>
+        <p:txBody>
+          <a:bodyPr wrap="square" lIns="0" tIns="0" rIns="0" bIns="0" rtlCol="0" anchor="ctr"/>
+          <a:lstStyle/>
+          <a:p>
+            <a:pPr indent="0" marL="0">
+              <a:buNone/>
+            </a:pPr>
+            <a:r>
+              <a:rPr lang="en-US" sz="1050" dirty="0">
+                <a:solidFill>
+                  <a:srgbClr val="486581"/>
+                </a:solidFill>
+                <a:latin typeface="Calibri" pitchFamily="34" charset="0"/>
+                <a:ea typeface="Calibri" pitchFamily="34" charset="-122"/>
+                <a:cs typeface="Calibri" pitchFamily="34" charset="-120"/>
+              </a:rPr>
+              <a:t>What do I type next?</a:t>
+            </a:r>
+            <a:endParaRPr lang="en-US" sz="1050" dirty="0"/>
+          </a:p>
+        </p:txBody>
+      </p:sp>
+      <p:sp>
+        <p:nvSpPr>
+          <p:cNvPr id="18" name="Text 16"/>
+          <p:cNvSpPr txBox="1"/>
+          <p:nvPr/>
+        </p:nvSpPr>
+        <p:spPr>
+          <a:xfrm>
+            <a:off x="4864608" y="2304288"/>
+            <a:ext cx="1051560" cy="219456"/>
+          </a:xfrm>
+          <a:prstGeom prst="rect">
+            <a:avLst/>
+          </a:prstGeom>
+          <a:noFill/>
+          <a:ln/>
+        </p:spPr>
+        <p:txBody>
+          <a:bodyPr wrap="square" lIns="0" tIns="0" rIns="0" bIns="0" rtlCol="0" anchor="ctr"/>
+          <a:lstStyle/>
+          <a:p>
+            <a:pPr indent="0" marL="0">
+              <a:buNone/>
+            </a:pPr>
+            <a:r>
+              <a:rPr lang="en-US" sz="800" b="1" spc="80" kern="0" dirty="0">
+                <a:solidFill>
+                  <a:srgbClr val="486581"/>
+                </a:solidFill>
+                <a:latin typeface="Calibri" pitchFamily="34" charset="0"/>
+                <a:ea typeface="Calibri" pitchFamily="34" charset="-122"/>
+                <a:cs typeface="Calibri" pitchFamily="34" charset="-120"/>
+              </a:rPr>
+              <a:t>SPREADS BY</a:t>
+            </a:r>
+            <a:endParaRPr lang="en-US" sz="800" dirty="0"/>
+          </a:p>
+        </p:txBody>
+      </p:sp>
+      <p:sp>
+        <p:nvSpPr>
+          <p:cNvPr id="19" name="Text 17"/>
+          <p:cNvSpPr txBox="1"/>
+          <p:nvPr/>
+        </p:nvSpPr>
+        <p:spPr>
+          <a:xfrm>
+            <a:off x="5961888" y="2276856"/>
+            <a:ext cx="2523744" cy="384048"/>
+          </a:xfrm>
+          <a:prstGeom prst="rect">
+            <a:avLst/>
+          </a:prstGeom>
+          <a:noFill/>
+          <a:ln/>
+        </p:spPr>
+        <p:txBody>
+          <a:bodyPr wrap="square" lIns="0" tIns="0" rIns="0" bIns="0" rtlCol="0" anchor="ctr"/>
+          <a:lstStyle/>
+          <a:p>
+            <a:pPr indent="0" marL="0">
+              <a:buNone/>
+            </a:pPr>
+            <a:r>
+              <a:rPr lang="en-US" sz="1050" dirty="0">
+                <a:solidFill>
+                  <a:srgbClr val="486581"/>
+                </a:solidFill>
+                <a:latin typeface="Calibri" pitchFamily="34" charset="0"/>
+                <a:ea typeface="Calibri" pitchFamily="34" charset="-122"/>
+                <a:cs typeface="Calibri" pitchFamily="34" charset="-120"/>
+              </a:rPr>
+              <a:t>Being published, linked, and required</a:t>
+            </a:r>
+            <a:endParaRPr lang="en-US" sz="1050" dirty="0"/>
+          </a:p>
+        </p:txBody>
+      </p:sp>
+      <p:sp>
+        <p:nvSpPr>
+          <p:cNvPr id="20" name="Text 18"/>
+          <p:cNvSpPr txBox="1"/>
+          <p:nvPr/>
+        </p:nvSpPr>
+        <p:spPr>
+          <a:xfrm>
+            <a:off x="4864608" y="2761488"/>
+            <a:ext cx="1051560" cy="219456"/>
+          </a:xfrm>
+          <a:prstGeom prst="rect">
+            <a:avLst/>
+          </a:prstGeom>
+          <a:noFill/>
+          <a:ln/>
+        </p:spPr>
+        <p:txBody>
+          <a:bodyPr wrap="square" lIns="0" tIns="0" rIns="0" bIns="0" rtlCol="0" anchor="ctr"/>
+          <a:lstStyle/>
+          <a:p>
+            <a:pPr indent="0" marL="0">
+              <a:buNone/>
+            </a:pPr>
+            <a:r>
+              <a:rPr lang="en-US" sz="800" b="1" spc="80" kern="0" dirty="0">
+                <a:solidFill>
+                  <a:srgbClr val="486581"/>
+                </a:solidFill>
+                <a:latin typeface="Calibri" pitchFamily="34" charset="0"/>
+                <a:ea typeface="Calibri" pitchFamily="34" charset="-122"/>
+                <a:cs typeface="Calibri" pitchFamily="34" charset="-120"/>
+              </a:rPr>
+              <a:t>ADOPTED WHEN</a:t>
+            </a:r>
+            <a:endParaRPr lang="en-US" sz="800" dirty="0"/>
+          </a:p>
+        </p:txBody>
+      </p:sp>
+      <p:sp>
+        <p:nvSpPr>
+          <p:cNvPr id="21" name="Text 19"/>
+          <p:cNvSpPr txBox="1"/>
+          <p:nvPr/>
+        </p:nvSpPr>
+        <p:spPr>
+          <a:xfrm>
+            <a:off x="5961888" y="2734056"/>
+            <a:ext cx="2523744" cy="384048"/>
+          </a:xfrm>
+          <a:prstGeom prst="rect">
+            <a:avLst/>
+          </a:prstGeom>
+          <a:noFill/>
+          <a:ln/>
+        </p:spPr>
+        <p:txBody>
+          <a:bodyPr wrap="square" lIns="0" tIns="0" rIns="0" bIns="0" rtlCol="0" anchor="ctr"/>
+          <a:lstStyle/>
+          <a:p>
+            <a:pPr indent="0" marL="0">
+              <a:buNone/>
+            </a:pPr>
+            <a:r>
+              <a:rPr lang="en-US" sz="1050" dirty="0">
+                <a:solidFill>
+                  <a:srgbClr val="486581"/>
+                </a:solidFill>
+                <a:latin typeface="Calibri" pitchFamily="34" charset="0"/>
+                <a:ea typeface="Calibri" pitchFamily="34" charset="-122"/>
+                <a:cs typeface="Calibri" pitchFamily="34" charset="-120"/>
+              </a:rPr>
+              <a:t>People follow the steps</a:t>
+            </a:r>
+            <a:endParaRPr lang="en-US" sz="1050" dirty="0"/>
+          </a:p>
+        </p:txBody>
+      </p:sp>
+      <p:sp>
+        <p:nvSpPr>
+          <p:cNvPr id="22" name="Text 20"/>
+          <p:cNvSpPr txBox="1"/>
+          <p:nvPr/>
+        </p:nvSpPr>
+        <p:spPr>
+          <a:xfrm>
+            <a:off x="4864608" y="3218688"/>
+            <a:ext cx="1051560" cy="219456"/>
+          </a:xfrm>
+          <a:prstGeom prst="rect">
+            <a:avLst/>
+          </a:prstGeom>
+          <a:noFill/>
+          <a:ln/>
+        </p:spPr>
+        <p:txBody>
+          <a:bodyPr wrap="square" lIns="0" tIns="0" rIns="0" bIns="0" rtlCol="0" anchor="ctr"/>
+          <a:lstStyle/>
+          <a:p>
+            <a:pPr indent="0" marL="0">
+              <a:buNone/>
+            </a:pPr>
+            <a:r>
+              <a:rPr lang="en-US" sz="800" b="1" spc="80" kern="0" dirty="0">
+                <a:solidFill>
+                  <a:srgbClr val="486581"/>
+                </a:solidFill>
+                <a:latin typeface="Calibri" pitchFamily="34" charset="0"/>
+                <a:ea typeface="Calibri" pitchFamily="34" charset="-122"/>
+                <a:cs typeface="Calibri" pitchFamily="34" charset="-120"/>
+              </a:rPr>
+              <a:t>DIES WHEN</a:t>
+            </a:r>
+            <a:endParaRPr lang="en-US" sz="800" dirty="0"/>
+          </a:p>
+        </p:txBody>
+      </p:sp>
+      <p:sp>
+        <p:nvSpPr>
+          <p:cNvPr id="23" name="Text 21"/>
+          <p:cNvSpPr txBox="1"/>
+          <p:nvPr/>
+        </p:nvSpPr>
+        <p:spPr>
+          <a:xfrm>
+            <a:off x="5961888" y="3191256"/>
+            <a:ext cx="2523744" cy="384048"/>
+          </a:xfrm>
+          <a:prstGeom prst="rect">
+            <a:avLst/>
+          </a:prstGeom>
+          <a:noFill/>
+          <a:ln/>
+        </p:spPr>
+        <p:txBody>
+          <a:bodyPr wrap="square" lIns="0" tIns="0" rIns="0" bIns="0" rtlCol="0" anchor="ctr"/>
+          <a:lstStyle/>
+          <a:p>
+            <a:pPr indent="0" marL="0">
+              <a:buNone/>
+            </a:pPr>
+            <a:r>
+              <a:rPr lang="en-US" sz="1050" dirty="0">
+                <a:solidFill>
+                  <a:srgbClr val="486581"/>
+                </a:solidFill>
+                <a:latin typeface="Calibri" pitchFamily="34" charset="0"/>
+                <a:ea typeface="Calibri" pitchFamily="34" charset="-122"/>
+                <a:cs typeface="Calibri" pitchFamily="34" charset="-120"/>
+              </a:rPr>
+              <a:t>It goes stale and nobody updates it</a:t>
+            </a:r>
+            <a:endParaRPr lang="en-US" sz="1050" dirty="0"/>
+          </a:p>
+        </p:txBody>
+      </p:sp>
+      <p:sp>
+        <p:nvSpPr>
+          <p:cNvPr id="24" name="Shape 22"/>
           <p:cNvSpPr/>
           <p:nvPr/>
         </p:nvSpPr>
         <p:spPr>
           <a:xfrm>
-            <a:off x="6400800" y="1371600"/>
-            <a:ext cx="457200" cy="457200"/>
+            <a:off x="457200" y="3886200"/>
+            <a:ext cx="329184" cy="329184"/>
           </a:xfrm>
           <a:prstGeom prst="ellipse">
             <a:avLst/>
           </a:prstGeom>
           <a:solidFill>
-            <a:srgbClr val="1F2933"/>
+            <a:srgbClr val="2680C2"/>
           </a:solidFill>
           <a:ln w="12700">
             <a:solidFill>
-              <a:srgbClr val="1F2933"/>
+              <a:srgbClr val="2680C2"/>
             </a:solidFill>
             <a:prstDash val="solid"/>
           </a:ln>
         </p:spPr>
       </p:sp>
-      <p:pic>
-        <p:nvPicPr>
-          <p:cNvPr id="13" name="Image 2" descr="preencoded.png">    </p:cNvPr>
-          <p:cNvPicPr>
-            <a:picLocks noChangeAspect="1"/>
-          </p:cNvPicPr>
-          <p:nvPr/>
-        </p:nvPicPr>
-        <p:blipFill>
-          <a:blip r:embed="rId3"/>
-          <a:stretch>
-            <a:fillRect/>
-          </a:stretch>
-        </p:blipFill>
-        <p:spPr>
-          <a:xfrm>
-            <a:off x="6510528" y="1481328"/>
-            <a:ext cx="237744" cy="237744"/>
-          </a:xfrm>
-          <a:prstGeom prst="rect">
-            <a:avLst/>
-          </a:prstGeom>
-        </p:spPr>
-      </p:pic>
-      <p:sp>
-        <p:nvSpPr>
-          <p:cNvPr id="14" name="Text 9"/>
-          <p:cNvSpPr txBox="1"/>
-          <p:nvPr/>
-        </p:nvSpPr>
-        <p:spPr>
-          <a:xfrm>
-            <a:off x="6967728" y="1371600"/>
-            <a:ext cx="2084832" cy="457200"/>
-          </a:xfrm>
-          <a:prstGeom prst="rect">
-            <a:avLst/>
-          </a:prstGeom>
-          <a:noFill/>
-          <a:ln/>
-        </p:spPr>
-        <p:txBody>
-          <a:bodyPr wrap="square" lIns="0" tIns="0" rIns="0" bIns="0" rtlCol="0" anchor="ctr"/>
-          <a:lstStyle/>
-          <a:p>
-            <a:pPr indent="0" marL="0">
-              <a:buNone/>
-            </a:pPr>
-            <a:r>
-              <a:rPr lang="en-US" sz="1300" b="1" dirty="0">
-                <a:solidFill>
-                  <a:srgbClr val="1F2933"/>
-                </a:solidFill>
-                <a:latin typeface="Calibri" pitchFamily="34" charset="0"/>
-                <a:ea typeface="Calibri" pitchFamily="34" charset="-122"/>
-                <a:cs typeface="Calibri" pitchFamily="34" charset="-120"/>
-              </a:rPr>
-              <a:t>Speak it — with the platform team</a:t>
-            </a:r>
-            <a:endParaRPr lang="en-US" sz="1300" dirty="0"/>
-          </a:p>
-        </p:txBody>
-      </p:sp>
-      <p:sp>
-        <p:nvSpPr>
-          <p:cNvPr id="15" name="Text 10"/>
-          <p:cNvSpPr txBox="1"/>
-          <p:nvPr/>
-        </p:nvSpPr>
-        <p:spPr>
-          <a:xfrm>
-            <a:off x="6400800" y="1920240"/>
-            <a:ext cx="2651760" cy="2148840"/>
-          </a:xfrm>
-          <a:prstGeom prst="rect">
-            <a:avLst/>
-          </a:prstGeom>
-          <a:noFill/>
-          <a:ln/>
-        </p:spPr>
-        <p:txBody>
-          <a:bodyPr wrap="square" lIns="0" tIns="0" rIns="0" bIns="0" rtlCol="0" anchor="t"/>
-          <a:lstStyle/>
-          <a:p>
-            <a:pPr marL="152400" indent="-152400">
-              <a:spcAft>
-                <a:spcPts val="500"/>
-              </a:spcAft>
-              <a:buSzPct val="100000"/>
-              <a:buChar char="•"/>
-            </a:pPr>
-            <a:r>
-              <a:rPr lang="en-US" sz="1000" dirty="0">
-                <a:solidFill>
-                  <a:srgbClr val="52606D"/>
-                </a:solidFill>
-                <a:latin typeface="Calibri" pitchFamily="34" charset="0"/>
-                <a:ea typeface="Calibri" pitchFamily="34" charset="-122"/>
-                <a:cs typeface="Calibri" pitchFamily="34" charset="-120"/>
-              </a:rPr>
-              <a:t>Incidents and reviews use the words: which door is the symptom at? which lens took that number? which verb failed?</a:t>
-            </a:r>
-            <a:endParaRPr lang="en-US" sz="1000" dirty="0"/>
-          </a:p>
-          <a:p>
-            <a:pPr marL="152400" indent="-152400">
-              <a:spcAft>
-                <a:spcPts val="500"/>
-              </a:spcAft>
-              <a:buSzPct val="100000"/>
-              <a:buChar char="•"/>
-            </a:pPr>
-            <a:r>
-              <a:rPr lang="en-US" sz="1000" dirty="0">
-                <a:solidFill>
-                  <a:srgbClr val="52606D"/>
-                </a:solidFill>
-                <a:latin typeface="Calibri" pitchFamily="34" charset="0"/>
-                <a:ea typeface="Calibri" pitchFamily="34" charset="-122"/>
-                <a:cs typeface="Calibri" pitchFamily="34" charset="-120"/>
-              </a:rPr>
-              <a:t>The platform team uses the same words — the seat marker, the evidence pack — so tickets arrive in a shape they can act on, and stop coming back “works for us”.</a:t>
-            </a:r>
-            <a:endParaRPr lang="en-US" sz="1000" dirty="0"/>
-          </a:p>
-          <a:p>
-            <a:pPr marL="152400" indent="-152400">
-              <a:spcAft>
-                <a:spcPts val="500"/>
-              </a:spcAft>
-              <a:buSzPct val="100000"/>
-              <a:buChar char="•"/>
-            </a:pPr>
-            <a:r>
-              <a:rPr lang="en-US" sz="1000" dirty="0">
-                <a:solidFill>
-                  <a:srgbClr val="52606D"/>
-                </a:solidFill>
-                <a:latin typeface="Calibri" pitchFamily="34" charset="0"/>
-                <a:ea typeface="Calibri" pitchFamily="34" charset="-122"/>
-                <a:cs typeface="Calibri" pitchFamily="34" charset="-120"/>
-              </a:rPr>
-              <a:t>Field notes tell the stories; each one is a gallery row, and stories are what people repeat.</a:t>
-            </a:r>
-            <a:endParaRPr lang="en-US" sz="1000" dirty="0"/>
-          </a:p>
-        </p:txBody>
-      </p:sp>
-      <p:sp>
-        <p:nvSpPr>
-          <p:cNvPr id="16" name="Shape 11"/>
+      <p:sp>
+        <p:nvSpPr>
+          <p:cNvPr id="25" name="Text 23"/>
+          <p:cNvSpPr txBox="1"/>
+          <p:nvPr/>
+        </p:nvSpPr>
+        <p:spPr>
+          <a:xfrm>
+            <a:off x="457200" y="3886200"/>
+            <a:ext cx="329184" cy="329184"/>
+          </a:xfrm>
+          <a:prstGeom prst="rect">
+            <a:avLst/>
+          </a:prstGeom>
+          <a:noFill/>
+          <a:ln/>
+        </p:spPr>
+        <p:txBody>
+          <a:bodyPr wrap="square" lIns="0" tIns="0" rIns="0" bIns="0" rtlCol="0" anchor="ctr"/>
+          <a:lstStyle/>
+          <a:p>
+            <a:pPr algn="ctr" indent="0" marL="0">
+              <a:buNone/>
+            </a:pPr>
+            <a:r>
+              <a:rPr lang="en-US" sz="1200" b="1" dirty="0">
+                <a:solidFill>
+                  <a:srgbClr val="FFFFFF"/>
+                </a:solidFill>
+                <a:latin typeface="Cambria" pitchFamily="34" charset="0"/>
+                <a:ea typeface="Cambria" pitchFamily="34" charset="-122"/>
+                <a:cs typeface="Cambria" pitchFamily="34" charset="-120"/>
+              </a:rPr>
+              <a:t>1</a:t>
+            </a:r>
+            <a:endParaRPr lang="en-US" sz="1200" dirty="0"/>
+          </a:p>
+        </p:txBody>
+      </p:sp>
+      <p:sp>
+        <p:nvSpPr>
+          <p:cNvPr id="26" name="Text 24"/>
+          <p:cNvSpPr txBox="1"/>
+          <p:nvPr/>
+        </p:nvSpPr>
+        <p:spPr>
+          <a:xfrm>
+            <a:off x="896112" y="3858768"/>
+            <a:ext cx="2240280" cy="237744"/>
+          </a:xfrm>
+          <a:prstGeom prst="rect">
+            <a:avLst/>
+          </a:prstGeom>
+          <a:noFill/>
+          <a:ln/>
+        </p:spPr>
+        <p:txBody>
+          <a:bodyPr wrap="square" lIns="0" tIns="0" rIns="0" bIns="0" rtlCol="0" anchor="ctr"/>
+          <a:lstStyle/>
+          <a:p>
+            <a:pPr indent="0" marL="0">
+              <a:buNone/>
+            </a:pPr>
+            <a:r>
+              <a:rPr lang="en-US" sz="1100" b="1" dirty="0">
+                <a:solidFill>
+                  <a:srgbClr val="102A43"/>
+                </a:solidFill>
+                <a:latin typeface="Calibri" pitchFamily="34" charset="0"/>
+                <a:ea typeface="Calibri" pitchFamily="34" charset="-122"/>
+                <a:cs typeface="Calibri" pitchFamily="34" charset="-120"/>
+              </a:rPr>
+              <a:t>Demonstrate it when the room is lost</a:t>
+            </a:r>
+            <a:endParaRPr lang="en-US" sz="1100" dirty="0"/>
+          </a:p>
+        </p:txBody>
+      </p:sp>
+      <p:sp>
+        <p:nvSpPr>
+          <p:cNvPr id="27" name="Text 25"/>
+          <p:cNvSpPr txBox="1"/>
+          <p:nvPr/>
+        </p:nvSpPr>
+        <p:spPr>
+          <a:xfrm>
+            <a:off x="896112" y="4096512"/>
+            <a:ext cx="2240280" cy="411480"/>
+          </a:xfrm>
+          <a:prstGeom prst="rect">
+            <a:avLst/>
+          </a:prstGeom>
+          <a:noFill/>
+          <a:ln/>
+        </p:spPr>
+        <p:txBody>
+          <a:bodyPr wrap="square" lIns="0" tIns="0" rIns="0" bIns="0" rtlCol="0" anchor="ctr"/>
+          <a:lstStyle/>
+          <a:p>
+            <a:pPr indent="0" marL="0">
+              <a:buNone/>
+            </a:pPr>
+            <a:r>
+              <a:rPr lang="en-US" sz="950" dirty="0">
+                <a:solidFill>
+                  <a:srgbClr val="486581"/>
+                </a:solidFill>
+                <a:latin typeface="Calibri" pitchFamily="34" charset="0"/>
+                <a:ea typeface="Calibri" pitchFamily="34" charset="-122"/>
+                <a:cs typeface="Calibri" pitchFamily="34" charset="-120"/>
+              </a:rPr>
+              <a:t>“Hold on — which door is this?” is the whole intervention.</a:t>
+            </a:r>
+            <a:endParaRPr lang="en-US" sz="950" dirty="0"/>
+          </a:p>
+        </p:txBody>
+      </p:sp>
+      <p:sp>
+        <p:nvSpPr>
+          <p:cNvPr id="28" name="Shape 26"/>
           <p:cNvSpPr/>
           <p:nvPr/>
         </p:nvSpPr>
         <p:spPr>
           <a:xfrm>
-            <a:off x="457200" y="4023360"/>
-            <a:ext cx="8229600" cy="685800"/>
-          </a:xfrm>
-          <a:prstGeom prst="roundRect">
-            <a:avLst>
-              <a:gd name="adj" fmla="val 8000"/>
-            </a:avLst>
+            <a:off x="3337560" y="3886200"/>
+            <a:ext cx="329184" cy="329184"/>
+          </a:xfrm>
+          <a:prstGeom prst="ellipse">
+            <a:avLst/>
           </a:prstGeom>
           <a:solidFill>
-            <a:srgbClr val="E4E7EB"/>
+            <a:srgbClr val="2680C2"/>
           </a:solidFill>
           <a:ln w="12700">
             <a:solidFill>
-              <a:srgbClr val="E4E7EB"/>
+              <a:srgbClr val="2680C2"/>
             </a:solidFill>
             <a:prstDash val="solid"/>
           </a:ln>
         </p:spPr>
       </p:sp>
-      <p:pic>
-        <p:nvPicPr>
-          <p:cNvPr id="17" name="Image 3" descr="preencoded.png">    </p:cNvPr>
-          <p:cNvPicPr>
-            <a:picLocks noChangeAspect="1"/>
-          </p:cNvPicPr>
-          <p:nvPr/>
-        </p:nvPicPr>
-        <p:blipFill>
-          <a:blip r:embed="rId4"/>
-          <a:stretch>
-            <a:fillRect/>
-          </a:stretch>
-        </p:blipFill>
-        <p:spPr>
-          <a:xfrm>
-            <a:off x="594360" y="4178808"/>
-            <a:ext cx="365760" cy="365760"/>
-          </a:xfrm>
-          <a:prstGeom prst="rect">
-            <a:avLst/>
-          </a:prstGeom>
-        </p:spPr>
-      </p:pic>
-      <p:sp>
-        <p:nvSpPr>
-          <p:cNvPr id="18" name="Text 12"/>
-          <p:cNvSpPr txBox="1"/>
-          <p:nvPr/>
-        </p:nvSpPr>
-        <p:spPr>
-          <a:xfrm>
-            <a:off x="1097280" y="4069080"/>
-            <a:ext cx="7452360" cy="594360"/>
-          </a:xfrm>
-          <a:prstGeom prst="rect">
-            <a:avLst/>
-          </a:prstGeom>
-          <a:noFill/>
-          <a:ln/>
-        </p:spPr>
-        <p:txBody>
-          <a:bodyPr wrap="square" lIns="0" tIns="0" rIns="0" bIns="0" rtlCol="0" anchor="ctr"/>
-          <a:lstStyle/>
-          <a:p>
-            <a:pPr indent="0" marL="0">
-              <a:buNone/>
-            </a:pPr>
-            <a:r>
-              <a:rPr lang="en-US" sz="1050" b="1" dirty="0">
-                <a:solidFill>
-                  <a:srgbClr val="1F2933"/>
-                </a:solidFill>
-                <a:latin typeface="Calibri" pitchFamily="34" charset="0"/>
-                <a:ea typeface="Calibri" pitchFamily="34" charset="-122"/>
-                <a:cs typeface="Calibri" pitchFamily="34" charset="-120"/>
-              </a:rPr>
-              <a:t>How you know it is working: </a:t>
-            </a:r>
-            <a:pPr indent="0" marL="0">
-              <a:buNone/>
-            </a:pPr>
-            <a:r>
-              <a:rPr lang="en-US" sz="1050" dirty="0">
-                <a:solidFill>
-                  <a:srgbClr val="52606D"/>
-                </a:solidFill>
-                <a:latin typeface="Calibri" pitchFamily="34" charset="0"/>
-                <a:ea typeface="Calibri" pitchFamily="34" charset="-122"/>
-                <a:cs typeface="Calibri" pitchFamily="34" charset="-120"/>
-              </a:rPr>
-              <a:t>people say the names unprompted · the first command in an incident is the right one · platform tickets stop bouncing · a new engineer’s first incident starts at step three, not step zero.</a:t>
-            </a:r>
-            <a:endParaRPr lang="en-US" sz="1050" dirty="0"/>
+      <p:sp>
+        <p:nvSpPr>
+          <p:cNvPr id="29" name="Text 27"/>
+          <p:cNvSpPr txBox="1"/>
+          <p:nvPr/>
+        </p:nvSpPr>
+        <p:spPr>
+          <a:xfrm>
+            <a:off x="3337560" y="3886200"/>
+            <a:ext cx="329184" cy="329184"/>
+          </a:xfrm>
+          <a:prstGeom prst="rect">
+            <a:avLst/>
+          </a:prstGeom>
+          <a:noFill/>
+          <a:ln/>
+        </p:spPr>
+        <p:txBody>
+          <a:bodyPr wrap="square" lIns="0" tIns="0" rIns="0" bIns="0" rtlCol="0" anchor="ctr"/>
+          <a:lstStyle/>
+          <a:p>
+            <a:pPr algn="ctr" indent="0" marL="0">
+              <a:buNone/>
+            </a:pPr>
+            <a:r>
+              <a:rPr lang="en-US" sz="1200" b="1" dirty="0">
+                <a:solidFill>
+                  <a:srgbClr val="FFFFFF"/>
+                </a:solidFill>
+                <a:latin typeface="Cambria" pitchFamily="34" charset="0"/>
+                <a:ea typeface="Cambria" pitchFamily="34" charset="-122"/>
+                <a:cs typeface="Cambria" pitchFamily="34" charset="-120"/>
+              </a:rPr>
+              <a:t>2</a:t>
+            </a:r>
+            <a:endParaRPr lang="en-US" sz="1200" dirty="0"/>
+          </a:p>
+        </p:txBody>
+      </p:sp>
+      <p:sp>
+        <p:nvSpPr>
+          <p:cNvPr id="30" name="Text 28"/>
+          <p:cNvSpPr txBox="1"/>
+          <p:nvPr/>
+        </p:nvSpPr>
+        <p:spPr>
+          <a:xfrm>
+            <a:off x="3776472" y="3858768"/>
+            <a:ext cx="2240280" cy="237744"/>
+          </a:xfrm>
+          <a:prstGeom prst="rect">
+            <a:avLst/>
+          </a:prstGeom>
+          <a:noFill/>
+          <a:ln/>
+        </p:spPr>
+        <p:txBody>
+          <a:bodyPr wrap="square" lIns="0" tIns="0" rIns="0" bIns="0" rtlCol="0" anchor="ctr"/>
+          <a:lstStyle/>
+          <a:p>
+            <a:pPr indent="0" marL="0">
+              <a:buNone/>
+            </a:pPr>
+            <a:r>
+              <a:rPr lang="en-US" sz="1100" b="1" dirty="0">
+                <a:solidFill>
+                  <a:srgbClr val="102A43"/>
+                </a:solidFill>
+                <a:latin typeface="Calibri" pitchFamily="34" charset="0"/>
+                <a:ea typeface="Calibri" pitchFamily="34" charset="-122"/>
+                <a:cs typeface="Calibri" pitchFamily="34" charset="-120"/>
+              </a:rPr>
+              <a:t>Name it so it can be asked for</a:t>
+            </a:r>
+            <a:endParaRPr lang="en-US" sz="1100" dirty="0"/>
+          </a:p>
+        </p:txBody>
+      </p:sp>
+      <p:sp>
+        <p:nvSpPr>
+          <p:cNvPr id="31" name="Text 29"/>
+          <p:cNvSpPr txBox="1"/>
+          <p:nvPr/>
+        </p:nvSpPr>
+        <p:spPr>
+          <a:xfrm>
+            <a:off x="3776472" y="4096512"/>
+            <a:ext cx="2240280" cy="411480"/>
+          </a:xfrm>
+          <a:prstGeom prst="rect">
+            <a:avLst/>
+          </a:prstGeom>
+          <a:noFill/>
+          <a:ln/>
+        </p:spPr>
+        <p:txBody>
+          <a:bodyPr wrap="square" lIns="0" tIns="0" rIns="0" bIns="0" rtlCol="0" anchor="ctr"/>
+          <a:lstStyle/>
+          <a:p>
+            <a:pPr indent="0" marL="0">
+              <a:buNone/>
+            </a:pPr>
+            <a:r>
+              <a:rPr lang="en-US" sz="950" dirty="0">
+                <a:solidFill>
+                  <a:srgbClr val="486581"/>
+                </a:solidFill>
+                <a:latin typeface="Calibri" pitchFamily="34" charset="0"/>
+                <a:ea typeface="Calibri" pitchFamily="34" charset="-122"/>
+                <a:cs typeface="Calibri" pitchFamily="34" charset="-120"/>
+              </a:rPr>
+              <a:t>The name travels; the page does not. Nobody re-reads a model.</a:t>
+            </a:r>
+            <a:endParaRPr lang="en-US" sz="950" dirty="0"/>
+          </a:p>
+        </p:txBody>
+      </p:sp>
+      <p:sp>
+        <p:nvSpPr>
+          <p:cNvPr id="32" name="Shape 30"/>
+          <p:cNvSpPr/>
+          <p:nvPr/>
+        </p:nvSpPr>
+        <p:spPr>
+          <a:xfrm>
+            <a:off x="6217920" y="3886200"/>
+            <a:ext cx="329184" cy="329184"/>
+          </a:xfrm>
+          <a:prstGeom prst="ellipse">
+            <a:avLst/>
+          </a:prstGeom>
+          <a:solidFill>
+            <a:srgbClr val="2680C2"/>
+          </a:solidFill>
+          <a:ln w="12700">
+            <a:solidFill>
+              <a:srgbClr val="2680C2"/>
+            </a:solidFill>
+            <a:prstDash val="solid"/>
+          </a:ln>
+        </p:spPr>
+      </p:sp>
+      <p:sp>
+        <p:nvSpPr>
+          <p:cNvPr id="33" name="Text 31"/>
+          <p:cNvSpPr txBox="1"/>
+          <p:nvPr/>
+        </p:nvSpPr>
+        <p:spPr>
+          <a:xfrm>
+            <a:off x="6217920" y="3886200"/>
+            <a:ext cx="329184" cy="329184"/>
+          </a:xfrm>
+          <a:prstGeom prst="rect">
+            <a:avLst/>
+          </a:prstGeom>
+          <a:noFill/>
+          <a:ln/>
+        </p:spPr>
+        <p:txBody>
+          <a:bodyPr wrap="square" lIns="0" tIns="0" rIns="0" bIns="0" rtlCol="0" anchor="ctr"/>
+          <a:lstStyle/>
+          <a:p>
+            <a:pPr algn="ctr" indent="0" marL="0">
+              <a:buNone/>
+            </a:pPr>
+            <a:r>
+              <a:rPr lang="en-US" sz="1200" b="1" dirty="0">
+                <a:solidFill>
+                  <a:srgbClr val="FFFFFF"/>
+                </a:solidFill>
+                <a:latin typeface="Cambria" pitchFamily="34" charset="0"/>
+                <a:ea typeface="Cambria" pitchFamily="34" charset="-122"/>
+                <a:cs typeface="Cambria" pitchFamily="34" charset="-120"/>
+              </a:rPr>
+              <a:t>3</a:t>
+            </a:r>
+            <a:endParaRPr lang="en-US" sz="1200" dirty="0"/>
+          </a:p>
+        </p:txBody>
+      </p:sp>
+      <p:sp>
+        <p:nvSpPr>
+          <p:cNvPr id="34" name="Text 32"/>
+          <p:cNvSpPr txBox="1"/>
+          <p:nvPr/>
+        </p:nvSpPr>
+        <p:spPr>
+          <a:xfrm>
+            <a:off x="6656832" y="3858768"/>
+            <a:ext cx="2240280" cy="237744"/>
+          </a:xfrm>
+          <a:prstGeom prst="rect">
+            <a:avLst/>
+          </a:prstGeom>
+          <a:noFill/>
+          <a:ln/>
+        </p:spPr>
+        <p:txBody>
+          <a:bodyPr wrap="square" lIns="0" tIns="0" rIns="0" bIns="0" rtlCol="0" anchor="ctr"/>
+          <a:lstStyle/>
+          <a:p>
+            <a:pPr indent="0" marL="0">
+              <a:buNone/>
+            </a:pPr>
+            <a:r>
+              <a:rPr lang="en-US" sz="1100" b="1" dirty="0">
+                <a:solidFill>
+                  <a:srgbClr val="102A43"/>
+                </a:solidFill>
+                <a:latin typeface="Calibri" pitchFamily="34" charset="0"/>
+                <a:ea typeface="Calibri" pitchFamily="34" charset="-122"/>
+                <a:cs typeface="Calibri" pitchFamily="34" charset="-120"/>
+              </a:rPr>
+              <a:t>Let the tactics hang off it</a:t>
+            </a:r>
+            <a:endParaRPr lang="en-US" sz="1100" dirty="0"/>
+          </a:p>
+        </p:txBody>
+      </p:sp>
+      <p:sp>
+        <p:nvSpPr>
+          <p:cNvPr id="35" name="Text 33"/>
+          <p:cNvSpPr txBox="1"/>
+          <p:nvPr/>
+        </p:nvSpPr>
+        <p:spPr>
+          <a:xfrm>
+            <a:off x="6656832" y="4096512"/>
+            <a:ext cx="2240280" cy="411480"/>
+          </a:xfrm>
+          <a:prstGeom prst="rect">
+            <a:avLst/>
+          </a:prstGeom>
+          <a:noFill/>
+          <a:ln/>
+        </p:spPr>
+        <p:txBody>
+          <a:bodyPr wrap="square" lIns="0" tIns="0" rIns="0" bIns="0" rtlCol="0" anchor="ctr"/>
+          <a:lstStyle/>
+          <a:p>
+            <a:pPr indent="0" marL="0">
+              <a:buNone/>
+            </a:pPr>
+            <a:r>
+              <a:rPr lang="en-US" sz="950" dirty="0">
+                <a:solidFill>
+                  <a:srgbClr val="486581"/>
+                </a:solidFill>
+                <a:latin typeface="Calibri" pitchFamily="34" charset="0"/>
+                <a:ea typeface="Calibri" pitchFamily="34" charset="-122"/>
+                <a:cs typeface="Calibri" pitchFamily="34" charset="-120"/>
+              </a:rPr>
+              <a:t>Lead with the map. The commands are the reward, not the pitch.</a:t>
+            </a:r>
+            <a:endParaRPr lang="en-US" sz="950" dirty="0"/>
+          </a:p>
+        </p:txBody>
+      </p:sp>
+      <p:sp>
+        <p:nvSpPr>
+          <p:cNvPr id="36" name="Text 34"/>
+          <p:cNvSpPr txBox="1"/>
+          <p:nvPr/>
+        </p:nvSpPr>
+        <p:spPr>
+          <a:xfrm>
+            <a:off x="457200" y="4645152"/>
+            <a:ext cx="8229600" cy="274320"/>
+          </a:xfrm>
+          <a:prstGeom prst="rect">
+            <a:avLst/>
+          </a:prstGeom>
+          <a:noFill/>
+          <a:ln/>
+        </p:spPr>
+        <p:txBody>
+          <a:bodyPr wrap="square" lIns="0" tIns="0" rIns="0" bIns="0" rtlCol="0" anchor="ctr"/>
+          <a:lstStyle/>
+          <a:p>
+            <a:pPr indent="0" marL="0">
+              <a:buNone/>
+            </a:pPr>
+            <a:r>
+              <a:rPr lang="en-US" sz="1100" i="1" dirty="0">
+                <a:solidFill>
+                  <a:srgbClr val="0A558C"/>
+                </a:solidFill>
+                <a:latin typeface="Calibri" pitchFamily="34" charset="0"/>
+                <a:ea typeface="Calibri" pitchFamily="34" charset="-122"/>
+                <a:cs typeface="Calibri" pitchFamily="34" charset="-120"/>
+              </a:rPr>
+              <a:t>You will hear adoption before you can measure it: the names come back to you from someone who never read the page.</a:t>
+            </a:r>
+            <a:endParaRPr lang="en-US" sz="1100" dirty="0"/>
           </a:p>
         </p:txBody>
       </p:sp>
@@ -4240,73 +5105,73 @@
         </p:nvSpPr>
         <p:spPr>
           <a:xfrm>
-            <a:off x="457200" y="320040"/>
-            <a:ext cx="8229600" cy="640080"/>
-          </a:xfrm>
-          <a:prstGeom prst="rect">
-            <a:avLst/>
-          </a:prstGeom>
-          <a:noFill/>
-          <a:ln/>
-        </p:spPr>
-        <p:txBody>
-          <a:bodyPr wrap="square" lIns="0" tIns="0" rIns="0" bIns="0" rtlCol="0" anchor="ctr"/>
-          <a:lstStyle/>
-          <a:p>
-            <a:pPr indent="0" marL="0">
-              <a:buNone/>
-            </a:pPr>
-            <a:r>
-              <a:rPr lang="en-US" sz="3200" b="1" dirty="0">
-                <a:solidFill>
-                  <a:srgbClr val="1F2933"/>
+            <a:off x="457200" y="274320"/>
+            <a:ext cx="8229600" cy="228600"/>
+          </a:xfrm>
+          <a:prstGeom prst="rect">
+            <a:avLst/>
+          </a:prstGeom>
+          <a:noFill/>
+          <a:ln/>
+        </p:spPr>
+        <p:txBody>
+          <a:bodyPr wrap="square" lIns="0" tIns="0" rIns="0" bIns="0" rtlCol="0" anchor="ctr"/>
+          <a:lstStyle/>
+          <a:p>
+            <a:pPr indent="0" marL="0">
+              <a:buNone/>
+            </a:pPr>
+            <a:r>
+              <a:rPr lang="en-US" sz="1000" b="1" spc="140" kern="0" dirty="0">
+                <a:solidFill>
+                  <a:srgbClr val="0A558C"/>
+                </a:solidFill>
+                <a:latin typeface="Calibri" pitchFamily="34" charset="0"/>
+                <a:ea typeface="Calibri" pitchFamily="34" charset="-122"/>
+                <a:cs typeface="Calibri" pitchFamily="34" charset="-120"/>
+              </a:rPr>
+              <a:t>EXAMPLE 1 OF 4   ·   WHAT YOU SET</a:t>
+            </a:r>
+            <a:endParaRPr lang="en-US" sz="1000" dirty="0"/>
+          </a:p>
+        </p:txBody>
+      </p:sp>
+      <p:sp>
+        <p:nvSpPr>
+          <p:cNvPr id="3" name="Text 1"/>
+          <p:cNvSpPr txBox="1"/>
+          <p:nvPr/>
+        </p:nvSpPr>
+        <p:spPr>
+          <a:xfrm>
+            <a:off x="896112" y="530352"/>
+            <a:ext cx="3108960" cy="502920"/>
+          </a:xfrm>
+          <a:prstGeom prst="rect">
+            <a:avLst/>
+          </a:prstGeom>
+          <a:noFill/>
+          <a:ln/>
+        </p:spPr>
+        <p:txBody>
+          <a:bodyPr wrap="square" lIns="0" tIns="0" rIns="0" bIns="0" rtlCol="0" anchor="ctr"/>
+          <a:lstStyle/>
+          <a:p>
+            <a:pPr indent="0" marL="0">
+              <a:buNone/>
+            </a:pPr>
+            <a:r>
+              <a:rPr lang="en-US" sz="2800" b="1" dirty="0">
+                <a:solidFill>
+                  <a:srgbClr val="102A43"/>
                 </a:solidFill>
                 <a:latin typeface="Cambria" pitchFamily="34" charset="0"/>
                 <a:ea typeface="Cambria" pitchFamily="34" charset="-122"/>
                 <a:cs typeface="Cambria" pitchFamily="34" charset="-120"/>
               </a:rPr>
-              <a:t>Examples: three models and a tactical layer</a:t>
-            </a:r>
-            <a:endParaRPr lang="en-US" sz="3200" dirty="0"/>
-          </a:p>
-        </p:txBody>
-      </p:sp>
-      <p:sp>
-        <p:nvSpPr>
-          <p:cNvPr id="3" name="Text 1"/>
-          <p:cNvSpPr txBox="1"/>
-          <p:nvPr/>
-        </p:nvSpPr>
-        <p:spPr>
-          <a:xfrm>
-            <a:off x="457200" y="914400"/>
-            <a:ext cx="8229600" cy="320040"/>
-          </a:xfrm>
-          <a:prstGeom prst="rect">
-            <a:avLst/>
-          </a:prstGeom>
-          <a:noFill/>
-          <a:ln/>
-        </p:spPr>
-        <p:txBody>
-          <a:bodyPr wrap="square" lIns="0" tIns="0" rIns="0" bIns="0" rtlCol="0" anchor="ctr"/>
-          <a:lstStyle/>
-          <a:p>
-            <a:pPr indent="0" marL="0">
-              <a:buNone/>
-            </a:pPr>
-            <a:r>
-              <a:rPr lang="en-US" sz="1300" i="1" dirty="0">
-                <a:solidFill>
-                  <a:srgbClr val="52606D"/>
-                </a:solidFill>
-                <a:latin typeface="Calibri" pitchFamily="34" charset="0"/>
-                <a:ea typeface="Calibri" pitchFamily="34" charset="-122"/>
-                <a:cs typeface="Calibri" pitchFamily="34" charset="-120"/>
-              </a:rPr>
-              <a:t>All four are on the site today — each with its gallery, and each with its commands.</a:t>
-            </a:r>
-            <a:endParaRPr lang="en-US" sz="1300" dirty="0"/>
+              <a:t>The Three Doors</a:t>
+            </a:r>
+            <a:endParaRPr lang="en-US" sz="2800" dirty="0"/>
           </a:p>
         </p:txBody>
       </p:sp>
@@ -4318,53 +5183,26 @@
         </p:nvSpPr>
         <p:spPr>
           <a:xfrm>
-            <a:off x="457200" y="1371600"/>
-            <a:ext cx="1965960" cy="3429000"/>
-          </a:xfrm>
-          <a:prstGeom prst="roundRect">
-            <a:avLst>
-              <a:gd name="adj" fmla="val 2791"/>
-            </a:avLst>
+            <a:off x="457200" y="576072"/>
+            <a:ext cx="384048" cy="384048"/>
+          </a:xfrm>
+          <a:prstGeom prst="ellipse">
+            <a:avLst/>
           </a:prstGeom>
           <a:solidFill>
-            <a:srgbClr val="E4E7EB"/>
+            <a:srgbClr val="2680C2"/>
           </a:solidFill>
           <a:ln w="12700">
             <a:solidFill>
-              <a:srgbClr val="E4E7EB"/>
+              <a:srgbClr val="2680C2"/>
             </a:solidFill>
             <a:prstDash val="solid"/>
           </a:ln>
         </p:spPr>
       </p:sp>
-      <p:sp>
-        <p:nvSpPr>
-          <p:cNvPr id="5" name="Shape 3"/>
-          <p:cNvSpPr/>
-          <p:nvPr/>
-        </p:nvSpPr>
-        <p:spPr>
-          <a:xfrm>
-            <a:off x="594360" y="1508760"/>
-            <a:ext cx="438912" cy="438912"/>
-          </a:xfrm>
-          <a:prstGeom prst="ellipse">
-            <a:avLst/>
-          </a:prstGeom>
-          <a:solidFill>
-            <a:srgbClr val="1F2933"/>
-          </a:solidFill>
-          <a:ln w="12700">
-            <a:solidFill>
-              <a:srgbClr val="1F2933"/>
-            </a:solidFill>
-            <a:prstDash val="solid"/>
-          </a:ln>
-        </p:spPr>
-      </p:sp>
       <p:pic>
         <p:nvPicPr>
-          <p:cNvPr id="6" name="Image 0" descr="preencoded.png">    </p:cNvPr>
+          <p:cNvPr id="5" name="Image 0" descr="preencoded.png">    </p:cNvPr>
           <p:cNvPicPr>
             <a:picLocks noChangeAspect="1"/>
           </p:cNvPicPr>
@@ -4378,8 +5216,8 @@
         </p:blipFill>
         <p:spPr>
           <a:xfrm>
-            <a:off x="699699" y="1614099"/>
-            <a:ext cx="228234" cy="228234"/>
+            <a:off x="549372" y="668244"/>
+            <a:ext cx="199705" cy="199705"/>
           </a:xfrm>
           <a:prstGeom prst="rect">
             <a:avLst/>
@@ -4388,40 +5226,79 @@
       </p:pic>
       <p:sp>
         <p:nvSpPr>
+          <p:cNvPr id="6" name="Text 3"/>
+          <p:cNvSpPr txBox="1"/>
+          <p:nvPr/>
+        </p:nvSpPr>
+        <p:spPr>
+          <a:xfrm>
+            <a:off x="457200" y="1298448"/>
+            <a:ext cx="3383280" cy="1600200"/>
+          </a:xfrm>
+          <a:prstGeom prst="rect">
+            <a:avLst/>
+          </a:prstGeom>
+          <a:noFill/>
+          <a:ln/>
+        </p:spPr>
+        <p:txBody>
+          <a:bodyPr wrap="square" lIns="0" tIns="0" rIns="0" bIns="0" rtlCol="0" anchor="t"/>
+          <a:lstStyle/>
+          <a:p>
+            <a:pPr indent="0" marL="0">
+              <a:buNone/>
+            </a:pPr>
+            <a:r>
+              <a:rPr lang="en-US" sz="1100" dirty="0">
+                <a:solidFill>
+                  <a:srgbClr val="486581"/>
+                </a:solidFill>
+                <a:latin typeface="Calibri" pitchFamily="34" charset="0"/>
+                <a:ea typeface="Calibri" pitchFamily="34" charset="-122"/>
+                <a:cs typeface="Calibri" pitchFamily="34" charset="-120"/>
+              </a:rPr>
+              <a:t>Strip Kubernetes to its job and it needs exactly three things from a workload: what it costs, whether it tells the truth about its state, and how capacity should answer demand. There is no fourth — everything else refines one of them.</a:t>
+            </a:r>
+            <a:endParaRPr lang="en-US" sz="1100" dirty="0"/>
+          </a:p>
+        </p:txBody>
+      </p:sp>
+      <p:sp>
+        <p:nvSpPr>
           <p:cNvPr id="7" name="Text 4"/>
           <p:cNvSpPr txBox="1"/>
           <p:nvPr/>
         </p:nvSpPr>
         <p:spPr>
           <a:xfrm>
-            <a:off x="1115568" y="1481328"/>
-            <a:ext cx="1234440" cy="274320"/>
-          </a:xfrm>
-          <a:prstGeom prst="rect">
-            <a:avLst/>
-          </a:prstGeom>
-          <a:noFill/>
-          <a:ln/>
-        </p:spPr>
-        <p:txBody>
-          <a:bodyPr wrap="square" lIns="0" tIns="0" rIns="0" bIns="0" rtlCol="0" anchor="ctr"/>
-          <a:lstStyle/>
-          <a:p>
-            <a:pPr indent="0" marL="0">
-              <a:buNone/>
-            </a:pPr>
-            <a:r>
-              <a:rPr lang="en-US" sz="1250" b="1" dirty="0">
-                <a:solidFill>
-                  <a:srgbClr val="1F2933"/>
-                </a:solidFill>
-                <a:latin typeface="Calibri" pitchFamily="34" charset="0"/>
-                <a:ea typeface="Calibri" pitchFamily="34" charset="-122"/>
-                <a:cs typeface="Calibri" pitchFamily="34" charset="-120"/>
-              </a:rPr>
-              <a:t>The Three Doors</a:t>
-            </a:r>
-            <a:endParaRPr lang="en-US" sz="1250" dirty="0"/>
+            <a:off x="457200" y="2542032"/>
+            <a:ext cx="3383280" cy="731520"/>
+          </a:xfrm>
+          <a:prstGeom prst="rect">
+            <a:avLst/>
+          </a:prstGeom>
+          <a:noFill/>
+          <a:ln/>
+        </p:spPr>
+        <p:txBody>
+          <a:bodyPr wrap="square" lIns="0" tIns="0" rIns="0" bIns="0" rtlCol="0" anchor="t"/>
+          <a:lstStyle/>
+          <a:p>
+            <a:pPr indent="0" marL="0">
+              <a:buNone/>
+            </a:pPr>
+            <a:r>
+              <a:rPr lang="en-US" sz="1200" i="1" dirty="0">
+                <a:solidFill>
+                  <a:srgbClr val="102A43"/>
+                </a:solidFill>
+                <a:latin typeface="Calibri" pitchFamily="34" charset="0"/>
+                <a:ea typeface="Calibri" pitchFamily="34" charset="-122"/>
+                <a:cs typeface="Calibri" pitchFamily="34" charset="-120"/>
+              </a:rPr>
+              <a:t>“A CPU limit costs you latency; a memory limit costs you the process.”</a:t>
+            </a:r>
+            <a:endParaRPr lang="en-US" sz="1200" dirty="0"/>
           </a:p>
         </p:txBody>
       </p:sp>
@@ -4433,32 +5310,46 @@
         </p:nvSpPr>
         <p:spPr>
           <a:xfrm>
-            <a:off x="1115568" y="1737360"/>
-            <a:ext cx="1234440" cy="228600"/>
-          </a:xfrm>
-          <a:prstGeom prst="rect">
-            <a:avLst/>
-          </a:prstGeom>
-          <a:noFill/>
-          <a:ln/>
-        </p:spPr>
-        <p:txBody>
-          <a:bodyPr wrap="square" lIns="0" tIns="0" rIns="0" bIns="0" rtlCol="0" anchor="ctr"/>
-          <a:lstStyle/>
-          <a:p>
-            <a:pPr indent="0" marL="0">
-              <a:buNone/>
-            </a:pPr>
-            <a:r>
-              <a:rPr lang="en-US" sz="1000" i="1" dirty="0">
-                <a:solidFill>
-                  <a:srgbClr val="B86A1E"/>
-                </a:solidFill>
-                <a:latin typeface="Calibri" pitchFamily="34" charset="0"/>
-                <a:ea typeface="Calibri" pitchFamily="34" charset="-122"/>
-                <a:cs typeface="Calibri" pitchFamily="34" charset="-120"/>
-              </a:rPr>
-              <a:t>what you set</a:t>
+            <a:off x="457200" y="3346704"/>
+            <a:ext cx="3383280" cy="914400"/>
+          </a:xfrm>
+          <a:prstGeom prst="rect">
+            <a:avLst/>
+          </a:prstGeom>
+          <a:noFill/>
+          <a:ln/>
+        </p:spPr>
+        <p:txBody>
+          <a:bodyPr wrap="square" lIns="0" tIns="0" rIns="0" bIns="0" rtlCol="0" anchor="t"/>
+          <a:lstStyle/>
+          <a:p>
+            <a:pPr indent="0" marL="0">
+              <a:buNone/>
+            </a:pPr>
+            <a:r>
+              <a:rPr lang="en-US" sz="1000" b="1" dirty="0">
+                <a:solidFill>
+                  <a:srgbClr val="0A558C"/>
+                </a:solidFill>
+                <a:latin typeface="Calibri" pitchFamily="34" charset="0"/>
+                <a:ea typeface="Calibri" pitchFamily="34" charset="-122"/>
+                <a:cs typeface="Calibri" pitchFamily="34" charset="-120"/>
+              </a:rPr>
+              <a:t>In practice: </a:t>
+            </a:r>
+            <a:pPr indent="0" marL="0">
+              <a:buNone/>
+            </a:pPr>
+            <a:r>
+              <a:rPr lang="en-US" sz="1000" dirty="0">
+                <a:solidFill>
+                  <a:srgbClr val="486581"/>
+                </a:solidFill>
+                <a:latin typeface="Calibri" pitchFamily="34" charset="0"/>
+                <a:ea typeface="Calibri" pitchFamily="34" charset="-122"/>
+                <a:cs typeface="Calibri" pitchFamily="34" charset="-120"/>
+              </a:rPr>
+              <a:t>Walk the doors in every chart review. The triage method is the same loop in reverse: name the door the symptom is at, then check the other two for the cause.</a:t>
             </a:r>
             <a:endParaRPr lang="en-US" sz="1000" dirty="0"/>
           </a:p>
@@ -4466,157 +5357,26 @@
       </p:sp>
       <p:sp>
         <p:nvSpPr>
-          <p:cNvPr id="9" name="Text 6"/>
-          <p:cNvSpPr txBox="1"/>
-          <p:nvPr/>
-        </p:nvSpPr>
-        <p:spPr>
-          <a:xfrm>
-            <a:off x="594360" y="2084832"/>
-            <a:ext cx="1691640" cy="1234440"/>
-          </a:xfrm>
-          <a:prstGeom prst="rect">
-            <a:avLst/>
-          </a:prstGeom>
-          <a:noFill/>
-          <a:ln/>
-        </p:spPr>
-        <p:txBody>
-          <a:bodyPr wrap="square" lIns="0" tIns="0" rIns="0" bIns="0" rtlCol="0" anchor="t"/>
-          <a:lstStyle/>
-          <a:p>
-            <a:pPr indent="0" marL="0">
-              <a:buNone/>
-            </a:pPr>
-            <a:r>
-              <a:rPr lang="en-US" sz="950" dirty="0">
-                <a:solidFill>
-                  <a:srgbClr val="52606D"/>
-                </a:solidFill>
-                <a:latin typeface="Calibri" pitchFamily="34" charset="0"/>
-                <a:ea typeface="Calibri" pitchFamily="34" charset="-122"/>
-                <a:cs typeface="Calibri" pitchFamily="34" charset="-120"/>
-              </a:rPr>
-              <a:t>Cost · Truth · Response — one loop. Requests price the loop, probes tell the truth, scaling responds; each door’s output is the next door’s input.</a:t>
-            </a:r>
-            <a:endParaRPr lang="en-US" sz="950" dirty="0"/>
-          </a:p>
-        </p:txBody>
-      </p:sp>
-      <p:sp>
-        <p:nvSpPr>
-          <p:cNvPr id="10" name="Text 7"/>
-          <p:cNvSpPr txBox="1"/>
-          <p:nvPr/>
-        </p:nvSpPr>
-        <p:spPr>
-          <a:xfrm>
-            <a:off x="594360" y="3337560"/>
-            <a:ext cx="1691640" cy="685800"/>
-          </a:xfrm>
-          <a:prstGeom prst="rect">
-            <a:avLst/>
-          </a:prstGeom>
-          <a:noFill/>
-          <a:ln/>
-        </p:spPr>
-        <p:txBody>
-          <a:bodyPr wrap="square" lIns="0" tIns="0" rIns="0" bIns="0" rtlCol="0" anchor="t"/>
-          <a:lstStyle/>
-          <a:p>
-            <a:pPr indent="0" marL="0">
-              <a:buNone/>
-            </a:pPr>
-            <a:r>
-              <a:rPr lang="en-US" sz="950" i="1" dirty="0">
-                <a:solidFill>
-                  <a:srgbClr val="1F2933"/>
-                </a:solidFill>
-                <a:latin typeface="Calibri" pitchFamily="34" charset="0"/>
-                <a:ea typeface="Calibri" pitchFamily="34" charset="-122"/>
-                <a:cs typeface="Calibri" pitchFamily="34" charset="-120"/>
-              </a:rPr>
-              <a:t>“A CPU limit costs you latency; a memory limit costs you the process.”</a:t>
-            </a:r>
-            <a:endParaRPr lang="en-US" sz="950" dirty="0"/>
-          </a:p>
-        </p:txBody>
-      </p:sp>
-      <p:sp>
-        <p:nvSpPr>
-          <p:cNvPr id="11" name="Text 8"/>
-          <p:cNvSpPr txBox="1"/>
-          <p:nvPr/>
-        </p:nvSpPr>
-        <p:spPr>
-          <a:xfrm>
-            <a:off x="594360" y="4069080"/>
-            <a:ext cx="1691640" cy="640080"/>
-          </a:xfrm>
-          <a:prstGeom prst="rect">
-            <a:avLst/>
-          </a:prstGeom>
-          <a:noFill/>
-          <a:ln/>
-        </p:spPr>
-        <p:txBody>
-          <a:bodyPr wrap="square" lIns="0" tIns="0" rIns="0" bIns="0" rtlCol="0" anchor="t"/>
-          <a:lstStyle/>
-          <a:p>
-            <a:pPr indent="0" marL="0">
-              <a:buNone/>
-            </a:pPr>
-            <a:r>
-              <a:rPr lang="en-US" sz="950" b="1" dirty="0">
-                <a:solidFill>
-                  <a:srgbClr val="1F2933"/>
-                </a:solidFill>
-                <a:latin typeface="Calibri" pitchFamily="34" charset="0"/>
-                <a:ea typeface="Calibri" pitchFamily="34" charset="-122"/>
-                <a:cs typeface="Calibri" pitchFamily="34" charset="-120"/>
-              </a:rPr>
-              <a:t>Tactic: </a:t>
-            </a:r>
-            <a:pPr indent="0" marL="0">
-              <a:buNone/>
-            </a:pPr>
-            <a:r>
-              <a:rPr lang="en-US" sz="950" dirty="0">
-                <a:solidFill>
-                  <a:srgbClr val="52606D"/>
-                </a:solidFill>
-                <a:latin typeface="Calibri" pitchFamily="34" charset="0"/>
-                <a:ea typeface="Calibri" pitchFamily="34" charset="-122"/>
-                <a:cs typeface="Calibri" pitchFamily="34" charset="-120"/>
-              </a:rPr>
-              <a:t>Walk the doors in every review; the triage method is the loop in reverse.</a:t>
-            </a:r>
-            <a:endParaRPr lang="en-US" sz="950" dirty="0"/>
-          </a:p>
-        </p:txBody>
-      </p:sp>
-      <p:sp>
-        <p:nvSpPr>
-          <p:cNvPr id="12" name="Shape 9"/>
+          <p:cNvPr id="9" name="Shape 6"/>
           <p:cNvSpPr/>
           <p:nvPr/>
         </p:nvSpPr>
         <p:spPr>
           <a:xfrm>
-            <a:off x="2542032" y="1371600"/>
-            <a:ext cx="1965960" cy="3429000"/>
+            <a:off x="4069080" y="1874520"/>
+            <a:ext cx="1325880" cy="1371600"/>
           </a:xfrm>
           <a:prstGeom prst="roundRect">
             <a:avLst>
-              <a:gd name="adj" fmla="val 2791"/>
+              <a:gd name="adj" fmla="val 4828"/>
             </a:avLst>
           </a:prstGeom>
           <a:solidFill>
-            <a:srgbClr val="E4E7EB"/>
+            <a:srgbClr val="102A43"/>
           </a:solidFill>
           <a:ln w="12700">
             <a:solidFill>
-              <a:srgbClr val="E4E7EB"/>
+              <a:srgbClr val="102A43"/>
             </a:solidFill>
             <a:prstDash val="solid"/>
           </a:ln>
@@ -4624,47 +5384,770 @@
       </p:sp>
       <p:sp>
         <p:nvSpPr>
+          <p:cNvPr id="10" name="Text 7"/>
+          <p:cNvSpPr txBox="1"/>
+          <p:nvPr/>
+        </p:nvSpPr>
+        <p:spPr>
+          <a:xfrm>
+            <a:off x="4069080" y="2002536"/>
+            <a:ext cx="1325880" cy="228600"/>
+          </a:xfrm>
+          <a:prstGeom prst="rect">
+            <a:avLst/>
+          </a:prstGeom>
+          <a:noFill/>
+          <a:ln/>
+        </p:spPr>
+        <p:txBody>
+          <a:bodyPr wrap="square" lIns="0" tIns="0" rIns="0" bIns="0" rtlCol="0" anchor="ctr"/>
+          <a:lstStyle/>
+          <a:p>
+            <a:pPr algn="ctr" indent="0" marL="0">
+              <a:buNone/>
+            </a:pPr>
+            <a:r>
+              <a:rPr lang="en-US" sz="900" b="1" dirty="0">
+                <a:solidFill>
+                  <a:srgbClr val="4098D7"/>
+                </a:solidFill>
+                <a:latin typeface="Calibri" pitchFamily="34" charset="0"/>
+                <a:ea typeface="Calibri" pitchFamily="34" charset="-122"/>
+                <a:cs typeface="Calibri" pitchFamily="34" charset="-120"/>
+              </a:rPr>
+              <a:t>1</a:t>
+            </a:r>
+            <a:endParaRPr lang="en-US" sz="900" dirty="0"/>
+          </a:p>
+        </p:txBody>
+      </p:sp>
+      <p:sp>
+        <p:nvSpPr>
+          <p:cNvPr id="11" name="Text 8"/>
+          <p:cNvSpPr txBox="1"/>
+          <p:nvPr/>
+        </p:nvSpPr>
+        <p:spPr>
+          <a:xfrm>
+            <a:off x="4069080" y="2221992"/>
+            <a:ext cx="1325880" cy="310896"/>
+          </a:xfrm>
+          <a:prstGeom prst="rect">
+            <a:avLst/>
+          </a:prstGeom>
+          <a:noFill/>
+          <a:ln/>
+        </p:spPr>
+        <p:txBody>
+          <a:bodyPr wrap="square" lIns="0" tIns="0" rIns="0" bIns="0" rtlCol="0" anchor="ctr"/>
+          <a:lstStyle/>
+          <a:p>
+            <a:pPr algn="ctr" indent="0" marL="0">
+              <a:buNone/>
+            </a:pPr>
+            <a:r>
+              <a:rPr lang="en-US" sz="1500" b="1" dirty="0">
+                <a:solidFill>
+                  <a:srgbClr val="FFFFFF"/>
+                </a:solidFill>
+                <a:latin typeface="Cambria" pitchFamily="34" charset="0"/>
+                <a:ea typeface="Cambria" pitchFamily="34" charset="-122"/>
+                <a:cs typeface="Cambria" pitchFamily="34" charset="-120"/>
+              </a:rPr>
+              <a:t>Cost</a:t>
+            </a:r>
+            <a:endParaRPr lang="en-US" sz="1500" dirty="0"/>
+          </a:p>
+        </p:txBody>
+      </p:sp>
+      <p:sp>
+        <p:nvSpPr>
+          <p:cNvPr id="12" name="Text 9"/>
+          <p:cNvSpPr txBox="1"/>
+          <p:nvPr/>
+        </p:nvSpPr>
+        <p:spPr>
+          <a:xfrm>
+            <a:off x="4069080" y="2587752"/>
+            <a:ext cx="1325880" cy="548640"/>
+          </a:xfrm>
+          <a:prstGeom prst="rect">
+            <a:avLst/>
+          </a:prstGeom>
+          <a:noFill/>
+          <a:ln/>
+        </p:spPr>
+        <p:txBody>
+          <a:bodyPr wrap="square" lIns="0" tIns="0" rIns="0" bIns="0" rtlCol="0" anchor="ctr"/>
+          <a:lstStyle/>
+          <a:p>
+            <a:pPr algn="ctr" indent="0" marL="0">
+              <a:buNone/>
+            </a:pPr>
+            <a:r>
+              <a:rPr lang="en-US" sz="900" dirty="0">
+                <a:solidFill>
+                  <a:srgbClr val="D9E2EC"/>
+                </a:solidFill>
+                <a:latin typeface="Calibri" pitchFamily="34" charset="0"/>
+                <a:ea typeface="Calibri" pitchFamily="34" charset="-122"/>
+                <a:cs typeface="Calibri" pitchFamily="34" charset="-120"/>
+              </a:rPr>
+              <a:t>requests · limits</a:t>
+            </a:r>
+            <a:endParaRPr lang="en-US" sz="900" dirty="0"/>
+          </a:p>
+          <a:p>
+            <a:pPr algn="ctr" indent="0" marL="0">
+              <a:buNone/>
+            </a:pPr>
+            <a:r>
+              <a:rPr lang="en-US" sz="900" dirty="0">
+                <a:solidFill>
+                  <a:srgbClr val="D9E2EC"/>
+                </a:solidFill>
+                <a:latin typeface="Calibri" pitchFamily="34" charset="0"/>
+                <a:ea typeface="Calibri" pitchFamily="34" charset="-122"/>
+                <a:cs typeface="Calibri" pitchFamily="34" charset="-120"/>
+              </a:rPr>
+              <a:t>QoS</a:t>
+            </a:r>
+            <a:endParaRPr lang="en-US" sz="900" dirty="0"/>
+          </a:p>
+        </p:txBody>
+      </p:sp>
+      <p:sp>
+        <p:nvSpPr>
           <p:cNvPr id="13" name="Shape 10"/>
           <p:cNvSpPr/>
           <p:nvPr/>
         </p:nvSpPr>
         <p:spPr>
           <a:xfrm>
-            <a:off x="2679192" y="1508760"/>
-            <a:ext cx="438912" cy="438912"/>
-          </a:xfrm>
-          <a:prstGeom prst="ellipse">
-            <a:avLst/>
+            <a:off x="5449824" y="2560320"/>
+            <a:ext cx="210312" cy="0"/>
+          </a:xfrm>
+          <a:prstGeom prst="line">
+            <a:avLst/>
+          </a:prstGeom>
+          <a:noFill/>
+          <a:ln w="15875">
+            <a:solidFill>
+              <a:srgbClr val="2680C2"/>
+            </a:solidFill>
+            <a:prstDash val="solid"/>
+            <a:tailEnd type="triangle"/>
+          </a:ln>
+        </p:spPr>
+      </p:sp>
+      <p:sp>
+        <p:nvSpPr>
+          <p:cNvPr id="14" name="Shape 11"/>
+          <p:cNvSpPr/>
+          <p:nvPr/>
+        </p:nvSpPr>
+        <p:spPr>
+          <a:xfrm>
+            <a:off x="5715000" y="1874520"/>
+            <a:ext cx="1325880" cy="1371600"/>
+          </a:xfrm>
+          <a:prstGeom prst="roundRect">
+            <a:avLst>
+              <a:gd name="adj" fmla="val 4828"/>
+            </a:avLst>
           </a:prstGeom>
           <a:solidFill>
-            <a:srgbClr val="1F2933"/>
+            <a:srgbClr val="F0F4F8"/>
           </a:solidFill>
           <a:ln w="12700">
             <a:solidFill>
-              <a:srgbClr val="1F2933"/>
+              <a:srgbClr val="D9E2EC"/>
             </a:solidFill>
             <a:prstDash val="solid"/>
           </a:ln>
         </p:spPr>
       </p:sp>
+      <p:sp>
+        <p:nvSpPr>
+          <p:cNvPr id="15" name="Text 12"/>
+          <p:cNvSpPr txBox="1"/>
+          <p:nvPr/>
+        </p:nvSpPr>
+        <p:spPr>
+          <a:xfrm>
+            <a:off x="5715000" y="2002536"/>
+            <a:ext cx="1325880" cy="228600"/>
+          </a:xfrm>
+          <a:prstGeom prst="rect">
+            <a:avLst/>
+          </a:prstGeom>
+          <a:noFill/>
+          <a:ln/>
+        </p:spPr>
+        <p:txBody>
+          <a:bodyPr wrap="square" lIns="0" tIns="0" rIns="0" bIns="0" rtlCol="0" anchor="ctr"/>
+          <a:lstStyle/>
+          <a:p>
+            <a:pPr algn="ctr" indent="0" marL="0">
+              <a:buNone/>
+            </a:pPr>
+            <a:r>
+              <a:rPr lang="en-US" sz="900" b="1" dirty="0">
+                <a:solidFill>
+                  <a:srgbClr val="0A558C"/>
+                </a:solidFill>
+                <a:latin typeface="Calibri" pitchFamily="34" charset="0"/>
+                <a:ea typeface="Calibri" pitchFamily="34" charset="-122"/>
+                <a:cs typeface="Calibri" pitchFamily="34" charset="-120"/>
+              </a:rPr>
+              <a:t>2</a:t>
+            </a:r>
+            <a:endParaRPr lang="en-US" sz="900" dirty="0"/>
+          </a:p>
+        </p:txBody>
+      </p:sp>
+      <p:sp>
+        <p:nvSpPr>
+          <p:cNvPr id="16" name="Text 13"/>
+          <p:cNvSpPr txBox="1"/>
+          <p:nvPr/>
+        </p:nvSpPr>
+        <p:spPr>
+          <a:xfrm>
+            <a:off x="5715000" y="2221992"/>
+            <a:ext cx="1325880" cy="310896"/>
+          </a:xfrm>
+          <a:prstGeom prst="rect">
+            <a:avLst/>
+          </a:prstGeom>
+          <a:noFill/>
+          <a:ln/>
+        </p:spPr>
+        <p:txBody>
+          <a:bodyPr wrap="square" lIns="0" tIns="0" rIns="0" bIns="0" rtlCol="0" anchor="ctr"/>
+          <a:lstStyle/>
+          <a:p>
+            <a:pPr algn="ctr" indent="0" marL="0">
+              <a:buNone/>
+            </a:pPr>
+            <a:r>
+              <a:rPr lang="en-US" sz="1500" b="1" dirty="0">
+                <a:solidFill>
+                  <a:srgbClr val="102A43"/>
+                </a:solidFill>
+                <a:latin typeface="Cambria" pitchFamily="34" charset="0"/>
+                <a:ea typeface="Cambria" pitchFamily="34" charset="-122"/>
+                <a:cs typeface="Cambria" pitchFamily="34" charset="-120"/>
+              </a:rPr>
+              <a:t>Truth</a:t>
+            </a:r>
+            <a:endParaRPr lang="en-US" sz="1500" dirty="0"/>
+          </a:p>
+        </p:txBody>
+      </p:sp>
+      <p:sp>
+        <p:nvSpPr>
+          <p:cNvPr id="17" name="Text 14"/>
+          <p:cNvSpPr txBox="1"/>
+          <p:nvPr/>
+        </p:nvSpPr>
+        <p:spPr>
+          <a:xfrm>
+            <a:off x="5715000" y="2587752"/>
+            <a:ext cx="1325880" cy="548640"/>
+          </a:xfrm>
+          <a:prstGeom prst="rect">
+            <a:avLst/>
+          </a:prstGeom>
+          <a:noFill/>
+          <a:ln/>
+        </p:spPr>
+        <p:txBody>
+          <a:bodyPr wrap="square" lIns="0" tIns="0" rIns="0" bIns="0" rtlCol="0" anchor="ctr"/>
+          <a:lstStyle/>
+          <a:p>
+            <a:pPr algn="ctr" indent="0" marL="0">
+              <a:buNone/>
+            </a:pPr>
+            <a:r>
+              <a:rPr lang="en-US" sz="900" dirty="0">
+                <a:solidFill>
+                  <a:srgbClr val="486581"/>
+                </a:solidFill>
+                <a:latin typeface="Calibri" pitchFamily="34" charset="0"/>
+                <a:ea typeface="Calibri" pitchFamily="34" charset="-122"/>
+                <a:cs typeface="Calibri" pitchFamily="34" charset="-120"/>
+              </a:rPr>
+              <a:t>probes · readiness</a:t>
+            </a:r>
+            <a:endParaRPr lang="en-US" sz="900" dirty="0"/>
+          </a:p>
+          <a:p>
+            <a:pPr algn="ctr" indent="0" marL="0">
+              <a:buNone/>
+            </a:pPr>
+            <a:r>
+              <a:rPr lang="en-US" sz="900" dirty="0">
+                <a:solidFill>
+                  <a:srgbClr val="486581"/>
+                </a:solidFill>
+                <a:latin typeface="Calibri" pitchFamily="34" charset="0"/>
+                <a:ea typeface="Calibri" pitchFamily="34" charset="-122"/>
+                <a:cs typeface="Calibri" pitchFamily="34" charset="-120"/>
+              </a:rPr>
+              <a:t>the drain</a:t>
+            </a:r>
+            <a:endParaRPr lang="en-US" sz="900" dirty="0"/>
+          </a:p>
+        </p:txBody>
+      </p:sp>
+      <p:sp>
+        <p:nvSpPr>
+          <p:cNvPr id="18" name="Shape 15"/>
+          <p:cNvSpPr/>
+          <p:nvPr/>
+        </p:nvSpPr>
+        <p:spPr>
+          <a:xfrm>
+            <a:off x="7095744" y="2560320"/>
+            <a:ext cx="210312" cy="0"/>
+          </a:xfrm>
+          <a:prstGeom prst="line">
+            <a:avLst/>
+          </a:prstGeom>
+          <a:noFill/>
+          <a:ln w="15875">
+            <a:solidFill>
+              <a:srgbClr val="2680C2"/>
+            </a:solidFill>
+            <a:prstDash val="solid"/>
+            <a:tailEnd type="triangle"/>
+          </a:ln>
+        </p:spPr>
+      </p:sp>
+      <p:sp>
+        <p:nvSpPr>
+          <p:cNvPr id="19" name="Shape 16"/>
+          <p:cNvSpPr/>
+          <p:nvPr/>
+        </p:nvSpPr>
+        <p:spPr>
+          <a:xfrm>
+            <a:off x="7360920" y="1874520"/>
+            <a:ext cx="1325880" cy="1371600"/>
+          </a:xfrm>
+          <a:prstGeom prst="roundRect">
+            <a:avLst>
+              <a:gd name="adj" fmla="val 4828"/>
+            </a:avLst>
+          </a:prstGeom>
+          <a:solidFill>
+            <a:srgbClr val="F0F4F8"/>
+          </a:solidFill>
+          <a:ln w="12700">
+            <a:solidFill>
+              <a:srgbClr val="D9E2EC"/>
+            </a:solidFill>
+            <a:prstDash val="solid"/>
+          </a:ln>
+        </p:spPr>
+      </p:sp>
+      <p:sp>
+        <p:nvSpPr>
+          <p:cNvPr id="20" name="Text 17"/>
+          <p:cNvSpPr txBox="1"/>
+          <p:nvPr/>
+        </p:nvSpPr>
+        <p:spPr>
+          <a:xfrm>
+            <a:off x="7360920" y="2002536"/>
+            <a:ext cx="1325880" cy="228600"/>
+          </a:xfrm>
+          <a:prstGeom prst="rect">
+            <a:avLst/>
+          </a:prstGeom>
+          <a:noFill/>
+          <a:ln/>
+        </p:spPr>
+        <p:txBody>
+          <a:bodyPr wrap="square" lIns="0" tIns="0" rIns="0" bIns="0" rtlCol="0" anchor="ctr"/>
+          <a:lstStyle/>
+          <a:p>
+            <a:pPr algn="ctr" indent="0" marL="0">
+              <a:buNone/>
+            </a:pPr>
+            <a:r>
+              <a:rPr lang="en-US" sz="900" b="1" dirty="0">
+                <a:solidFill>
+                  <a:srgbClr val="0A558C"/>
+                </a:solidFill>
+                <a:latin typeface="Calibri" pitchFamily="34" charset="0"/>
+                <a:ea typeface="Calibri" pitchFamily="34" charset="-122"/>
+                <a:cs typeface="Calibri" pitchFamily="34" charset="-120"/>
+              </a:rPr>
+              <a:t>3</a:t>
+            </a:r>
+            <a:endParaRPr lang="en-US" sz="900" dirty="0"/>
+          </a:p>
+        </p:txBody>
+      </p:sp>
+      <p:sp>
+        <p:nvSpPr>
+          <p:cNvPr id="21" name="Text 18"/>
+          <p:cNvSpPr txBox="1"/>
+          <p:nvPr/>
+        </p:nvSpPr>
+        <p:spPr>
+          <a:xfrm>
+            <a:off x="7360920" y="2221992"/>
+            <a:ext cx="1325880" cy="310896"/>
+          </a:xfrm>
+          <a:prstGeom prst="rect">
+            <a:avLst/>
+          </a:prstGeom>
+          <a:noFill/>
+          <a:ln/>
+        </p:spPr>
+        <p:txBody>
+          <a:bodyPr wrap="square" lIns="0" tIns="0" rIns="0" bIns="0" rtlCol="0" anchor="ctr"/>
+          <a:lstStyle/>
+          <a:p>
+            <a:pPr algn="ctr" indent="0" marL="0">
+              <a:buNone/>
+            </a:pPr>
+            <a:r>
+              <a:rPr lang="en-US" sz="1500" b="1" dirty="0">
+                <a:solidFill>
+                  <a:srgbClr val="102A43"/>
+                </a:solidFill>
+                <a:latin typeface="Cambria" pitchFamily="34" charset="0"/>
+                <a:ea typeface="Cambria" pitchFamily="34" charset="-122"/>
+                <a:cs typeface="Cambria" pitchFamily="34" charset="-120"/>
+              </a:rPr>
+              <a:t>Response</a:t>
+            </a:r>
+            <a:endParaRPr lang="en-US" sz="1500" dirty="0"/>
+          </a:p>
+        </p:txBody>
+      </p:sp>
+      <p:sp>
+        <p:nvSpPr>
+          <p:cNvPr id="22" name="Text 19"/>
+          <p:cNvSpPr txBox="1"/>
+          <p:nvPr/>
+        </p:nvSpPr>
+        <p:spPr>
+          <a:xfrm>
+            <a:off x="7360920" y="2587752"/>
+            <a:ext cx="1325880" cy="548640"/>
+          </a:xfrm>
+          <a:prstGeom prst="rect">
+            <a:avLst/>
+          </a:prstGeom>
+          <a:noFill/>
+          <a:ln/>
+        </p:spPr>
+        <p:txBody>
+          <a:bodyPr wrap="square" lIns="0" tIns="0" rIns="0" bIns="0" rtlCol="0" anchor="ctr"/>
+          <a:lstStyle/>
+          <a:p>
+            <a:pPr algn="ctr" indent="0" marL="0">
+              <a:buNone/>
+            </a:pPr>
+            <a:r>
+              <a:rPr lang="en-US" sz="900" dirty="0">
+                <a:solidFill>
+                  <a:srgbClr val="486581"/>
+                </a:solidFill>
+                <a:latin typeface="Calibri" pitchFamily="34" charset="0"/>
+                <a:ea typeface="Calibri" pitchFamily="34" charset="-122"/>
+                <a:cs typeface="Calibri" pitchFamily="34" charset="-120"/>
+              </a:rPr>
+              <a:t>signal · target</a:t>
+            </a:r>
+            <a:endParaRPr lang="en-US" sz="900" dirty="0"/>
+          </a:p>
+          <a:p>
+            <a:pPr algn="ctr" indent="0" marL="0">
+              <a:buNone/>
+            </a:pPr>
+            <a:r>
+              <a:rPr lang="en-US" sz="900" dirty="0">
+                <a:solidFill>
+                  <a:srgbClr val="486581"/>
+                </a:solidFill>
+                <a:latin typeface="Calibri" pitchFamily="34" charset="0"/>
+                <a:ea typeface="Calibri" pitchFamily="34" charset="-122"/>
+                <a:cs typeface="Calibri" pitchFamily="34" charset="-120"/>
+              </a:rPr>
+              <a:t>floor &amp; ceiling</a:t>
+            </a:r>
+            <a:endParaRPr lang="en-US" sz="900" dirty="0"/>
+          </a:p>
+        </p:txBody>
+      </p:sp>
+      <p:sp>
+        <p:nvSpPr>
+          <p:cNvPr id="23" name="Shape 20"/>
+          <p:cNvSpPr/>
+          <p:nvPr/>
+        </p:nvSpPr>
+        <p:spPr>
+          <a:xfrm>
+            <a:off x="8023860" y="3246120"/>
+            <a:ext cx="0" cy="384048"/>
+          </a:xfrm>
+          <a:prstGeom prst="line">
+            <a:avLst/>
+          </a:prstGeom>
+          <a:noFill/>
+          <a:ln w="15875">
+            <a:solidFill>
+              <a:srgbClr val="2680C2"/>
+            </a:solidFill>
+            <a:prstDash val="solid"/>
+          </a:ln>
+        </p:spPr>
+      </p:sp>
+      <p:sp>
+        <p:nvSpPr>
+          <p:cNvPr id="24" name="Shape 21"/>
+          <p:cNvSpPr/>
+          <p:nvPr/>
+        </p:nvSpPr>
+        <p:spPr>
+          <a:xfrm>
+            <a:off x="4732020" y="3630168"/>
+            <a:ext cx="3291840" cy="0"/>
+          </a:xfrm>
+          <a:prstGeom prst="line">
+            <a:avLst/>
+          </a:prstGeom>
+          <a:noFill/>
+          <a:ln w="15875">
+            <a:solidFill>
+              <a:srgbClr val="2680C2"/>
+            </a:solidFill>
+            <a:prstDash val="solid"/>
+            <a:headEnd type="triangle"/>
+          </a:ln>
+        </p:spPr>
+      </p:sp>
+      <p:sp>
+        <p:nvSpPr>
+          <p:cNvPr id="25" name="Shape 22"/>
+          <p:cNvSpPr/>
+          <p:nvPr/>
+        </p:nvSpPr>
+        <p:spPr>
+          <a:xfrm>
+            <a:off x="4732020" y="3246120"/>
+            <a:ext cx="0" cy="384048"/>
+          </a:xfrm>
+          <a:prstGeom prst="line">
+            <a:avLst/>
+          </a:prstGeom>
+          <a:noFill/>
+          <a:ln w="15875">
+            <a:solidFill>
+              <a:srgbClr val="2680C2"/>
+            </a:solidFill>
+            <a:prstDash val="solid"/>
+          </a:ln>
+        </p:spPr>
+      </p:sp>
+      <p:sp>
+        <p:nvSpPr>
+          <p:cNvPr id="26" name="Text 23"/>
+          <p:cNvSpPr txBox="1"/>
+          <p:nvPr/>
+        </p:nvSpPr>
+        <p:spPr>
+          <a:xfrm>
+            <a:off x="4069080" y="3739896"/>
+            <a:ext cx="4617720" cy="274320"/>
+          </a:xfrm>
+          <a:prstGeom prst="rect">
+            <a:avLst/>
+          </a:prstGeom>
+          <a:noFill/>
+          <a:ln/>
+        </p:spPr>
+        <p:txBody>
+          <a:bodyPr wrap="square" lIns="0" tIns="0" rIns="0" bIns="0" rtlCol="0" anchor="ctr"/>
+          <a:lstStyle/>
+          <a:p>
+            <a:pPr algn="ctr" indent="0" marL="0">
+              <a:buNone/>
+            </a:pPr>
+            <a:r>
+              <a:rPr lang="en-US" sz="950" i="1" dirty="0">
+                <a:solidFill>
+                  <a:srgbClr val="486581"/>
+                </a:solidFill>
+                <a:latin typeface="Calibri" pitchFamily="34" charset="0"/>
+                <a:ea typeface="Calibri" pitchFamily="34" charset="-122"/>
+                <a:cs typeface="Calibri" pitchFamily="34" charset="-120"/>
+              </a:rPr>
+              <a:t>each door’s output is the next door’s input</a:t>
+            </a:r>
+            <a:endParaRPr lang="en-US" sz="950" dirty="0"/>
+          </a:p>
+        </p:txBody>
+      </p:sp>
+    </p:spTree>
+  </p:cSld>
+  <p:clrMapOvr>
+    <a:masterClrMapping/>
+  </p:clrMapOvr>
+</p:sld>
+</file>
+
+<file path=ppt/slides/slide6.xml><?xml version="1.0" encoding="utf-8"?>
+<p:sld xmlns:a="http://schemas.openxmlformats.org/drawingml/2006/main" xmlns:r="http://schemas.openxmlformats.org/officeDocument/2006/relationships" xmlns:p="http://schemas.openxmlformats.org/presentationml/2006/main">
+  <p:cSld name="Slide 6">
+    <p:bg>
+      <p:bgPr>
+        <a:solidFill>
+          <a:srgbClr val="FFFFFF"/>
+        </a:solidFill>
+      </p:bgPr>
+    </p:bg>
+    <p:spTree>
+      <p:nvGrpSpPr>
+        <p:cNvPr id="1" name=""/>
+        <p:cNvGrpSpPr/>
+        <p:nvPr/>
+      </p:nvGrpSpPr>
+      <p:grpSpPr>
+        <a:xfrm>
+          <a:off x="0" y="0"/>
+          <a:ext cx="0" cy="0"/>
+          <a:chOff x="0" y="0"/>
+          <a:chExt cx="0" cy="0"/>
+        </a:xfrm>
+      </p:grpSpPr>
+      <p:sp>
+        <p:nvSpPr>
+          <p:cNvPr id="2" name="Text 0"/>
+          <p:cNvSpPr txBox="1"/>
+          <p:nvPr/>
+        </p:nvSpPr>
+        <p:spPr>
+          <a:xfrm>
+            <a:off x="457200" y="274320"/>
+            <a:ext cx="8229600" cy="228600"/>
+          </a:xfrm>
+          <a:prstGeom prst="rect">
+            <a:avLst/>
+          </a:prstGeom>
+          <a:noFill/>
+          <a:ln/>
+        </p:spPr>
+        <p:txBody>
+          <a:bodyPr wrap="square" lIns="0" tIns="0" rIns="0" bIns="0" rtlCol="0" anchor="ctr"/>
+          <a:lstStyle/>
+          <a:p>
+            <a:pPr indent="0" marL="0">
+              <a:buNone/>
+            </a:pPr>
+            <a:r>
+              <a:rPr lang="en-US" sz="1000" b="1" spc="140" kern="0" dirty="0">
+                <a:solidFill>
+                  <a:srgbClr val="0A558C"/>
+                </a:solidFill>
+                <a:latin typeface="Calibri" pitchFamily="34" charset="0"/>
+                <a:ea typeface="Calibri" pitchFamily="34" charset="-122"/>
+                <a:cs typeface="Calibri" pitchFamily="34" charset="-120"/>
+              </a:rPr>
+              <a:t>EXAMPLE 2 OF 4   ·   WHAT YOU MEASURE</a:t>
+            </a:r>
+            <a:endParaRPr lang="en-US" sz="1000" dirty="0"/>
+          </a:p>
+        </p:txBody>
+      </p:sp>
+      <p:sp>
+        <p:nvSpPr>
+          <p:cNvPr id="3" name="Text 1"/>
+          <p:cNvSpPr txBox="1"/>
+          <p:nvPr/>
+        </p:nvSpPr>
+        <p:spPr>
+          <a:xfrm>
+            <a:off x="896112" y="530352"/>
+            <a:ext cx="3108960" cy="502920"/>
+          </a:xfrm>
+          <a:prstGeom prst="rect">
+            <a:avLst/>
+          </a:prstGeom>
+          <a:noFill/>
+          <a:ln/>
+        </p:spPr>
+        <p:txBody>
+          <a:bodyPr wrap="square" lIns="0" tIns="0" rIns="0" bIns="0" rtlCol="0" anchor="ctr"/>
+          <a:lstStyle/>
+          <a:p>
+            <a:pPr indent="0" marL="0">
+              <a:buNone/>
+            </a:pPr>
+            <a:r>
+              <a:rPr lang="en-US" sz="2800" b="1" dirty="0">
+                <a:solidFill>
+                  <a:srgbClr val="102A43"/>
+                </a:solidFill>
+                <a:latin typeface="Cambria" pitchFamily="34" charset="0"/>
+                <a:ea typeface="Cambria" pitchFamily="34" charset="-122"/>
+                <a:cs typeface="Cambria" pitchFamily="34" charset="-120"/>
+              </a:rPr>
+              <a:t>The Three Lenses</a:t>
+            </a:r>
+            <a:endParaRPr lang="en-US" sz="2800" dirty="0"/>
+          </a:p>
+        </p:txBody>
+      </p:sp>
+      <p:sp>
+        <p:nvSpPr>
+          <p:cNvPr id="4" name="Shape 2"/>
+          <p:cNvSpPr/>
+          <p:nvPr/>
+        </p:nvSpPr>
+        <p:spPr>
+          <a:xfrm>
+            <a:off x="457200" y="576072"/>
+            <a:ext cx="384048" cy="384048"/>
+          </a:xfrm>
+          <a:prstGeom prst="ellipse">
+            <a:avLst/>
+          </a:prstGeom>
+          <a:solidFill>
+            <a:srgbClr val="2680C2"/>
+          </a:solidFill>
+          <a:ln w="12700">
+            <a:solidFill>
+              <a:srgbClr val="2680C2"/>
+            </a:solidFill>
+            <a:prstDash val="solid"/>
+          </a:ln>
+        </p:spPr>
+      </p:sp>
       <p:pic>
         <p:nvPicPr>
-          <p:cNvPr id="14" name="Image 1" descr="preencoded.png">    </p:cNvPr>
+          <p:cNvPr id="5" name="Image 0" descr="preencoded.png">    </p:cNvPr>
           <p:cNvPicPr>
             <a:picLocks noChangeAspect="1"/>
           </p:cNvPicPr>
           <p:nvPr/>
         </p:nvPicPr>
         <p:blipFill>
-          <a:blip r:embed="rId2"/>
+          <a:blip r:embed="rId1"/>
           <a:stretch>
             <a:fillRect/>
           </a:stretch>
         </p:blipFill>
         <p:spPr>
           <a:xfrm>
-            <a:off x="2784531" y="1614099"/>
-            <a:ext cx="228234" cy="228234"/>
+            <a:off x="549372" y="668244"/>
+            <a:ext cx="199705" cy="199705"/>
           </a:xfrm>
           <a:prstGeom prst="rect">
             <a:avLst/>
@@ -4673,77 +6156,130 @@
       </p:pic>
       <p:sp>
         <p:nvSpPr>
-          <p:cNvPr id="15" name="Text 11"/>
-          <p:cNvSpPr txBox="1"/>
-          <p:nvPr/>
-        </p:nvSpPr>
-        <p:spPr>
-          <a:xfrm>
-            <a:off x="3200400" y="1481328"/>
-            <a:ext cx="1234440" cy="274320"/>
-          </a:xfrm>
-          <a:prstGeom prst="rect">
-            <a:avLst/>
-          </a:prstGeom>
-          <a:noFill/>
-          <a:ln/>
-        </p:spPr>
-        <p:txBody>
-          <a:bodyPr wrap="square" lIns="0" tIns="0" rIns="0" bIns="0" rtlCol="0" anchor="ctr"/>
-          <a:lstStyle/>
-          <a:p>
-            <a:pPr indent="0" marL="0">
-              <a:buNone/>
-            </a:pPr>
-            <a:r>
-              <a:rPr lang="en-US" sz="1250" b="1" dirty="0">
-                <a:solidFill>
-                  <a:srgbClr val="1F2933"/>
-                </a:solidFill>
-                <a:latin typeface="Calibri" pitchFamily="34" charset="0"/>
-                <a:ea typeface="Calibri" pitchFamily="34" charset="-122"/>
-                <a:cs typeface="Calibri" pitchFamily="34" charset="-120"/>
-              </a:rPr>
-              <a:t>The Three Lenses</a:t>
-            </a:r>
-            <a:endParaRPr lang="en-US" sz="1250" dirty="0"/>
-          </a:p>
-        </p:txBody>
-      </p:sp>
-      <p:sp>
-        <p:nvSpPr>
-          <p:cNvPr id="16" name="Text 12"/>
-          <p:cNvSpPr txBox="1"/>
-          <p:nvPr/>
-        </p:nvSpPr>
-        <p:spPr>
-          <a:xfrm>
-            <a:off x="3200400" y="1737360"/>
-            <a:ext cx="1234440" cy="228600"/>
-          </a:xfrm>
-          <a:prstGeom prst="rect">
-            <a:avLst/>
-          </a:prstGeom>
-          <a:noFill/>
-          <a:ln/>
-        </p:spPr>
-        <p:txBody>
-          <a:bodyPr wrap="square" lIns="0" tIns="0" rIns="0" bIns="0" rtlCol="0" anchor="ctr"/>
-          <a:lstStyle/>
-          <a:p>
-            <a:pPr indent="0" marL="0">
-              <a:buNone/>
-            </a:pPr>
-            <a:r>
-              <a:rPr lang="en-US" sz="1000" i="1" dirty="0">
-                <a:solidFill>
-                  <a:srgbClr val="B86A1E"/>
-                </a:solidFill>
-                <a:latin typeface="Calibri" pitchFamily="34" charset="0"/>
-                <a:ea typeface="Calibri" pitchFamily="34" charset="-122"/>
-                <a:cs typeface="Calibri" pitchFamily="34" charset="-120"/>
-              </a:rPr>
-              <a:t>what you measure</a:t>
+          <p:cNvPr id="6" name="Text 3"/>
+          <p:cNvSpPr txBox="1"/>
+          <p:nvPr/>
+        </p:nvSpPr>
+        <p:spPr>
+          <a:xfrm>
+            <a:off x="457200" y="1298448"/>
+            <a:ext cx="3383280" cy="1600200"/>
+          </a:xfrm>
+          <a:prstGeom prst="rect">
+            <a:avLst/>
+          </a:prstGeom>
+          <a:noFill/>
+          <a:ln/>
+        </p:spPr>
+        <p:txBody>
+          <a:bodyPr wrap="square" lIns="0" tIns="0" rIns="0" bIns="0" rtlCol="0" anchor="t"/>
+          <a:lstStyle/>
+          <a:p>
+            <a:pPr indent="0" marL="0">
+              <a:buNone/>
+            </a:pPr>
+            <a:r>
+              <a:rPr lang="en-US" sz="1100" dirty="0">
+                <a:solidFill>
+                  <a:srgbClr val="486581"/>
+                </a:solidFill>
+                <a:latin typeface="Calibri" pitchFamily="34" charset="0"/>
+                <a:ea typeface="Calibri" pitchFamily="34" charset="-122"/>
+                <a:cs typeface="Calibri" pitchFamily="34" charset="-120"/>
+              </a:rPr>
+              <a:t>There are exactly three places to stand to find out what a running program is doing: outside at the kernel’s ledger, inside by continuous self-report, and inside on demand by interrogation. Logs, traces, an APM agent and a dashboard are all one of these three wearing different clothes.</a:t>
+            </a:r>
+            <a:endParaRPr lang="en-US" sz="1100" dirty="0"/>
+          </a:p>
+        </p:txBody>
+      </p:sp>
+      <p:sp>
+        <p:nvSpPr>
+          <p:cNvPr id="7" name="Text 4"/>
+          <p:cNvSpPr txBox="1"/>
+          <p:nvPr/>
+        </p:nvSpPr>
+        <p:spPr>
+          <a:xfrm>
+            <a:off x="457200" y="2542032"/>
+            <a:ext cx="3383280" cy="731520"/>
+          </a:xfrm>
+          <a:prstGeom prst="rect">
+            <a:avLst/>
+          </a:prstGeom>
+          <a:noFill/>
+          <a:ln/>
+        </p:spPr>
+        <p:txBody>
+          <a:bodyPr wrap="square" lIns="0" tIns="0" rIns="0" bIns="0" rtlCol="0" anchor="t"/>
+          <a:lstStyle/>
+          <a:p>
+            <a:pPr indent="0" marL="0">
+              <a:buNone/>
+            </a:pPr>
+            <a:r>
+              <a:rPr lang="en-US" sz="1200" i="1" dirty="0">
+                <a:solidFill>
+                  <a:srgbClr val="102A43"/>
+                </a:solidFill>
+                <a:latin typeface="Calibri" pitchFamily="34" charset="0"/>
+                <a:ea typeface="Calibri" pitchFamily="34" charset="-122"/>
+                <a:cs typeface="Calibri" pitchFamily="34" charset="-120"/>
+              </a:rPr>
+              <a:t>“A correct number read through the wrong lens is the most common misdiagnosis on the cluster.”</a:t>
+            </a:r>
+            <a:endParaRPr lang="en-US" sz="1200" dirty="0"/>
+          </a:p>
+        </p:txBody>
+      </p:sp>
+      <p:sp>
+        <p:nvSpPr>
+          <p:cNvPr id="8" name="Text 5"/>
+          <p:cNvSpPr txBox="1"/>
+          <p:nvPr/>
+        </p:nvSpPr>
+        <p:spPr>
+          <a:xfrm>
+            <a:off x="457200" y="3346704"/>
+            <a:ext cx="3383280" cy="914400"/>
+          </a:xfrm>
+          <a:prstGeom prst="rect">
+            <a:avLst/>
+          </a:prstGeom>
+          <a:noFill/>
+          <a:ln/>
+        </p:spPr>
+        <p:txBody>
+          <a:bodyPr wrap="square" lIns="0" tIns="0" rIns="0" bIns="0" rtlCol="0" anchor="t"/>
+          <a:lstStyle/>
+          <a:p>
+            <a:pPr indent="0" marL="0">
+              <a:buNone/>
+            </a:pPr>
+            <a:r>
+              <a:rPr lang="en-US" sz="1000" b="1" dirty="0">
+                <a:solidFill>
+                  <a:srgbClr val="0A558C"/>
+                </a:solidFill>
+                <a:latin typeface="Calibri" pitchFamily="34" charset="0"/>
+                <a:ea typeface="Calibri" pitchFamily="34" charset="-122"/>
+                <a:cs typeface="Calibri" pitchFamily="34" charset="-120"/>
+              </a:rPr>
+              <a:t>In practice: </a:t>
+            </a:r>
+            <a:pPr indent="0" marL="0">
+              <a:buNone/>
+            </a:pPr>
+            <a:r>
+              <a:rPr lang="en-US" sz="1000" dirty="0">
+                <a:solidFill>
+                  <a:srgbClr val="486581"/>
+                </a:solidFill>
+                <a:latin typeface="Calibri" pitchFamily="34" charset="0"/>
+                <a:ea typeface="Calibri" pitchFamily="34" charset="-122"/>
+                <a:cs typeface="Calibri" pitchFamily="34" charset="-120"/>
+              </a:rPr>
+              <a:t>The two-lens query: pod working set minus JVM heap = the non-heap footprint — a number neither lens can produce alone.</a:t>
             </a:r>
             <a:endParaRPr lang="en-US" sz="1000" dirty="0"/>
           </a:p>
@@ -4751,157 +6287,26 @@
       </p:sp>
       <p:sp>
         <p:nvSpPr>
-          <p:cNvPr id="17" name="Text 13"/>
-          <p:cNvSpPr txBox="1"/>
-          <p:nvPr/>
-        </p:nvSpPr>
-        <p:spPr>
-          <a:xfrm>
-            <a:off x="2679192" y="2084832"/>
-            <a:ext cx="1691640" cy="1234440"/>
-          </a:xfrm>
-          <a:prstGeom prst="rect">
-            <a:avLst/>
-          </a:prstGeom>
-          <a:noFill/>
-          <a:ln/>
-        </p:spPr>
-        <p:txBody>
-          <a:bodyPr wrap="square" lIns="0" tIns="0" rIns="0" bIns="0" rtlCol="0" anchor="t"/>
-          <a:lstStyle/>
-          <a:p>
-            <a:pPr indent="0" marL="0">
-              <a:buNone/>
-            </a:pPr>
-            <a:r>
-              <a:rPr lang="en-US" sz="950" dirty="0">
-                <a:solidFill>
-                  <a:srgbClr val="52606D"/>
-                </a:solidFill>
-                <a:latin typeface="Calibri" pitchFamily="34" charset="0"/>
-                <a:ea typeface="Calibri" pitchFamily="34" charset="-122"/>
-                <a:cs typeface="Calibri" pitchFamily="34" charset="-120"/>
-              </a:rPr>
-              <a:t>Cost · Report · Interrogation — one zoom. The cluster’s ledger, the process’s self-report, the inside view; each lens’s blind spot is the next lens’s field of view.</a:t>
-            </a:r>
-            <a:endParaRPr lang="en-US" sz="950" dirty="0"/>
-          </a:p>
-        </p:txBody>
-      </p:sp>
-      <p:sp>
-        <p:nvSpPr>
-          <p:cNvPr id="18" name="Text 14"/>
-          <p:cNvSpPr txBox="1"/>
-          <p:nvPr/>
-        </p:nvSpPr>
-        <p:spPr>
-          <a:xfrm>
-            <a:off x="2679192" y="3337560"/>
-            <a:ext cx="1691640" cy="685800"/>
-          </a:xfrm>
-          <a:prstGeom prst="rect">
-            <a:avLst/>
-          </a:prstGeom>
-          <a:noFill/>
-          <a:ln/>
-        </p:spPr>
-        <p:txBody>
-          <a:bodyPr wrap="square" lIns="0" tIns="0" rIns="0" bIns="0" rtlCol="0" anchor="t"/>
-          <a:lstStyle/>
-          <a:p>
-            <a:pPr indent="0" marL="0">
-              <a:buNone/>
-            </a:pPr>
-            <a:r>
-              <a:rPr lang="en-US" sz="950" i="1" dirty="0">
-                <a:solidFill>
-                  <a:srgbClr val="1F2933"/>
-                </a:solidFill>
-                <a:latin typeface="Calibri" pitchFamily="34" charset="0"/>
-                <a:ea typeface="Calibri" pitchFamily="34" charset="-122"/>
-                <a:cs typeface="Calibri" pitchFamily="34" charset="-120"/>
-              </a:rPr>
-              <a:t>“A correct number read through the wrong lens is the most common misdiagnosis on the cluster.”</a:t>
-            </a:r>
-            <a:endParaRPr lang="en-US" sz="950" dirty="0"/>
-          </a:p>
-        </p:txBody>
-      </p:sp>
-      <p:sp>
-        <p:nvSpPr>
-          <p:cNvPr id="19" name="Text 15"/>
-          <p:cNvSpPr txBox="1"/>
-          <p:nvPr/>
-        </p:nvSpPr>
-        <p:spPr>
-          <a:xfrm>
-            <a:off x="2679192" y="4069080"/>
-            <a:ext cx="1691640" cy="640080"/>
-          </a:xfrm>
-          <a:prstGeom prst="rect">
-            <a:avLst/>
-          </a:prstGeom>
-          <a:noFill/>
-          <a:ln/>
-        </p:spPr>
-        <p:txBody>
-          <a:bodyPr wrap="square" lIns="0" tIns="0" rIns="0" bIns="0" rtlCol="0" anchor="t"/>
-          <a:lstStyle/>
-          <a:p>
-            <a:pPr indent="0" marL="0">
-              <a:buNone/>
-            </a:pPr>
-            <a:r>
-              <a:rPr lang="en-US" sz="950" b="1" dirty="0">
-                <a:solidFill>
-                  <a:srgbClr val="1F2933"/>
-                </a:solidFill>
-                <a:latin typeface="Calibri" pitchFamily="34" charset="0"/>
-                <a:ea typeface="Calibri" pitchFamily="34" charset="-122"/>
-                <a:cs typeface="Calibri" pitchFamily="34" charset="-120"/>
-              </a:rPr>
-              <a:t>Tactic: </a:t>
-            </a:r>
-            <a:pPr indent="0" marL="0">
-              <a:buNone/>
-            </a:pPr>
-            <a:r>
-              <a:rPr lang="en-US" sz="950" dirty="0">
-                <a:solidFill>
-                  <a:srgbClr val="52606D"/>
-                </a:solidFill>
-                <a:latin typeface="Calibri" pitchFamily="34" charset="0"/>
-                <a:ea typeface="Calibri" pitchFamily="34" charset="-122"/>
-                <a:cs typeface="Calibri" pitchFamily="34" charset="-120"/>
-              </a:rPr>
-              <a:t>The two-lens query: working set minus heap = the native footprint.</a:t>
-            </a:r>
-            <a:endParaRPr lang="en-US" sz="950" dirty="0"/>
-          </a:p>
-        </p:txBody>
-      </p:sp>
-      <p:sp>
-        <p:nvSpPr>
-          <p:cNvPr id="20" name="Shape 16"/>
+          <p:cNvPr id="9" name="Shape 6"/>
           <p:cNvSpPr/>
           <p:nvPr/>
         </p:nvSpPr>
         <p:spPr>
           <a:xfrm>
-            <a:off x="4626864" y="1371600"/>
-            <a:ext cx="1965960" cy="3429000"/>
+            <a:off x="4069080" y="1554480"/>
+            <a:ext cx="4572000" cy="2743200"/>
           </a:xfrm>
           <a:prstGeom prst="roundRect">
             <a:avLst>
-              <a:gd name="adj" fmla="val 2791"/>
+              <a:gd name="adj" fmla="val 2000"/>
             </a:avLst>
           </a:prstGeom>
           <a:solidFill>
-            <a:srgbClr val="E4E7EB"/>
+            <a:srgbClr val="F0F4F8"/>
           </a:solidFill>
           <a:ln w="12700">
             <a:solidFill>
-              <a:srgbClr val="E4E7EB"/>
+              <a:srgbClr val="D9E2EC"/>
             </a:solidFill>
             <a:prstDash val="solid"/>
           </a:ln>
@@ -4909,47 +6314,484 @@
       </p:sp>
       <p:sp>
         <p:nvSpPr>
-          <p:cNvPr id="21" name="Shape 17"/>
+          <p:cNvPr id="10" name="Text 7"/>
+          <p:cNvSpPr txBox="1"/>
+          <p:nvPr/>
+        </p:nvSpPr>
+        <p:spPr>
+          <a:xfrm>
+            <a:off x="4224528" y="1664208"/>
+            <a:ext cx="3108960" cy="237744"/>
+          </a:xfrm>
+          <a:prstGeom prst="rect">
+            <a:avLst/>
+          </a:prstGeom>
+          <a:noFill/>
+          <a:ln/>
+        </p:spPr>
+        <p:txBody>
+          <a:bodyPr wrap="square" lIns="0" tIns="0" rIns="0" bIns="0" rtlCol="0" anchor="ctr"/>
+          <a:lstStyle/>
+          <a:p>
+            <a:pPr indent="0" marL="0">
+              <a:buNone/>
+            </a:pPr>
+            <a:r>
+              <a:rPr lang="en-US" sz="1100" b="1" dirty="0">
+                <a:solidFill>
+                  <a:srgbClr val="102A43"/>
+                </a:solidFill>
+                <a:latin typeface="Calibri" pitchFamily="34" charset="0"/>
+                <a:ea typeface="Calibri" pitchFamily="34" charset="-122"/>
+                <a:cs typeface="Calibri" pitchFamily="34" charset="-120"/>
+              </a:rPr>
+              <a:t>Lens 1 · the cluster’s ledger</a:t>
+            </a:r>
+            <a:endParaRPr lang="en-US" sz="1100" dirty="0"/>
+          </a:p>
+        </p:txBody>
+      </p:sp>
+      <p:sp>
+        <p:nvSpPr>
+          <p:cNvPr id="11" name="Text 8"/>
+          <p:cNvSpPr txBox="1"/>
+          <p:nvPr/>
+        </p:nvSpPr>
+        <p:spPr>
+          <a:xfrm>
+            <a:off x="4224528" y="1883664"/>
+            <a:ext cx="3840480" cy="219456"/>
+          </a:xfrm>
+          <a:prstGeom prst="rect">
+            <a:avLst/>
+          </a:prstGeom>
+          <a:noFill/>
+          <a:ln/>
+        </p:spPr>
+        <p:txBody>
+          <a:bodyPr wrap="square" lIns="0" tIns="0" rIns="0" bIns="0" rtlCol="0" anchor="ctr"/>
+          <a:lstStyle/>
+          <a:p>
+            <a:pPr indent="0" marL="0">
+              <a:buNone/>
+            </a:pPr>
+            <a:r>
+              <a:rPr lang="en-US" sz="900" dirty="0">
+                <a:solidFill>
+                  <a:srgbClr val="486581"/>
+                </a:solidFill>
+                <a:latin typeface="Calibri" pitchFamily="34" charset="0"/>
+                <a:ea typeface="Calibri" pitchFamily="34" charset="-122"/>
+                <a:cs typeface="Calibri" pitchFamily="34" charset="-120"/>
+              </a:rPr>
+              <a:t>what it cost — cgroups, cAdvisor, kube-state</a:t>
+            </a:r>
+            <a:endParaRPr lang="en-US" sz="900" dirty="0"/>
+          </a:p>
+        </p:txBody>
+      </p:sp>
+      <p:sp>
+        <p:nvSpPr>
+          <p:cNvPr id="12" name="Shape 9"/>
           <p:cNvSpPr/>
           <p:nvPr/>
         </p:nvSpPr>
         <p:spPr>
           <a:xfrm>
-            <a:off x="4764024" y="1508760"/>
-            <a:ext cx="438912" cy="438912"/>
-          </a:xfrm>
-          <a:prstGeom prst="ellipse">
-            <a:avLst/>
+            <a:off x="4526280" y="2194560"/>
+            <a:ext cx="3657600" cy="1828800"/>
+          </a:xfrm>
+          <a:prstGeom prst="roundRect">
+            <a:avLst>
+              <a:gd name="adj" fmla="val 3000"/>
+            </a:avLst>
           </a:prstGeom>
           <a:solidFill>
-            <a:srgbClr val="1F2933"/>
+            <a:srgbClr val="D9E2EC"/>
           </a:solidFill>
           <a:ln w="12700">
             <a:solidFill>
-              <a:srgbClr val="1F2933"/>
+              <a:srgbClr val="D9E2EC"/>
             </a:solidFill>
             <a:prstDash val="solid"/>
           </a:ln>
         </p:spPr>
       </p:sp>
+      <p:sp>
+        <p:nvSpPr>
+          <p:cNvPr id="13" name="Text 10"/>
+          <p:cNvSpPr txBox="1"/>
+          <p:nvPr/>
+        </p:nvSpPr>
+        <p:spPr>
+          <a:xfrm>
+            <a:off x="4681728" y="2286000"/>
+            <a:ext cx="3108960" cy="237744"/>
+          </a:xfrm>
+          <a:prstGeom prst="rect">
+            <a:avLst/>
+          </a:prstGeom>
+          <a:noFill/>
+          <a:ln/>
+        </p:spPr>
+        <p:txBody>
+          <a:bodyPr wrap="square" lIns="0" tIns="0" rIns="0" bIns="0" rtlCol="0" anchor="ctr"/>
+          <a:lstStyle/>
+          <a:p>
+            <a:pPr indent="0" marL="0">
+              <a:buNone/>
+            </a:pPr>
+            <a:r>
+              <a:rPr lang="en-US" sz="1100" b="1" dirty="0">
+                <a:solidFill>
+                  <a:srgbClr val="102A43"/>
+                </a:solidFill>
+                <a:latin typeface="Calibri" pitchFamily="34" charset="0"/>
+                <a:ea typeface="Calibri" pitchFamily="34" charset="-122"/>
+                <a:cs typeface="Calibri" pitchFamily="34" charset="-120"/>
+              </a:rPr>
+              <a:t>Lens 2 · the process’s self-report</a:t>
+            </a:r>
+            <a:endParaRPr lang="en-US" sz="1100" dirty="0"/>
+          </a:p>
+        </p:txBody>
+      </p:sp>
+      <p:sp>
+        <p:nvSpPr>
+          <p:cNvPr id="14" name="Text 11"/>
+          <p:cNvSpPr txBox="1"/>
+          <p:nvPr/>
+        </p:nvSpPr>
+        <p:spPr>
+          <a:xfrm>
+            <a:off x="4681728" y="2505456"/>
+            <a:ext cx="3291840" cy="219456"/>
+          </a:xfrm>
+          <a:prstGeom prst="rect">
+            <a:avLst/>
+          </a:prstGeom>
+          <a:noFill/>
+          <a:ln/>
+        </p:spPr>
+        <p:txBody>
+          <a:bodyPr wrap="square" lIns="0" tIns="0" rIns="0" bIns="0" rtlCol="0" anchor="ctr"/>
+          <a:lstStyle/>
+          <a:p>
+            <a:pPr indent="0" marL="0">
+              <a:buNone/>
+            </a:pPr>
+            <a:r>
+              <a:rPr lang="en-US" sz="900" dirty="0">
+                <a:solidFill>
+                  <a:srgbClr val="486581"/>
+                </a:solidFill>
+                <a:latin typeface="Calibri" pitchFamily="34" charset="0"/>
+                <a:ea typeface="Calibri" pitchFamily="34" charset="-122"/>
+                <a:cs typeface="Calibri" pitchFamily="34" charset="-120"/>
+              </a:rPr>
+              <a:t>what it was doing — Actuator, Prometheus</a:t>
+            </a:r>
+            <a:endParaRPr lang="en-US" sz="900" dirty="0"/>
+          </a:p>
+        </p:txBody>
+      </p:sp>
+      <p:sp>
+        <p:nvSpPr>
+          <p:cNvPr id="15" name="Shape 12"/>
+          <p:cNvSpPr/>
+          <p:nvPr/>
+        </p:nvSpPr>
+        <p:spPr>
+          <a:xfrm>
+            <a:off x="4983480" y="2816352"/>
+            <a:ext cx="2743200" cy="1005840"/>
+          </a:xfrm>
+          <a:prstGeom prst="roundRect">
+            <a:avLst>
+              <a:gd name="adj" fmla="val 5455"/>
+            </a:avLst>
+          </a:prstGeom>
+          <a:solidFill>
+            <a:srgbClr val="102A43"/>
+          </a:solidFill>
+          <a:ln w="12700">
+            <a:solidFill>
+              <a:srgbClr val="102A43"/>
+            </a:solidFill>
+            <a:prstDash val="solid"/>
+          </a:ln>
+        </p:spPr>
+      </p:sp>
+      <p:sp>
+        <p:nvSpPr>
+          <p:cNvPr id="16" name="Text 13"/>
+          <p:cNvSpPr txBox="1"/>
+          <p:nvPr/>
+        </p:nvSpPr>
+        <p:spPr>
+          <a:xfrm>
+            <a:off x="5120640" y="2926080"/>
+            <a:ext cx="2468880" cy="237744"/>
+          </a:xfrm>
+          <a:prstGeom prst="rect">
+            <a:avLst/>
+          </a:prstGeom>
+          <a:noFill/>
+          <a:ln/>
+        </p:spPr>
+        <p:txBody>
+          <a:bodyPr wrap="square" lIns="0" tIns="0" rIns="0" bIns="0" rtlCol="0" anchor="ctr"/>
+          <a:lstStyle/>
+          <a:p>
+            <a:pPr indent="0" marL="0">
+              <a:buNone/>
+            </a:pPr>
+            <a:r>
+              <a:rPr lang="en-US" sz="1100" b="1" dirty="0">
+                <a:solidFill>
+                  <a:srgbClr val="FFFFFF"/>
+                </a:solidFill>
+                <a:latin typeface="Calibri" pitchFamily="34" charset="0"/>
+                <a:ea typeface="Calibri" pitchFamily="34" charset="-122"/>
+                <a:cs typeface="Calibri" pitchFamily="34" charset="-120"/>
+              </a:rPr>
+              <a:t>Lens 3 · interrogation</a:t>
+            </a:r>
+            <a:endParaRPr lang="en-US" sz="1100" dirty="0"/>
+          </a:p>
+        </p:txBody>
+      </p:sp>
+      <p:sp>
+        <p:nvSpPr>
+          <p:cNvPr id="17" name="Text 14"/>
+          <p:cNvSpPr txBox="1"/>
+          <p:nvPr/>
+        </p:nvSpPr>
+        <p:spPr>
+          <a:xfrm>
+            <a:off x="5120640" y="3154680"/>
+            <a:ext cx="2560320" cy="219456"/>
+          </a:xfrm>
+          <a:prstGeom prst="rect">
+            <a:avLst/>
+          </a:prstGeom>
+          <a:noFill/>
+          <a:ln/>
+        </p:spPr>
+        <p:txBody>
+          <a:bodyPr wrap="square" lIns="0" tIns="0" rIns="0" bIns="0" rtlCol="0" anchor="ctr"/>
+          <a:lstStyle/>
+          <a:p>
+            <a:pPr indent="0" marL="0">
+              <a:buNone/>
+            </a:pPr>
+            <a:r>
+              <a:rPr lang="en-US" sz="900" dirty="0">
+                <a:solidFill>
+                  <a:srgbClr val="D9E2EC"/>
+                </a:solidFill>
+                <a:latin typeface="Calibri" pitchFamily="34" charset="0"/>
+                <a:ea typeface="Calibri" pitchFamily="34" charset="-122"/>
+                <a:cs typeface="Calibri" pitchFamily="34" charset="-120"/>
+              </a:rPr>
+              <a:t>why, on this pod, now — jattach, JFR</a:t>
+            </a:r>
+            <a:endParaRPr lang="en-US" sz="900" dirty="0"/>
+          </a:p>
+        </p:txBody>
+      </p:sp>
+      <p:sp>
+        <p:nvSpPr>
+          <p:cNvPr id="18" name="Text 15"/>
+          <p:cNvSpPr txBox="1"/>
+          <p:nvPr/>
+        </p:nvSpPr>
+        <p:spPr>
+          <a:xfrm>
+            <a:off x="4069080" y="4370832"/>
+            <a:ext cx="4572000" cy="274320"/>
+          </a:xfrm>
+          <a:prstGeom prst="rect">
+            <a:avLst/>
+          </a:prstGeom>
+          <a:noFill/>
+          <a:ln/>
+        </p:spPr>
+        <p:txBody>
+          <a:bodyPr wrap="square" lIns="0" tIns="0" rIns="0" bIns="0" rtlCol="0" anchor="ctr"/>
+          <a:lstStyle/>
+          <a:p>
+            <a:pPr algn="ctr" indent="0" marL="0">
+              <a:buNone/>
+            </a:pPr>
+            <a:r>
+              <a:rPr lang="en-US" sz="950" i="1" dirty="0">
+                <a:solidFill>
+                  <a:srgbClr val="486581"/>
+                </a:solidFill>
+                <a:latin typeface="Calibri" pitchFamily="34" charset="0"/>
+                <a:ea typeface="Calibri" pitchFamily="34" charset="-122"/>
+                <a:cs typeface="Calibri" pitchFamily="34" charset="-120"/>
+              </a:rPr>
+              <a:t>each lens’s blind spot is the next lens’s field of view</a:t>
+            </a:r>
+            <a:endParaRPr lang="en-US" sz="950" dirty="0"/>
+          </a:p>
+        </p:txBody>
+      </p:sp>
+    </p:spTree>
+  </p:cSld>
+  <p:clrMapOvr>
+    <a:masterClrMapping/>
+  </p:clrMapOvr>
+</p:sld>
+</file>
+
+<file path=ppt/slides/slide7.xml><?xml version="1.0" encoding="utf-8"?>
+<p:sld xmlns:a="http://schemas.openxmlformats.org/drawingml/2006/main" xmlns:r="http://schemas.openxmlformats.org/officeDocument/2006/relationships" xmlns:p="http://schemas.openxmlformats.org/presentationml/2006/main">
+  <p:cSld name="Slide 7">
+    <p:bg>
+      <p:bgPr>
+        <a:solidFill>
+          <a:srgbClr val="FFFFFF"/>
+        </a:solidFill>
+      </p:bgPr>
+    </p:bg>
+    <p:spTree>
+      <p:nvGrpSpPr>
+        <p:cNvPr id="1" name=""/>
+        <p:cNvGrpSpPr/>
+        <p:nvPr/>
+      </p:nvGrpSpPr>
+      <p:grpSpPr>
+        <a:xfrm>
+          <a:off x="0" y="0"/>
+          <a:ext cx="0" cy="0"/>
+          <a:chOff x="0" y="0"/>
+          <a:chExt cx="0" cy="0"/>
+        </a:xfrm>
+      </p:grpSpPr>
+      <p:sp>
+        <p:nvSpPr>
+          <p:cNvPr id="2" name="Text 0"/>
+          <p:cNvSpPr txBox="1"/>
+          <p:nvPr/>
+        </p:nvSpPr>
+        <p:spPr>
+          <a:xfrm>
+            <a:off x="457200" y="274320"/>
+            <a:ext cx="8229600" cy="228600"/>
+          </a:xfrm>
+          <a:prstGeom prst="rect">
+            <a:avLst/>
+          </a:prstGeom>
+          <a:noFill/>
+          <a:ln/>
+        </p:spPr>
+        <p:txBody>
+          <a:bodyPr wrap="square" lIns="0" tIns="0" rIns="0" bIns="0" rtlCol="0" anchor="ctr"/>
+          <a:lstStyle/>
+          <a:p>
+            <a:pPr indent="0" marL="0">
+              <a:buNone/>
+            </a:pPr>
+            <a:r>
+              <a:rPr lang="en-US" sz="1000" b="1" spc="140" kern="0" dirty="0">
+                <a:solidFill>
+                  <a:srgbClr val="0A558C"/>
+                </a:solidFill>
+                <a:latin typeface="Calibri" pitchFamily="34" charset="0"/>
+                <a:ea typeface="Calibri" pitchFamily="34" charset="-122"/>
+                <a:cs typeface="Calibri" pitchFamily="34" charset="-120"/>
+              </a:rPr>
+              <a:t>EXAMPLE 3 OF 4   ·   WHERE YOU LOOK</a:t>
+            </a:r>
+            <a:endParaRPr lang="en-US" sz="1000" dirty="0"/>
+          </a:p>
+        </p:txBody>
+      </p:sp>
+      <p:sp>
+        <p:nvSpPr>
+          <p:cNvPr id="3" name="Text 1"/>
+          <p:cNvSpPr txBox="1"/>
+          <p:nvPr/>
+        </p:nvSpPr>
+        <p:spPr>
+          <a:xfrm>
+            <a:off x="896112" y="530352"/>
+            <a:ext cx="3108960" cy="502920"/>
+          </a:xfrm>
+          <a:prstGeom prst="rect">
+            <a:avLst/>
+          </a:prstGeom>
+          <a:noFill/>
+          <a:ln/>
+        </p:spPr>
+        <p:txBody>
+          <a:bodyPr wrap="square" lIns="0" tIns="0" rIns="0" bIns="0" rtlCol="0" anchor="ctr"/>
+          <a:lstStyle/>
+          <a:p>
+            <a:pPr indent="0" marL="0">
+              <a:buNone/>
+            </a:pPr>
+            <a:r>
+              <a:rPr lang="en-US" sz="2800" b="1" dirty="0">
+                <a:solidFill>
+                  <a:srgbClr val="102A43"/>
+                </a:solidFill>
+                <a:latin typeface="Cambria" pitchFamily="34" charset="0"/>
+                <a:ea typeface="Cambria" pitchFamily="34" charset="-122"/>
+                <a:cs typeface="Cambria" pitchFamily="34" charset="-120"/>
+              </a:rPr>
+              <a:t>The Two Roads</a:t>
+            </a:r>
+            <a:endParaRPr lang="en-US" sz="2800" dirty="0"/>
+          </a:p>
+        </p:txBody>
+      </p:sp>
+      <p:sp>
+        <p:nvSpPr>
+          <p:cNvPr id="4" name="Shape 2"/>
+          <p:cNvSpPr/>
+          <p:nvPr/>
+        </p:nvSpPr>
+        <p:spPr>
+          <a:xfrm>
+            <a:off x="457200" y="576072"/>
+            <a:ext cx="384048" cy="384048"/>
+          </a:xfrm>
+          <a:prstGeom prst="ellipse">
+            <a:avLst/>
+          </a:prstGeom>
+          <a:solidFill>
+            <a:srgbClr val="2680C2"/>
+          </a:solidFill>
+          <a:ln w="12700">
+            <a:solidFill>
+              <a:srgbClr val="2680C2"/>
+            </a:solidFill>
+            <a:prstDash val="solid"/>
+          </a:ln>
+        </p:spPr>
+      </p:sp>
       <p:pic>
         <p:nvPicPr>
-          <p:cNvPr id="22" name="Image 2" descr="preencoded.png">    </p:cNvPr>
+          <p:cNvPr id="5" name="Image 0" descr="preencoded.png">    </p:cNvPr>
           <p:cNvPicPr>
             <a:picLocks noChangeAspect="1"/>
           </p:cNvPicPr>
           <p:nvPr/>
         </p:nvPicPr>
         <p:blipFill>
-          <a:blip r:embed="rId3"/>
+          <a:blip r:embed="rId1"/>
           <a:stretch>
             <a:fillRect/>
           </a:stretch>
         </p:blipFill>
         <p:spPr>
           <a:xfrm>
-            <a:off x="4869363" y="1614099"/>
-            <a:ext cx="228234" cy="228234"/>
+            <a:off x="549372" y="668244"/>
+            <a:ext cx="199705" cy="199705"/>
           </a:xfrm>
           <a:prstGeom prst="rect">
             <a:avLst/>
@@ -4958,77 +6800,130 @@
       </p:pic>
       <p:sp>
         <p:nvSpPr>
-          <p:cNvPr id="23" name="Text 18"/>
-          <p:cNvSpPr txBox="1"/>
-          <p:nvPr/>
-        </p:nvSpPr>
-        <p:spPr>
-          <a:xfrm>
-            <a:off x="5285232" y="1481328"/>
-            <a:ext cx="1234440" cy="274320"/>
-          </a:xfrm>
-          <a:prstGeom prst="rect">
-            <a:avLst/>
-          </a:prstGeom>
-          <a:noFill/>
-          <a:ln/>
-        </p:spPr>
-        <p:txBody>
-          <a:bodyPr wrap="square" lIns="0" tIns="0" rIns="0" bIns="0" rtlCol="0" anchor="ctr"/>
-          <a:lstStyle/>
-          <a:p>
-            <a:pPr indent="0" marL="0">
-              <a:buNone/>
-            </a:pPr>
-            <a:r>
-              <a:rPr lang="en-US" sz="1250" b="1" dirty="0">
-                <a:solidFill>
-                  <a:srgbClr val="1F2933"/>
-                </a:solidFill>
-                <a:latin typeface="Calibri" pitchFamily="34" charset="0"/>
-                <a:ea typeface="Calibri" pitchFamily="34" charset="-122"/>
-                <a:cs typeface="Calibri" pitchFamily="34" charset="-120"/>
-              </a:rPr>
-              <a:t>The Two Roads</a:t>
-            </a:r>
-            <a:endParaRPr lang="en-US" sz="1250" dirty="0"/>
-          </a:p>
-        </p:txBody>
-      </p:sp>
-      <p:sp>
-        <p:nvSpPr>
-          <p:cNvPr id="24" name="Text 19"/>
-          <p:cNvSpPr txBox="1"/>
-          <p:nvPr/>
-        </p:nvSpPr>
-        <p:spPr>
-          <a:xfrm>
-            <a:off x="5285232" y="1737360"/>
-            <a:ext cx="1234440" cy="228600"/>
-          </a:xfrm>
-          <a:prstGeom prst="rect">
-            <a:avLst/>
-          </a:prstGeom>
-          <a:noFill/>
-          <a:ln/>
-        </p:spPr>
-        <p:txBody>
-          <a:bodyPr wrap="square" lIns="0" tIns="0" rIns="0" bIns="0" rtlCol="0" anchor="ctr"/>
-          <a:lstStyle/>
-          <a:p>
-            <a:pPr indent="0" marL="0">
-              <a:buNone/>
-            </a:pPr>
-            <a:r>
-              <a:rPr lang="en-US" sz="1000" i="1" dirty="0">
-                <a:solidFill>
-                  <a:srgbClr val="B86A1E"/>
-                </a:solidFill>
-                <a:latin typeface="Calibri" pitchFamily="34" charset="0"/>
-                <a:ea typeface="Calibri" pitchFamily="34" charset="-122"/>
-                <a:cs typeface="Calibri" pitchFamily="34" charset="-120"/>
-              </a:rPr>
-              <a:t>where you look</a:t>
+          <p:cNvPr id="6" name="Text 3"/>
+          <p:cNvSpPr txBox="1"/>
+          <p:nvPr/>
+        </p:nvSpPr>
+        <p:spPr>
+          <a:xfrm>
+            <a:off x="457200" y="1298448"/>
+            <a:ext cx="3383280" cy="1600200"/>
+          </a:xfrm>
+          <a:prstGeom prst="rect">
+            <a:avLst/>
+          </a:prstGeom>
+          <a:noFill/>
+          <a:ln/>
+        </p:spPr>
+        <p:txBody>
+          <a:bodyPr wrap="square" lIns="0" tIns="0" rIns="0" bIns="0" rtlCol="0" anchor="t"/>
+          <a:lstStyle/>
+          <a:p>
+            <a:pPr indent="0" marL="0">
+              <a:buNone/>
+            </a:pPr>
+            <a:r>
+              <a:rPr lang="en-US" sz="1100" dirty="0">
+                <a:solidFill>
+                  <a:srgbClr val="486581"/>
+                </a:solidFill>
+                <a:latin typeface="Calibri" pitchFamily="34" charset="0"/>
+                <a:ea typeface="Calibri" pitchFamily="34" charset="-122"/>
+                <a:cs typeface="Calibri" pitchFamily="34" charset="-120"/>
+              </a:rPr>
+              <a:t>Every symptom is one of two sentences. “My pod isn’t —” walks down five verbs Kubernetes does to a pod, each writing its reason in exactly one place. “Requests to it —” crosses five hops where nobody writes anything down, so you bisect. They cross at readiness.</a:t>
+            </a:r>
+            <a:endParaRPr lang="en-US" sz="1100" dirty="0"/>
+          </a:p>
+        </p:txBody>
+      </p:sp>
+      <p:sp>
+        <p:nvSpPr>
+          <p:cNvPr id="7" name="Text 4"/>
+          <p:cNvSpPr txBox="1"/>
+          <p:nvPr/>
+        </p:nvSpPr>
+        <p:spPr>
+          <a:xfrm>
+            <a:off x="457200" y="2542032"/>
+            <a:ext cx="3383280" cy="731520"/>
+          </a:xfrm>
+          <a:prstGeom prst="rect">
+            <a:avLst/>
+          </a:prstGeom>
+          <a:noFill/>
+          <a:ln/>
+        </p:spPr>
+        <p:txBody>
+          <a:bodyPr wrap="square" lIns="0" tIns="0" rIns="0" bIns="0" rtlCol="0" anchor="t"/>
+          <a:lstStyle/>
+          <a:p>
+            <a:pPr indent="0" marL="0">
+              <a:buNone/>
+            </a:pPr>
+            <a:r>
+              <a:rPr lang="en-US" sz="1200" i="1" dirty="0">
+                <a:solidFill>
+                  <a:srgbClr val="102A43"/>
+                </a:solidFill>
+                <a:latin typeface="Calibri" pitchFamily="34" charset="0"/>
+                <a:ea typeface="Calibri" pitchFamily="34" charset="-122"/>
+                <a:cs typeface="Calibri" pitchFamily="34" charset="-120"/>
+              </a:rPr>
+              <a:t>“The rung below never lies about the rung above.”</a:t>
+            </a:r>
+            <a:endParaRPr lang="en-US" sz="1200" dirty="0"/>
+          </a:p>
+        </p:txBody>
+      </p:sp>
+      <p:sp>
+        <p:nvSpPr>
+          <p:cNvPr id="8" name="Text 5"/>
+          <p:cNvSpPr txBox="1"/>
+          <p:nvPr/>
+        </p:nvSpPr>
+        <p:spPr>
+          <a:xfrm>
+            <a:off x="457200" y="3346704"/>
+            <a:ext cx="3383280" cy="914400"/>
+          </a:xfrm>
+          <a:prstGeom prst="rect">
+            <a:avLst/>
+          </a:prstGeom>
+          <a:noFill/>
+          <a:ln/>
+        </p:spPr>
+        <p:txBody>
+          <a:bodyPr wrap="square" lIns="0" tIns="0" rIns="0" bIns="0" rtlCol="0" anchor="t"/>
+          <a:lstStyle/>
+          <a:p>
+            <a:pPr indent="0" marL="0">
+              <a:buNone/>
+            </a:pPr>
+            <a:r>
+              <a:rPr lang="en-US" sz="1000" b="1" dirty="0">
+                <a:solidFill>
+                  <a:srgbClr val="0A558C"/>
+                </a:solidFill>
+                <a:latin typeface="Calibri" pitchFamily="34" charset="0"/>
+                <a:ea typeface="Calibri" pitchFamily="34" charset="-122"/>
+                <a:cs typeface="Calibri" pitchFamily="34" charset="-120"/>
+              </a:rPr>
+              <a:t>In practice: </a:t>
+            </a:r>
+            <a:pPr indent="0" marL="0">
+              <a:buNone/>
+            </a:pPr>
+            <a:r>
+              <a:rPr lang="en-US" sz="1000" dirty="0">
+                <a:solidFill>
+                  <a:srgbClr val="486581"/>
+                </a:solidFill>
+                <a:latin typeface="Calibri" pitchFamily="34" charset="0"/>
+                <a:ea typeface="Calibri" pitchFamily="34" charset="-122"/>
+                <a:cs typeface="Calibri" pitchFamily="34" charset="-120"/>
+              </a:rPr>
+              <a:t>verbs.sh — one line per pod naming the first verb that failed and its record. It tells three identical CrashLoopBackOffs apart: the kubelet, the kernel, and the app.</a:t>
             </a:r>
             <a:endParaRPr lang="en-US" sz="1000" dirty="0"/>
           </a:p>
@@ -5036,157 +6931,26 @@
       </p:sp>
       <p:sp>
         <p:nvSpPr>
-          <p:cNvPr id="25" name="Text 20"/>
-          <p:cNvSpPr txBox="1"/>
-          <p:nvPr/>
-        </p:nvSpPr>
-        <p:spPr>
-          <a:xfrm>
-            <a:off x="4764024" y="2084832"/>
-            <a:ext cx="1691640" cy="1234440"/>
-          </a:xfrm>
-          <a:prstGeom prst="rect">
-            <a:avLst/>
-          </a:prstGeom>
-          <a:noFill/>
-          <a:ln/>
-        </p:spPr>
-        <p:txBody>
-          <a:bodyPr wrap="square" lIns="0" tIns="0" rIns="0" bIns="0" rtlCol="0" anchor="t"/>
-          <a:lstStyle/>
-          <a:p>
-            <a:pPr indent="0" marL="0">
-              <a:buNone/>
-            </a:pPr>
-            <a:r>
-              <a:rPr lang="en-US" sz="950" dirty="0">
-                <a:solidFill>
-                  <a:srgbClr val="52606D"/>
-                </a:solidFill>
-                <a:latin typeface="Calibri" pitchFamily="34" charset="0"/>
-                <a:ea typeface="Calibri" pitchFamily="34" charset="-122"/>
-                <a:cs typeface="Calibri" pitchFamily="34" charset="-120"/>
-              </a:rPr>
-              <a:t>Five verbs down (admit, schedule, start, route, kill — each writes its reason in one place); five hops across, bisected; a ladder from wherever you stopped.</a:t>
-            </a:r>
-            <a:endParaRPr lang="en-US" sz="950" dirty="0"/>
-          </a:p>
-        </p:txBody>
-      </p:sp>
-      <p:sp>
-        <p:nvSpPr>
-          <p:cNvPr id="26" name="Text 21"/>
-          <p:cNvSpPr txBox="1"/>
-          <p:nvPr/>
-        </p:nvSpPr>
-        <p:spPr>
-          <a:xfrm>
-            <a:off x="4764024" y="3337560"/>
-            <a:ext cx="1691640" cy="685800"/>
-          </a:xfrm>
-          <a:prstGeom prst="rect">
-            <a:avLst/>
-          </a:prstGeom>
-          <a:noFill/>
-          <a:ln/>
-        </p:spPr>
-        <p:txBody>
-          <a:bodyPr wrap="square" lIns="0" tIns="0" rIns="0" bIns="0" rtlCol="0" anchor="t"/>
-          <a:lstStyle/>
-          <a:p>
-            <a:pPr indent="0" marL="0">
-              <a:buNone/>
-            </a:pPr>
-            <a:r>
-              <a:rPr lang="en-US" sz="950" i="1" dirty="0">
-                <a:solidFill>
-                  <a:srgbClr val="1F2933"/>
-                </a:solidFill>
-                <a:latin typeface="Calibri" pitchFamily="34" charset="0"/>
-                <a:ea typeface="Calibri" pitchFamily="34" charset="-122"/>
-                <a:cs typeface="Calibri" pitchFamily="34" charset="-120"/>
-              </a:rPr>
-              <a:t>“The rung below never lies about the rung above.”</a:t>
-            </a:r>
-            <a:endParaRPr lang="en-US" sz="950" dirty="0"/>
-          </a:p>
-        </p:txBody>
-      </p:sp>
-      <p:sp>
-        <p:nvSpPr>
-          <p:cNvPr id="27" name="Text 22"/>
-          <p:cNvSpPr txBox="1"/>
-          <p:nvPr/>
-        </p:nvSpPr>
-        <p:spPr>
-          <a:xfrm>
-            <a:off x="4764024" y="4069080"/>
-            <a:ext cx="1691640" cy="640080"/>
-          </a:xfrm>
-          <a:prstGeom prst="rect">
-            <a:avLst/>
-          </a:prstGeom>
-          <a:noFill/>
-          <a:ln/>
-        </p:spPr>
-        <p:txBody>
-          <a:bodyPr wrap="square" lIns="0" tIns="0" rIns="0" bIns="0" rtlCol="0" anchor="t"/>
-          <a:lstStyle/>
-          <a:p>
-            <a:pPr indent="0" marL="0">
-              <a:buNone/>
-            </a:pPr>
-            <a:r>
-              <a:rPr lang="en-US" sz="950" b="1" dirty="0">
-                <a:solidFill>
-                  <a:srgbClr val="1F2933"/>
-                </a:solidFill>
-                <a:latin typeface="Calibri" pitchFamily="34" charset="0"/>
-                <a:ea typeface="Calibri" pitchFamily="34" charset="-122"/>
-                <a:cs typeface="Calibri" pitchFamily="34" charset="-120"/>
-              </a:rPr>
-              <a:t>Tactic: </a:t>
-            </a:r>
-            <a:pPr indent="0" marL="0">
-              <a:buNone/>
-            </a:pPr>
-            <a:r>
-              <a:rPr lang="en-US" sz="950" dirty="0">
-                <a:solidFill>
-                  <a:srgbClr val="52606D"/>
-                </a:solidFill>
-                <a:latin typeface="Calibri" pitchFamily="34" charset="0"/>
-                <a:ea typeface="Calibri" pitchFamily="34" charset="-122"/>
-                <a:cs typeface="Calibri" pitchFamily="34" charset="-120"/>
-              </a:rPr>
-              <a:t>verbs.sh — which verb failed, one line per pod; the three-point bisect.</a:t>
-            </a:r>
-            <a:endParaRPr lang="en-US" sz="950" dirty="0"/>
-          </a:p>
-        </p:txBody>
-      </p:sp>
-      <p:sp>
-        <p:nvSpPr>
-          <p:cNvPr id="28" name="Shape 23"/>
+          <p:cNvPr id="9" name="Shape 6"/>
           <p:cNvSpPr/>
           <p:nvPr/>
         </p:nvSpPr>
         <p:spPr>
           <a:xfrm>
-            <a:off x="6711696" y="1371600"/>
-            <a:ext cx="1965960" cy="3429000"/>
+            <a:off x="4069080" y="1417320"/>
+            <a:ext cx="1325880" cy="310896"/>
           </a:xfrm>
           <a:prstGeom prst="roundRect">
             <a:avLst>
-              <a:gd name="adj" fmla="val 2791"/>
+              <a:gd name="adj" fmla="val 14706"/>
             </a:avLst>
           </a:prstGeom>
           <a:solidFill>
-            <a:srgbClr val="E4E7EB"/>
+            <a:srgbClr val="F0F4F8"/>
           </a:solidFill>
           <a:ln w="12700">
             <a:solidFill>
-              <a:srgbClr val="E4E7EB"/>
+              <a:srgbClr val="D9E2EC"/>
             </a:solidFill>
             <a:prstDash val="solid"/>
           </a:ln>
@@ -5194,47 +6958,1449 @@
       </p:sp>
       <p:sp>
         <p:nvSpPr>
-          <p:cNvPr id="29" name="Shape 24"/>
+          <p:cNvPr id="10" name="Text 7"/>
+          <p:cNvSpPr txBox="1"/>
+          <p:nvPr/>
+        </p:nvSpPr>
+        <p:spPr>
+          <a:xfrm>
+            <a:off x="4069080" y="1417320"/>
+            <a:ext cx="1325880" cy="310896"/>
+          </a:xfrm>
+          <a:prstGeom prst="rect">
+            <a:avLst/>
+          </a:prstGeom>
+          <a:noFill/>
+          <a:ln/>
+        </p:spPr>
+        <p:txBody>
+          <a:bodyPr wrap="square" lIns="0" tIns="0" rIns="0" bIns="0" rtlCol="0" anchor="ctr"/>
+          <a:lstStyle/>
+          <a:p>
+            <a:pPr algn="ctr" indent="0" marL="0">
+              <a:buNone/>
+            </a:pPr>
+            <a:r>
+              <a:rPr lang="en-US" sz="950" dirty="0">
+                <a:solidFill>
+                  <a:srgbClr val="102A43"/>
+                </a:solidFill>
+                <a:latin typeface="Calibri" pitchFamily="34" charset="0"/>
+                <a:ea typeface="Calibri" pitchFamily="34" charset="-122"/>
+                <a:cs typeface="Calibri" pitchFamily="34" charset="-120"/>
+              </a:rPr>
+              <a:t>1 · Admit</a:t>
+            </a:r>
+            <a:endParaRPr lang="en-US" sz="950" dirty="0"/>
+          </a:p>
+        </p:txBody>
+      </p:sp>
+      <p:sp>
+        <p:nvSpPr>
+          <p:cNvPr id="11" name="Shape 8"/>
           <p:cNvSpPr/>
           <p:nvPr/>
         </p:nvSpPr>
         <p:spPr>
           <a:xfrm>
-            <a:off x="6848856" y="1508760"/>
-            <a:ext cx="438912" cy="438912"/>
-          </a:xfrm>
-          <a:prstGeom prst="ellipse">
-            <a:avLst/>
+            <a:off x="4732020" y="1728216"/>
+            <a:ext cx="0" cy="73152"/>
+          </a:xfrm>
+          <a:prstGeom prst="line">
+            <a:avLst/>
+          </a:prstGeom>
+          <a:noFill/>
+          <a:ln w="12700">
+            <a:solidFill>
+              <a:srgbClr val="486581"/>
+            </a:solidFill>
+            <a:prstDash val="solid"/>
+            <a:tailEnd type="triangle"/>
+          </a:ln>
+        </p:spPr>
+      </p:sp>
+      <p:sp>
+        <p:nvSpPr>
+          <p:cNvPr id="12" name="Shape 9"/>
+          <p:cNvSpPr/>
+          <p:nvPr/>
+        </p:nvSpPr>
+        <p:spPr>
+          <a:xfrm>
+            <a:off x="4069080" y="1801368"/>
+            <a:ext cx="1325880" cy="310896"/>
+          </a:xfrm>
+          <a:prstGeom prst="roundRect">
+            <a:avLst>
+              <a:gd name="adj" fmla="val 14706"/>
+            </a:avLst>
           </a:prstGeom>
           <a:solidFill>
-            <a:srgbClr val="D9822B"/>
+            <a:srgbClr val="F0F4F8"/>
           </a:solidFill>
           <a:ln w="12700">
             <a:solidFill>
-              <a:srgbClr val="D9822B"/>
+              <a:srgbClr val="D9E2EC"/>
             </a:solidFill>
             <a:prstDash val="solid"/>
           </a:ln>
         </p:spPr>
       </p:sp>
+      <p:sp>
+        <p:nvSpPr>
+          <p:cNvPr id="13" name="Text 10"/>
+          <p:cNvSpPr txBox="1"/>
+          <p:nvPr/>
+        </p:nvSpPr>
+        <p:spPr>
+          <a:xfrm>
+            <a:off x="4069080" y="1801368"/>
+            <a:ext cx="1325880" cy="310896"/>
+          </a:xfrm>
+          <a:prstGeom prst="rect">
+            <a:avLst/>
+          </a:prstGeom>
+          <a:noFill/>
+          <a:ln/>
+        </p:spPr>
+        <p:txBody>
+          <a:bodyPr wrap="square" lIns="0" tIns="0" rIns="0" bIns="0" rtlCol="0" anchor="ctr"/>
+          <a:lstStyle/>
+          <a:p>
+            <a:pPr algn="ctr" indent="0" marL="0">
+              <a:buNone/>
+            </a:pPr>
+            <a:r>
+              <a:rPr lang="en-US" sz="950" dirty="0">
+                <a:solidFill>
+                  <a:srgbClr val="102A43"/>
+                </a:solidFill>
+                <a:latin typeface="Calibri" pitchFamily="34" charset="0"/>
+                <a:ea typeface="Calibri" pitchFamily="34" charset="-122"/>
+                <a:cs typeface="Calibri" pitchFamily="34" charset="-120"/>
+              </a:rPr>
+              <a:t>2 · Schedule</a:t>
+            </a:r>
+            <a:endParaRPr lang="en-US" sz="950" dirty="0"/>
+          </a:p>
+        </p:txBody>
+      </p:sp>
+      <p:sp>
+        <p:nvSpPr>
+          <p:cNvPr id="14" name="Shape 11"/>
+          <p:cNvSpPr/>
+          <p:nvPr/>
+        </p:nvSpPr>
+        <p:spPr>
+          <a:xfrm>
+            <a:off x="4732020" y="2112264"/>
+            <a:ext cx="0" cy="73152"/>
+          </a:xfrm>
+          <a:prstGeom prst="line">
+            <a:avLst/>
+          </a:prstGeom>
+          <a:noFill/>
+          <a:ln w="12700">
+            <a:solidFill>
+              <a:srgbClr val="486581"/>
+            </a:solidFill>
+            <a:prstDash val="solid"/>
+            <a:tailEnd type="triangle"/>
+          </a:ln>
+        </p:spPr>
+      </p:sp>
+      <p:sp>
+        <p:nvSpPr>
+          <p:cNvPr id="15" name="Shape 12"/>
+          <p:cNvSpPr/>
+          <p:nvPr/>
+        </p:nvSpPr>
+        <p:spPr>
+          <a:xfrm>
+            <a:off x="4069080" y="2185416"/>
+            <a:ext cx="1325880" cy="310896"/>
+          </a:xfrm>
+          <a:prstGeom prst="roundRect">
+            <a:avLst>
+              <a:gd name="adj" fmla="val 14706"/>
+            </a:avLst>
+          </a:prstGeom>
+          <a:solidFill>
+            <a:srgbClr val="F0F4F8"/>
+          </a:solidFill>
+          <a:ln w="12700">
+            <a:solidFill>
+              <a:srgbClr val="D9E2EC"/>
+            </a:solidFill>
+            <a:prstDash val="solid"/>
+          </a:ln>
+        </p:spPr>
+      </p:sp>
+      <p:sp>
+        <p:nvSpPr>
+          <p:cNvPr id="16" name="Text 13"/>
+          <p:cNvSpPr txBox="1"/>
+          <p:nvPr/>
+        </p:nvSpPr>
+        <p:spPr>
+          <a:xfrm>
+            <a:off x="4069080" y="2185416"/>
+            <a:ext cx="1325880" cy="310896"/>
+          </a:xfrm>
+          <a:prstGeom prst="rect">
+            <a:avLst/>
+          </a:prstGeom>
+          <a:noFill/>
+          <a:ln/>
+        </p:spPr>
+        <p:txBody>
+          <a:bodyPr wrap="square" lIns="0" tIns="0" rIns="0" bIns="0" rtlCol="0" anchor="ctr"/>
+          <a:lstStyle/>
+          <a:p>
+            <a:pPr algn="ctr" indent="0" marL="0">
+              <a:buNone/>
+            </a:pPr>
+            <a:r>
+              <a:rPr lang="en-US" sz="950" dirty="0">
+                <a:solidFill>
+                  <a:srgbClr val="102A43"/>
+                </a:solidFill>
+                <a:latin typeface="Calibri" pitchFamily="34" charset="0"/>
+                <a:ea typeface="Calibri" pitchFamily="34" charset="-122"/>
+                <a:cs typeface="Calibri" pitchFamily="34" charset="-120"/>
+              </a:rPr>
+              <a:t>3 · Start</a:t>
+            </a:r>
+            <a:endParaRPr lang="en-US" sz="950" dirty="0"/>
+          </a:p>
+        </p:txBody>
+      </p:sp>
+      <p:sp>
+        <p:nvSpPr>
+          <p:cNvPr id="17" name="Shape 14"/>
+          <p:cNvSpPr/>
+          <p:nvPr/>
+        </p:nvSpPr>
+        <p:spPr>
+          <a:xfrm>
+            <a:off x="4732020" y="2496312"/>
+            <a:ext cx="0" cy="73152"/>
+          </a:xfrm>
+          <a:prstGeom prst="line">
+            <a:avLst/>
+          </a:prstGeom>
+          <a:noFill/>
+          <a:ln w="12700">
+            <a:solidFill>
+              <a:srgbClr val="486581"/>
+            </a:solidFill>
+            <a:prstDash val="solid"/>
+            <a:tailEnd type="triangle"/>
+          </a:ln>
+        </p:spPr>
+      </p:sp>
+      <p:sp>
+        <p:nvSpPr>
+          <p:cNvPr id="18" name="Shape 15"/>
+          <p:cNvSpPr/>
+          <p:nvPr/>
+        </p:nvSpPr>
+        <p:spPr>
+          <a:xfrm>
+            <a:off x="4069080" y="2569464"/>
+            <a:ext cx="1325880" cy="310896"/>
+          </a:xfrm>
+          <a:prstGeom prst="roundRect">
+            <a:avLst>
+              <a:gd name="adj" fmla="val 14706"/>
+            </a:avLst>
+          </a:prstGeom>
+          <a:solidFill>
+            <a:srgbClr val="2680C2"/>
+          </a:solidFill>
+          <a:ln w="12700">
+            <a:solidFill>
+              <a:srgbClr val="2680C2"/>
+            </a:solidFill>
+            <a:prstDash val="solid"/>
+          </a:ln>
+        </p:spPr>
+      </p:sp>
+      <p:sp>
+        <p:nvSpPr>
+          <p:cNvPr id="19" name="Text 16"/>
+          <p:cNvSpPr txBox="1"/>
+          <p:nvPr/>
+        </p:nvSpPr>
+        <p:spPr>
+          <a:xfrm>
+            <a:off x="4069080" y="2569464"/>
+            <a:ext cx="1325880" cy="310896"/>
+          </a:xfrm>
+          <a:prstGeom prst="rect">
+            <a:avLst/>
+          </a:prstGeom>
+          <a:noFill/>
+          <a:ln/>
+        </p:spPr>
+        <p:txBody>
+          <a:bodyPr wrap="square" lIns="0" tIns="0" rIns="0" bIns="0" rtlCol="0" anchor="ctr"/>
+          <a:lstStyle/>
+          <a:p>
+            <a:pPr algn="ctr" indent="0" marL="0">
+              <a:buNone/>
+            </a:pPr>
+            <a:r>
+              <a:rPr lang="en-US" sz="950" b="1" dirty="0">
+                <a:solidFill>
+                  <a:srgbClr val="FFFFFF"/>
+                </a:solidFill>
+                <a:latin typeface="Calibri" pitchFamily="34" charset="0"/>
+                <a:ea typeface="Calibri" pitchFamily="34" charset="-122"/>
+                <a:cs typeface="Calibri" pitchFamily="34" charset="-120"/>
+              </a:rPr>
+              <a:t>4 · Route</a:t>
+            </a:r>
+            <a:endParaRPr lang="en-US" sz="950" dirty="0"/>
+          </a:p>
+        </p:txBody>
+      </p:sp>
+      <p:sp>
+        <p:nvSpPr>
+          <p:cNvPr id="20" name="Shape 17"/>
+          <p:cNvSpPr/>
+          <p:nvPr/>
+        </p:nvSpPr>
+        <p:spPr>
+          <a:xfrm>
+            <a:off x="4732020" y="2880360"/>
+            <a:ext cx="0" cy="73152"/>
+          </a:xfrm>
+          <a:prstGeom prst="line">
+            <a:avLst/>
+          </a:prstGeom>
+          <a:noFill/>
+          <a:ln w="12700">
+            <a:solidFill>
+              <a:srgbClr val="486581"/>
+            </a:solidFill>
+            <a:prstDash val="solid"/>
+            <a:tailEnd type="triangle"/>
+          </a:ln>
+        </p:spPr>
+      </p:sp>
+      <p:sp>
+        <p:nvSpPr>
+          <p:cNvPr id="21" name="Shape 18"/>
+          <p:cNvSpPr/>
+          <p:nvPr/>
+        </p:nvSpPr>
+        <p:spPr>
+          <a:xfrm>
+            <a:off x="4069080" y="2953512"/>
+            <a:ext cx="1325880" cy="310896"/>
+          </a:xfrm>
+          <a:prstGeom prst="roundRect">
+            <a:avLst>
+              <a:gd name="adj" fmla="val 14706"/>
+            </a:avLst>
+          </a:prstGeom>
+          <a:solidFill>
+            <a:srgbClr val="F0F4F8"/>
+          </a:solidFill>
+          <a:ln w="12700">
+            <a:solidFill>
+              <a:srgbClr val="D9E2EC"/>
+            </a:solidFill>
+            <a:prstDash val="solid"/>
+          </a:ln>
+        </p:spPr>
+      </p:sp>
+      <p:sp>
+        <p:nvSpPr>
+          <p:cNvPr id="22" name="Text 19"/>
+          <p:cNvSpPr txBox="1"/>
+          <p:nvPr/>
+        </p:nvSpPr>
+        <p:spPr>
+          <a:xfrm>
+            <a:off x="4069080" y="2953512"/>
+            <a:ext cx="1325880" cy="310896"/>
+          </a:xfrm>
+          <a:prstGeom prst="rect">
+            <a:avLst/>
+          </a:prstGeom>
+          <a:noFill/>
+          <a:ln/>
+        </p:spPr>
+        <p:txBody>
+          <a:bodyPr wrap="square" lIns="0" tIns="0" rIns="0" bIns="0" rtlCol="0" anchor="ctr"/>
+          <a:lstStyle/>
+          <a:p>
+            <a:pPr algn="ctr" indent="0" marL="0">
+              <a:buNone/>
+            </a:pPr>
+            <a:r>
+              <a:rPr lang="en-US" sz="950" dirty="0">
+                <a:solidFill>
+                  <a:srgbClr val="102A43"/>
+                </a:solidFill>
+                <a:latin typeface="Calibri" pitchFamily="34" charset="0"/>
+                <a:ea typeface="Calibri" pitchFamily="34" charset="-122"/>
+                <a:cs typeface="Calibri" pitchFamily="34" charset="-120"/>
+              </a:rPr>
+              <a:t>5 · Kill</a:t>
+            </a:r>
+            <a:endParaRPr lang="en-US" sz="950" dirty="0"/>
+          </a:p>
+        </p:txBody>
+      </p:sp>
+      <p:sp>
+        <p:nvSpPr>
+          <p:cNvPr id="23" name="Text 20"/>
+          <p:cNvSpPr txBox="1"/>
+          <p:nvPr/>
+        </p:nvSpPr>
+        <p:spPr>
+          <a:xfrm>
+            <a:off x="4023360" y="1152144"/>
+            <a:ext cx="1874520" cy="219456"/>
+          </a:xfrm>
+          <a:prstGeom prst="rect">
+            <a:avLst/>
+          </a:prstGeom>
+          <a:noFill/>
+          <a:ln/>
+        </p:spPr>
+        <p:txBody>
+          <a:bodyPr wrap="square" lIns="0" tIns="0" rIns="0" bIns="0" rtlCol="0" anchor="ctr"/>
+          <a:lstStyle/>
+          <a:p>
+            <a:pPr indent="0" marL="0">
+              <a:buNone/>
+            </a:pPr>
+            <a:r>
+              <a:rPr lang="en-US" sz="900" b="1" dirty="0">
+                <a:solidFill>
+                  <a:srgbClr val="0A558C"/>
+                </a:solidFill>
+                <a:latin typeface="Calibri" pitchFamily="34" charset="0"/>
+                <a:ea typeface="Calibri" pitchFamily="34" charset="-122"/>
+                <a:cs typeface="Calibri" pitchFamily="34" charset="-120"/>
+              </a:rPr>
+              <a:t>the pod’s life — walked down</a:t>
+            </a:r>
+            <a:endParaRPr lang="en-US" sz="900" dirty="0"/>
+          </a:p>
+        </p:txBody>
+      </p:sp>
+      <p:sp>
+        <p:nvSpPr>
+          <p:cNvPr id="24" name="Shape 21"/>
+          <p:cNvSpPr/>
+          <p:nvPr/>
+        </p:nvSpPr>
+        <p:spPr>
+          <a:xfrm>
+            <a:off x="4069080" y="3767328"/>
+            <a:ext cx="822960" cy="347472"/>
+          </a:xfrm>
+          <a:prstGeom prst="roundRect">
+            <a:avLst>
+              <a:gd name="adj" fmla="val 13158"/>
+            </a:avLst>
+          </a:prstGeom>
+          <a:solidFill>
+            <a:srgbClr val="F0F4F8"/>
+          </a:solidFill>
+          <a:ln w="12700">
+            <a:solidFill>
+              <a:srgbClr val="D9E2EC"/>
+            </a:solidFill>
+            <a:prstDash val="solid"/>
+          </a:ln>
+        </p:spPr>
+      </p:sp>
+      <p:sp>
+        <p:nvSpPr>
+          <p:cNvPr id="25" name="Text 22"/>
+          <p:cNvSpPr txBox="1"/>
+          <p:nvPr/>
+        </p:nvSpPr>
+        <p:spPr>
+          <a:xfrm>
+            <a:off x="4069080" y="3767328"/>
+            <a:ext cx="822960" cy="347472"/>
+          </a:xfrm>
+          <a:prstGeom prst="rect">
+            <a:avLst/>
+          </a:prstGeom>
+          <a:noFill/>
+          <a:ln/>
+        </p:spPr>
+        <p:txBody>
+          <a:bodyPr wrap="square" lIns="0" tIns="0" rIns="0" bIns="0" rtlCol="0" anchor="ctr"/>
+          <a:lstStyle/>
+          <a:p>
+            <a:pPr algn="ctr" indent="0" marL="0">
+              <a:buNone/>
+            </a:pPr>
+            <a:r>
+              <a:rPr lang="en-US" sz="900" dirty="0">
+                <a:solidFill>
+                  <a:srgbClr val="102A43"/>
+                </a:solidFill>
+                <a:latin typeface="Calibri" pitchFamily="34" charset="0"/>
+                <a:ea typeface="Calibri" pitchFamily="34" charset="-122"/>
+                <a:cs typeface="Calibri" pitchFamily="34" charset="-120"/>
+              </a:rPr>
+              <a:t>Edge</a:t>
+            </a:r>
+            <a:endParaRPr lang="en-US" sz="900" dirty="0"/>
+          </a:p>
+        </p:txBody>
+      </p:sp>
+      <p:sp>
+        <p:nvSpPr>
+          <p:cNvPr id="26" name="Shape 23"/>
+          <p:cNvSpPr/>
+          <p:nvPr/>
+        </p:nvSpPr>
+        <p:spPr>
+          <a:xfrm>
+            <a:off x="4901184" y="3941064"/>
+            <a:ext cx="82296" cy="0"/>
+          </a:xfrm>
+          <a:prstGeom prst="line">
+            <a:avLst/>
+          </a:prstGeom>
+          <a:noFill/>
+          <a:ln w="12700">
+            <a:solidFill>
+              <a:srgbClr val="486581"/>
+            </a:solidFill>
+            <a:prstDash val="solid"/>
+            <a:tailEnd type="triangle"/>
+          </a:ln>
+        </p:spPr>
+      </p:sp>
+      <p:sp>
+        <p:nvSpPr>
+          <p:cNvPr id="27" name="Shape 24"/>
+          <p:cNvSpPr/>
+          <p:nvPr/>
+        </p:nvSpPr>
+        <p:spPr>
+          <a:xfrm>
+            <a:off x="4992624" y="3767328"/>
+            <a:ext cx="822960" cy="347472"/>
+          </a:xfrm>
+          <a:prstGeom prst="roundRect">
+            <a:avLst>
+              <a:gd name="adj" fmla="val 13158"/>
+            </a:avLst>
+          </a:prstGeom>
+          <a:solidFill>
+            <a:srgbClr val="F0F4F8"/>
+          </a:solidFill>
+          <a:ln w="12700">
+            <a:solidFill>
+              <a:srgbClr val="D9E2EC"/>
+            </a:solidFill>
+            <a:prstDash val="solid"/>
+          </a:ln>
+        </p:spPr>
+      </p:sp>
+      <p:sp>
+        <p:nvSpPr>
+          <p:cNvPr id="28" name="Text 25"/>
+          <p:cNvSpPr txBox="1"/>
+          <p:nvPr/>
+        </p:nvSpPr>
+        <p:spPr>
+          <a:xfrm>
+            <a:off x="4992624" y="3767328"/>
+            <a:ext cx="822960" cy="347472"/>
+          </a:xfrm>
+          <a:prstGeom prst="rect">
+            <a:avLst/>
+          </a:prstGeom>
+          <a:noFill/>
+          <a:ln/>
+        </p:spPr>
+        <p:txBody>
+          <a:bodyPr wrap="square" lIns="0" tIns="0" rIns="0" bIns="0" rtlCol="0" anchor="ctr"/>
+          <a:lstStyle/>
+          <a:p>
+            <a:pPr algn="ctr" indent="0" marL="0">
+              <a:buNone/>
+            </a:pPr>
+            <a:r>
+              <a:rPr lang="en-US" sz="900" dirty="0">
+                <a:solidFill>
+                  <a:srgbClr val="102A43"/>
+                </a:solidFill>
+                <a:latin typeface="Calibri" pitchFamily="34" charset="0"/>
+                <a:ea typeface="Calibri" pitchFamily="34" charset="-122"/>
+                <a:cs typeface="Calibri" pitchFamily="34" charset="-120"/>
+              </a:rPr>
+              <a:t>Service</a:t>
+            </a:r>
+            <a:endParaRPr lang="en-US" sz="900" dirty="0"/>
+          </a:p>
+        </p:txBody>
+      </p:sp>
+      <p:sp>
+        <p:nvSpPr>
+          <p:cNvPr id="29" name="Shape 26"/>
+          <p:cNvSpPr/>
+          <p:nvPr/>
+        </p:nvSpPr>
+        <p:spPr>
+          <a:xfrm>
+            <a:off x="5824728" y="3941064"/>
+            <a:ext cx="82296" cy="0"/>
+          </a:xfrm>
+          <a:prstGeom prst="line">
+            <a:avLst/>
+          </a:prstGeom>
+          <a:noFill/>
+          <a:ln w="12700">
+            <a:solidFill>
+              <a:srgbClr val="486581"/>
+            </a:solidFill>
+            <a:prstDash val="solid"/>
+            <a:tailEnd type="triangle"/>
+          </a:ln>
+        </p:spPr>
+      </p:sp>
+      <p:sp>
+        <p:nvSpPr>
+          <p:cNvPr id="30" name="Shape 27"/>
+          <p:cNvSpPr/>
+          <p:nvPr/>
+        </p:nvSpPr>
+        <p:spPr>
+          <a:xfrm>
+            <a:off x="5916168" y="3767328"/>
+            <a:ext cx="822960" cy="347472"/>
+          </a:xfrm>
+          <a:prstGeom prst="roundRect">
+            <a:avLst>
+              <a:gd name="adj" fmla="val 13158"/>
+            </a:avLst>
+          </a:prstGeom>
+          <a:solidFill>
+            <a:srgbClr val="2680C2"/>
+          </a:solidFill>
+          <a:ln w="12700">
+            <a:solidFill>
+              <a:srgbClr val="2680C2"/>
+            </a:solidFill>
+            <a:prstDash val="solid"/>
+          </a:ln>
+        </p:spPr>
+      </p:sp>
+      <p:sp>
+        <p:nvSpPr>
+          <p:cNvPr id="31" name="Text 28"/>
+          <p:cNvSpPr txBox="1"/>
+          <p:nvPr/>
+        </p:nvSpPr>
+        <p:spPr>
+          <a:xfrm>
+            <a:off x="5916168" y="3767328"/>
+            <a:ext cx="822960" cy="347472"/>
+          </a:xfrm>
+          <a:prstGeom prst="rect">
+            <a:avLst/>
+          </a:prstGeom>
+          <a:noFill/>
+          <a:ln/>
+        </p:spPr>
+        <p:txBody>
+          <a:bodyPr wrap="square" lIns="0" tIns="0" rIns="0" bIns="0" rtlCol="0" anchor="ctr"/>
+          <a:lstStyle/>
+          <a:p>
+            <a:pPr algn="ctr" indent="0" marL="0">
+              <a:buNone/>
+            </a:pPr>
+            <a:r>
+              <a:rPr lang="en-US" sz="900" b="1" dirty="0">
+                <a:solidFill>
+                  <a:srgbClr val="FFFFFF"/>
+                </a:solidFill>
+                <a:latin typeface="Calibri" pitchFamily="34" charset="0"/>
+                <a:ea typeface="Calibri" pitchFamily="34" charset="-122"/>
+                <a:cs typeface="Calibri" pitchFamily="34" charset="-120"/>
+              </a:rPr>
+              <a:t>Pod</a:t>
+            </a:r>
+            <a:endParaRPr lang="en-US" sz="900" dirty="0"/>
+          </a:p>
+        </p:txBody>
+      </p:sp>
+      <p:sp>
+        <p:nvSpPr>
+          <p:cNvPr id="32" name="Shape 29"/>
+          <p:cNvSpPr/>
+          <p:nvPr/>
+        </p:nvSpPr>
+        <p:spPr>
+          <a:xfrm>
+            <a:off x="6748272" y="3941064"/>
+            <a:ext cx="82296" cy="0"/>
+          </a:xfrm>
+          <a:prstGeom prst="line">
+            <a:avLst/>
+          </a:prstGeom>
+          <a:noFill/>
+          <a:ln w="12700">
+            <a:solidFill>
+              <a:srgbClr val="486581"/>
+            </a:solidFill>
+            <a:prstDash val="solid"/>
+            <a:tailEnd type="triangle"/>
+          </a:ln>
+        </p:spPr>
+      </p:sp>
+      <p:sp>
+        <p:nvSpPr>
+          <p:cNvPr id="33" name="Shape 30"/>
+          <p:cNvSpPr/>
+          <p:nvPr/>
+        </p:nvSpPr>
+        <p:spPr>
+          <a:xfrm>
+            <a:off x="6839712" y="3767328"/>
+            <a:ext cx="822960" cy="347472"/>
+          </a:xfrm>
+          <a:prstGeom prst="roundRect">
+            <a:avLst>
+              <a:gd name="adj" fmla="val 13158"/>
+            </a:avLst>
+          </a:prstGeom>
+          <a:solidFill>
+            <a:srgbClr val="F0F4F8"/>
+          </a:solidFill>
+          <a:ln w="12700">
+            <a:solidFill>
+              <a:srgbClr val="D9E2EC"/>
+            </a:solidFill>
+            <a:prstDash val="solid"/>
+          </a:ln>
+        </p:spPr>
+      </p:sp>
+      <p:sp>
+        <p:nvSpPr>
+          <p:cNvPr id="34" name="Text 31"/>
+          <p:cNvSpPr txBox="1"/>
+          <p:nvPr/>
+        </p:nvSpPr>
+        <p:spPr>
+          <a:xfrm>
+            <a:off x="6839712" y="3767328"/>
+            <a:ext cx="822960" cy="347472"/>
+          </a:xfrm>
+          <a:prstGeom prst="rect">
+            <a:avLst/>
+          </a:prstGeom>
+          <a:noFill/>
+          <a:ln/>
+        </p:spPr>
+        <p:txBody>
+          <a:bodyPr wrap="square" lIns="0" tIns="0" rIns="0" bIns="0" rtlCol="0" anchor="ctr"/>
+          <a:lstStyle/>
+          <a:p>
+            <a:pPr algn="ctr" indent="0" marL="0">
+              <a:buNone/>
+            </a:pPr>
+            <a:r>
+              <a:rPr lang="en-US" sz="900" dirty="0">
+                <a:solidFill>
+                  <a:srgbClr val="102A43"/>
+                </a:solidFill>
+                <a:latin typeface="Calibri" pitchFamily="34" charset="0"/>
+                <a:ea typeface="Calibri" pitchFamily="34" charset="-122"/>
+                <a:cs typeface="Calibri" pitchFamily="34" charset="-120"/>
+              </a:rPr>
+              <a:t>App</a:t>
+            </a:r>
+            <a:endParaRPr lang="en-US" sz="900" dirty="0"/>
+          </a:p>
+        </p:txBody>
+      </p:sp>
+      <p:sp>
+        <p:nvSpPr>
+          <p:cNvPr id="35" name="Shape 32"/>
+          <p:cNvSpPr/>
+          <p:nvPr/>
+        </p:nvSpPr>
+        <p:spPr>
+          <a:xfrm>
+            <a:off x="7671816" y="3941064"/>
+            <a:ext cx="82296" cy="0"/>
+          </a:xfrm>
+          <a:prstGeom prst="line">
+            <a:avLst/>
+          </a:prstGeom>
+          <a:noFill/>
+          <a:ln w="12700">
+            <a:solidFill>
+              <a:srgbClr val="486581"/>
+            </a:solidFill>
+            <a:prstDash val="solid"/>
+            <a:tailEnd type="triangle"/>
+          </a:ln>
+        </p:spPr>
+      </p:sp>
+      <p:sp>
+        <p:nvSpPr>
+          <p:cNvPr id="36" name="Shape 33"/>
+          <p:cNvSpPr/>
+          <p:nvPr/>
+        </p:nvSpPr>
+        <p:spPr>
+          <a:xfrm>
+            <a:off x="7763256" y="3767328"/>
+            <a:ext cx="822960" cy="347472"/>
+          </a:xfrm>
+          <a:prstGeom prst="roundRect">
+            <a:avLst>
+              <a:gd name="adj" fmla="val 13158"/>
+            </a:avLst>
+          </a:prstGeom>
+          <a:solidFill>
+            <a:srgbClr val="F0F4F8"/>
+          </a:solidFill>
+          <a:ln w="12700">
+            <a:solidFill>
+              <a:srgbClr val="D9E2EC"/>
+            </a:solidFill>
+            <a:prstDash val="solid"/>
+          </a:ln>
+        </p:spPr>
+      </p:sp>
+      <p:sp>
+        <p:nvSpPr>
+          <p:cNvPr id="37" name="Text 34"/>
+          <p:cNvSpPr txBox="1"/>
+          <p:nvPr/>
+        </p:nvSpPr>
+        <p:spPr>
+          <a:xfrm>
+            <a:off x="7763256" y="3767328"/>
+            <a:ext cx="822960" cy="347472"/>
+          </a:xfrm>
+          <a:prstGeom prst="rect">
+            <a:avLst/>
+          </a:prstGeom>
+          <a:noFill/>
+          <a:ln/>
+        </p:spPr>
+        <p:txBody>
+          <a:bodyPr wrap="square" lIns="0" tIns="0" rIns="0" bIns="0" rtlCol="0" anchor="ctr"/>
+          <a:lstStyle/>
+          <a:p>
+            <a:pPr algn="ctr" indent="0" marL="0">
+              <a:buNone/>
+            </a:pPr>
+            <a:r>
+              <a:rPr lang="en-US" sz="900" dirty="0">
+                <a:solidFill>
+                  <a:srgbClr val="102A43"/>
+                </a:solidFill>
+                <a:latin typeface="Calibri" pitchFamily="34" charset="0"/>
+                <a:ea typeface="Calibri" pitchFamily="34" charset="-122"/>
+                <a:cs typeface="Calibri" pitchFamily="34" charset="-120"/>
+              </a:rPr>
+              <a:t>Dependency</a:t>
+            </a:r>
+            <a:endParaRPr lang="en-US" sz="900" dirty="0"/>
+          </a:p>
+        </p:txBody>
+      </p:sp>
+      <p:sp>
+        <p:nvSpPr>
+          <p:cNvPr id="38" name="Text 35"/>
+          <p:cNvSpPr txBox="1"/>
+          <p:nvPr/>
+        </p:nvSpPr>
+        <p:spPr>
+          <a:xfrm>
+            <a:off x="4069080" y="4169664"/>
+            <a:ext cx="4572000" cy="219456"/>
+          </a:xfrm>
+          <a:prstGeom prst="rect">
+            <a:avLst/>
+          </a:prstGeom>
+          <a:noFill/>
+          <a:ln/>
+        </p:spPr>
+        <p:txBody>
+          <a:bodyPr wrap="square" lIns="0" tIns="0" rIns="0" bIns="0" rtlCol="0" anchor="ctr"/>
+          <a:lstStyle/>
+          <a:p>
+            <a:pPr indent="0" marL="0">
+              <a:buNone/>
+            </a:pPr>
+            <a:r>
+              <a:rPr lang="en-US" sz="900" b="1" dirty="0">
+                <a:solidFill>
+                  <a:srgbClr val="0A558C"/>
+                </a:solidFill>
+                <a:latin typeface="Calibri" pitchFamily="34" charset="0"/>
+                <a:ea typeface="Calibri" pitchFamily="34" charset="-122"/>
+                <a:cs typeface="Calibri" pitchFamily="34" charset="-120"/>
+              </a:rPr>
+              <a:t>the request’s path — bisected across</a:t>
+            </a:r>
+            <a:endParaRPr lang="en-US" sz="900" dirty="0"/>
+          </a:p>
+        </p:txBody>
+      </p:sp>
+      <p:sp>
+        <p:nvSpPr>
+          <p:cNvPr id="39" name="Shape 36"/>
+          <p:cNvSpPr/>
+          <p:nvPr/>
+        </p:nvSpPr>
+        <p:spPr>
+          <a:xfrm>
+            <a:off x="5394960" y="2788920"/>
+            <a:ext cx="1344168" cy="978408"/>
+          </a:xfrm>
+          <a:prstGeom prst="line">
+            <a:avLst/>
+          </a:prstGeom>
+          <a:noFill/>
+          <a:ln w="15875">
+            <a:solidFill>
+              <a:srgbClr val="2680C2"/>
+            </a:solidFill>
+            <a:prstDash val="dash"/>
+          </a:ln>
+        </p:spPr>
+      </p:sp>
+      <p:sp>
+        <p:nvSpPr>
+          <p:cNvPr id="40" name="Text 37"/>
+          <p:cNvSpPr txBox="1"/>
+          <p:nvPr/>
+        </p:nvSpPr>
+        <p:spPr>
+          <a:xfrm>
+            <a:off x="6858000" y="3273552"/>
+            <a:ext cx="1463040" cy="219456"/>
+          </a:xfrm>
+          <a:prstGeom prst="rect">
+            <a:avLst/>
+          </a:prstGeom>
+          <a:noFill/>
+          <a:ln/>
+        </p:spPr>
+        <p:txBody>
+          <a:bodyPr wrap="square" lIns="0" tIns="0" rIns="0" bIns="0" rtlCol="0" anchor="ctr"/>
+          <a:lstStyle/>
+          <a:p>
+            <a:pPr indent="0" marL="0">
+              <a:buNone/>
+            </a:pPr>
+            <a:r>
+              <a:rPr lang="en-US" sz="850" i="1" dirty="0">
+                <a:solidFill>
+                  <a:srgbClr val="0A558C"/>
+                </a:solidFill>
+                <a:latin typeface="Calibri" pitchFamily="34" charset="0"/>
+                <a:ea typeface="Calibri" pitchFamily="34" charset="-122"/>
+                <a:cs typeface="Calibri" pitchFamily="34" charset="-120"/>
+              </a:rPr>
+              <a:t>verb 4 = hop 3</a:t>
+            </a:r>
+            <a:endParaRPr lang="en-US" sz="850" dirty="0"/>
+          </a:p>
+        </p:txBody>
+      </p:sp>
+      <p:sp>
+        <p:nvSpPr>
+          <p:cNvPr id="41" name="Shape 38"/>
+          <p:cNvSpPr/>
+          <p:nvPr/>
+        </p:nvSpPr>
+        <p:spPr>
+          <a:xfrm>
+            <a:off x="6263640" y="1371600"/>
+            <a:ext cx="2377440" cy="301752"/>
+          </a:xfrm>
+          <a:prstGeom prst="roundRect">
+            <a:avLst>
+              <a:gd name="adj" fmla="val 15152"/>
+            </a:avLst>
+          </a:prstGeom>
+          <a:solidFill>
+            <a:srgbClr val="F0F4F8"/>
+          </a:solidFill>
+          <a:ln w="12700">
+            <a:solidFill>
+              <a:srgbClr val="D9E2EC"/>
+            </a:solidFill>
+            <a:prstDash val="solid"/>
+          </a:ln>
+        </p:spPr>
+      </p:sp>
+      <p:sp>
+        <p:nvSpPr>
+          <p:cNvPr id="42" name="Text 39"/>
+          <p:cNvSpPr txBox="1"/>
+          <p:nvPr/>
+        </p:nvSpPr>
+        <p:spPr>
+          <a:xfrm>
+            <a:off x="6373368" y="1371600"/>
+            <a:ext cx="2194560" cy="301752"/>
+          </a:xfrm>
+          <a:prstGeom prst="rect">
+            <a:avLst/>
+          </a:prstGeom>
+          <a:noFill/>
+          <a:ln/>
+        </p:spPr>
+        <p:txBody>
+          <a:bodyPr wrap="square" lIns="0" tIns="0" rIns="0" bIns="0" rtlCol="0" anchor="ctr"/>
+          <a:lstStyle/>
+          <a:p>
+            <a:pPr indent="0" marL="0">
+              <a:buNone/>
+            </a:pPr>
+            <a:r>
+              <a:rPr lang="en-US" sz="900" dirty="0">
+                <a:solidFill>
+                  <a:srgbClr val="102A43"/>
+                </a:solidFill>
+                <a:latin typeface="Calibri" pitchFamily="34" charset="0"/>
+                <a:ea typeface="Calibri" pitchFamily="34" charset="-122"/>
+                <a:cs typeface="Calibri" pitchFamily="34" charset="-120"/>
+              </a:rPr>
+              <a:t>Kubernetes’ belief</a:t>
+            </a:r>
+            <a:endParaRPr lang="en-US" sz="900" dirty="0"/>
+          </a:p>
+        </p:txBody>
+      </p:sp>
+      <p:sp>
+        <p:nvSpPr>
+          <p:cNvPr id="43" name="Shape 40"/>
+          <p:cNvSpPr/>
+          <p:nvPr/>
+        </p:nvSpPr>
+        <p:spPr>
+          <a:xfrm>
+            <a:off x="6263640" y="1764792"/>
+            <a:ext cx="2377440" cy="301752"/>
+          </a:xfrm>
+          <a:prstGeom prst="roundRect">
+            <a:avLst>
+              <a:gd name="adj" fmla="val 15152"/>
+            </a:avLst>
+          </a:prstGeom>
+          <a:solidFill>
+            <a:srgbClr val="F0F4F8"/>
+          </a:solidFill>
+          <a:ln w="12700">
+            <a:solidFill>
+              <a:srgbClr val="D9E2EC"/>
+            </a:solidFill>
+            <a:prstDash val="solid"/>
+          </a:ln>
+        </p:spPr>
+      </p:sp>
+      <p:sp>
+        <p:nvSpPr>
+          <p:cNvPr id="44" name="Text 41"/>
+          <p:cNvSpPr txBox="1"/>
+          <p:nvPr/>
+        </p:nvSpPr>
+        <p:spPr>
+          <a:xfrm>
+            <a:off x="6373368" y="1764792"/>
+            <a:ext cx="2194560" cy="301752"/>
+          </a:xfrm>
+          <a:prstGeom prst="rect">
+            <a:avLst/>
+          </a:prstGeom>
+          <a:noFill/>
+          <a:ln/>
+        </p:spPr>
+        <p:txBody>
+          <a:bodyPr wrap="square" lIns="0" tIns="0" rIns="0" bIns="0" rtlCol="0" anchor="ctr"/>
+          <a:lstStyle/>
+          <a:p>
+            <a:pPr indent="0" marL="0">
+              <a:buNone/>
+            </a:pPr>
+            <a:r>
+              <a:rPr lang="en-US" sz="900" dirty="0">
+                <a:solidFill>
+                  <a:srgbClr val="102A43"/>
+                </a:solidFill>
+                <a:latin typeface="Calibri" pitchFamily="34" charset="0"/>
+                <a:ea typeface="Calibri" pitchFamily="34" charset="-122"/>
+                <a:cs typeface="Calibri" pitchFamily="34" charset="-120"/>
+              </a:rPr>
+              <a:t>Linux’s fact</a:t>
+            </a:r>
+            <a:endParaRPr lang="en-US" sz="900" dirty="0"/>
+          </a:p>
+        </p:txBody>
+      </p:sp>
+      <p:sp>
+        <p:nvSpPr>
+          <p:cNvPr id="45" name="Shape 42"/>
+          <p:cNvSpPr/>
+          <p:nvPr/>
+        </p:nvSpPr>
+        <p:spPr>
+          <a:xfrm>
+            <a:off x="6263640" y="2157984"/>
+            <a:ext cx="2377440" cy="301752"/>
+          </a:xfrm>
+          <a:prstGeom prst="roundRect">
+            <a:avLst>
+              <a:gd name="adj" fmla="val 15152"/>
+            </a:avLst>
+          </a:prstGeom>
+          <a:solidFill>
+            <a:srgbClr val="F0F4F8"/>
+          </a:solidFill>
+          <a:ln w="12700">
+            <a:solidFill>
+              <a:srgbClr val="D9E2EC"/>
+            </a:solidFill>
+            <a:prstDash val="solid"/>
+          </a:ln>
+        </p:spPr>
+      </p:sp>
+      <p:sp>
+        <p:nvSpPr>
+          <p:cNvPr id="46" name="Text 43"/>
+          <p:cNvSpPr txBox="1"/>
+          <p:nvPr/>
+        </p:nvSpPr>
+        <p:spPr>
+          <a:xfrm>
+            <a:off x="6373368" y="2157984"/>
+            <a:ext cx="2194560" cy="301752"/>
+          </a:xfrm>
+          <a:prstGeom prst="rect">
+            <a:avLst/>
+          </a:prstGeom>
+          <a:noFill/>
+          <a:ln/>
+        </p:spPr>
+        <p:txBody>
+          <a:bodyPr wrap="square" lIns="0" tIns="0" rIns="0" bIns="0" rtlCol="0" anchor="ctr"/>
+          <a:lstStyle/>
+          <a:p>
+            <a:pPr indent="0" marL="0">
+              <a:buNone/>
+            </a:pPr>
+            <a:r>
+              <a:rPr lang="en-US" sz="900" dirty="0">
+                <a:solidFill>
+                  <a:srgbClr val="102A43"/>
+                </a:solidFill>
+                <a:latin typeface="Calibri" pitchFamily="34" charset="0"/>
+                <a:ea typeface="Calibri" pitchFamily="34" charset="-122"/>
+                <a:cs typeface="Calibri" pitchFamily="34" charset="-120"/>
+              </a:rPr>
+              <a:t>the runtime’s state</a:t>
+            </a:r>
+            <a:endParaRPr lang="en-US" sz="900" dirty="0"/>
+          </a:p>
+        </p:txBody>
+      </p:sp>
+      <p:sp>
+        <p:nvSpPr>
+          <p:cNvPr id="47" name="Shape 44"/>
+          <p:cNvSpPr/>
+          <p:nvPr/>
+        </p:nvSpPr>
+        <p:spPr>
+          <a:xfrm>
+            <a:off x="6263640" y="2551176"/>
+            <a:ext cx="2377440" cy="301752"/>
+          </a:xfrm>
+          <a:prstGeom prst="roundRect">
+            <a:avLst>
+              <a:gd name="adj" fmla="val 15152"/>
+            </a:avLst>
+          </a:prstGeom>
+          <a:solidFill>
+            <a:srgbClr val="102A43"/>
+          </a:solidFill>
+          <a:ln w="12700">
+            <a:solidFill>
+              <a:srgbClr val="102A43"/>
+            </a:solidFill>
+            <a:prstDash val="solid"/>
+          </a:ln>
+        </p:spPr>
+      </p:sp>
+      <p:sp>
+        <p:nvSpPr>
+          <p:cNvPr id="48" name="Text 45"/>
+          <p:cNvSpPr txBox="1"/>
+          <p:nvPr/>
+        </p:nvSpPr>
+        <p:spPr>
+          <a:xfrm>
+            <a:off x="6373368" y="2551176"/>
+            <a:ext cx="2194560" cy="301752"/>
+          </a:xfrm>
+          <a:prstGeom prst="rect">
+            <a:avLst/>
+          </a:prstGeom>
+          <a:noFill/>
+          <a:ln/>
+        </p:spPr>
+        <p:txBody>
+          <a:bodyPr wrap="square" lIns="0" tIns="0" rIns="0" bIns="0" rtlCol="0" anchor="ctr"/>
+          <a:lstStyle/>
+          <a:p>
+            <a:pPr indent="0" marL="0">
+              <a:buNone/>
+            </a:pPr>
+            <a:r>
+              <a:rPr lang="en-US" sz="900" dirty="0">
+                <a:solidFill>
+                  <a:srgbClr val="FFFFFF"/>
+                </a:solidFill>
+                <a:latin typeface="Calibri" pitchFamily="34" charset="0"/>
+                <a:ea typeface="Calibri" pitchFamily="34" charset="-122"/>
+                <a:cs typeface="Calibri" pitchFamily="34" charset="-120"/>
+              </a:rPr>
+              <a:t>the code’s reason</a:t>
+            </a:r>
+            <a:endParaRPr lang="en-US" sz="900" dirty="0"/>
+          </a:p>
+        </p:txBody>
+      </p:sp>
+      <p:sp>
+        <p:nvSpPr>
+          <p:cNvPr id="49" name="Shape 46"/>
+          <p:cNvSpPr/>
+          <p:nvPr/>
+        </p:nvSpPr>
+        <p:spPr>
+          <a:xfrm>
+            <a:off x="6099048" y="1417320"/>
+            <a:ext cx="0" cy="1371600"/>
+          </a:xfrm>
+          <a:prstGeom prst="line">
+            <a:avLst/>
+          </a:prstGeom>
+          <a:noFill/>
+          <a:ln w="15875">
+            <a:solidFill>
+              <a:srgbClr val="2680C2"/>
+            </a:solidFill>
+            <a:prstDash val="solid"/>
+            <a:tailEnd type="triangle"/>
+          </a:ln>
+        </p:spPr>
+      </p:sp>
+      <p:sp>
+        <p:nvSpPr>
+          <p:cNvPr id="50" name="Text 47"/>
+          <p:cNvSpPr txBox="1"/>
+          <p:nvPr/>
+        </p:nvSpPr>
+        <p:spPr>
+          <a:xfrm>
+            <a:off x="6263640" y="1152144"/>
+            <a:ext cx="2377440" cy="219456"/>
+          </a:xfrm>
+          <a:prstGeom prst="rect">
+            <a:avLst/>
+          </a:prstGeom>
+          <a:noFill/>
+          <a:ln/>
+        </p:spPr>
+        <p:txBody>
+          <a:bodyPr wrap="square" lIns="0" tIns="0" rIns="0" bIns="0" rtlCol="0" anchor="ctr"/>
+          <a:lstStyle/>
+          <a:p>
+            <a:pPr indent="0" marL="0">
+              <a:buNone/>
+            </a:pPr>
+            <a:r>
+              <a:rPr lang="en-US" sz="900" b="1" dirty="0">
+                <a:solidFill>
+                  <a:srgbClr val="0A558C"/>
+                </a:solidFill>
+                <a:latin typeface="Calibri" pitchFamily="34" charset="0"/>
+                <a:ea typeface="Calibri" pitchFamily="34" charset="-122"/>
+                <a:cs typeface="Calibri" pitchFamily="34" charset="-120"/>
+              </a:rPr>
+              <a:t>the ladder — descend one rung</a:t>
+            </a:r>
+            <a:endParaRPr lang="en-US" sz="900" dirty="0"/>
+          </a:p>
+        </p:txBody>
+      </p:sp>
+    </p:spTree>
+  </p:cSld>
+  <p:clrMapOvr>
+    <a:masterClrMapping/>
+  </p:clrMapOvr>
+</p:sld>
+</file>
+
+<file path=ppt/slides/slide8.xml><?xml version="1.0" encoding="utf-8"?>
+<p:sld xmlns:a="http://schemas.openxmlformats.org/drawingml/2006/main" xmlns:r="http://schemas.openxmlformats.org/officeDocument/2006/relationships" xmlns:p="http://schemas.openxmlformats.org/presentationml/2006/main">
+  <p:cSld name="Slide 8">
+    <p:bg>
+      <p:bgPr>
+        <a:solidFill>
+          <a:srgbClr val="FFFFFF"/>
+        </a:solidFill>
+      </p:bgPr>
+    </p:bg>
+    <p:spTree>
+      <p:nvGrpSpPr>
+        <p:cNvPr id="1" name=""/>
+        <p:cNvGrpSpPr/>
+        <p:nvPr/>
+      </p:nvGrpSpPr>
+      <p:grpSpPr>
+        <a:xfrm>
+          <a:off x="0" y="0"/>
+          <a:ext cx="0" cy="0"/>
+          <a:chOff x="0" y="0"/>
+          <a:chExt cx="0" cy="0"/>
+        </a:xfrm>
+      </p:grpSpPr>
+      <p:sp>
+        <p:nvSpPr>
+          <p:cNvPr id="2" name="Text 0"/>
+          <p:cNvSpPr txBox="1"/>
+          <p:nvPr/>
+        </p:nvSpPr>
+        <p:spPr>
+          <a:xfrm>
+            <a:off x="457200" y="274320"/>
+            <a:ext cx="8229600" cy="228600"/>
+          </a:xfrm>
+          <a:prstGeom prst="rect">
+            <a:avLst/>
+          </a:prstGeom>
+          <a:noFill/>
+          <a:ln/>
+        </p:spPr>
+        <p:txBody>
+          <a:bodyPr wrap="square" lIns="0" tIns="0" rIns="0" bIns="0" rtlCol="0" anchor="ctr"/>
+          <a:lstStyle/>
+          <a:p>
+            <a:pPr indent="0" marL="0">
+              <a:buNone/>
+            </a:pPr>
+            <a:r>
+              <a:rPr lang="en-US" sz="1000" b="1" spc="140" kern="0" dirty="0">
+                <a:solidFill>
+                  <a:srgbClr val="0A558C"/>
+                </a:solidFill>
+                <a:latin typeface="Calibri" pitchFamily="34" charset="0"/>
+                <a:ea typeface="Calibri" pitchFamily="34" charset="-122"/>
+                <a:cs typeface="Calibri" pitchFamily="34" charset="-120"/>
+              </a:rPr>
+              <a:t>EXAMPLE 4 OF 4   ·   WHAT YOU TYPE</a:t>
+            </a:r>
+            <a:endParaRPr lang="en-US" sz="1000" dirty="0"/>
+          </a:p>
+        </p:txBody>
+      </p:sp>
+      <p:sp>
+        <p:nvSpPr>
+          <p:cNvPr id="3" name="Text 1"/>
+          <p:cNvSpPr txBox="1"/>
+          <p:nvPr/>
+        </p:nvSpPr>
+        <p:spPr>
+          <a:xfrm>
+            <a:off x="896112" y="530352"/>
+            <a:ext cx="3108960" cy="502920"/>
+          </a:xfrm>
+          <a:prstGeom prst="rect">
+            <a:avLst/>
+          </a:prstGeom>
+          <a:noFill/>
+          <a:ln/>
+        </p:spPr>
+        <p:txBody>
+          <a:bodyPr wrap="square" lIns="0" tIns="0" rIns="0" bIns="0" rtlCol="0" anchor="ctr"/>
+          <a:lstStyle/>
+          <a:p>
+            <a:pPr indent="0" marL="0">
+              <a:buNone/>
+            </a:pPr>
+            <a:r>
+              <a:rPr lang="en-US" sz="2800" b="1" dirty="0">
+                <a:solidFill>
+                  <a:srgbClr val="102A43"/>
+                </a:solidFill>
+                <a:latin typeface="Cambria" pitchFamily="34" charset="0"/>
+                <a:ea typeface="Cambria" pitchFamily="34" charset="-122"/>
+                <a:cs typeface="Cambria" pitchFamily="34" charset="-120"/>
+              </a:rPr>
+              <a:t>The Use Cases</a:t>
+            </a:r>
+            <a:endParaRPr lang="en-US" sz="2800" dirty="0"/>
+          </a:p>
+        </p:txBody>
+      </p:sp>
+      <p:sp>
+        <p:nvSpPr>
+          <p:cNvPr id="4" name="Shape 2"/>
+          <p:cNvSpPr/>
+          <p:nvPr/>
+        </p:nvSpPr>
+        <p:spPr>
+          <a:xfrm>
+            <a:off x="457200" y="576072"/>
+            <a:ext cx="384048" cy="384048"/>
+          </a:xfrm>
+          <a:prstGeom prst="ellipse">
+            <a:avLst/>
+          </a:prstGeom>
+          <a:solidFill>
+            <a:srgbClr val="2680C2"/>
+          </a:solidFill>
+          <a:ln w="12700">
+            <a:solidFill>
+              <a:srgbClr val="2680C2"/>
+            </a:solidFill>
+            <a:prstDash val="solid"/>
+          </a:ln>
+        </p:spPr>
+      </p:sp>
       <p:pic>
         <p:nvPicPr>
-          <p:cNvPr id="30" name="Image 3" descr="preencoded.png">    </p:cNvPr>
+          <p:cNvPr id="5" name="Image 0" descr="preencoded.png">    </p:cNvPr>
           <p:cNvPicPr>
             <a:picLocks noChangeAspect="1"/>
           </p:cNvPicPr>
           <p:nvPr/>
         </p:nvPicPr>
         <p:blipFill>
-          <a:blip r:embed="rId4"/>
+          <a:blip r:embed="rId1"/>
           <a:stretch>
             <a:fillRect/>
           </a:stretch>
         </p:blipFill>
         <p:spPr>
           <a:xfrm>
-            <a:off x="6954195" y="1614099"/>
-            <a:ext cx="228234" cy="228234"/>
+            <a:off x="549372" y="668244"/>
+            <a:ext cx="199705" cy="199705"/>
           </a:xfrm>
           <a:prstGeom prst="rect">
             <a:avLst/>
@@ -5243,77 +8409,130 @@
       </p:pic>
       <p:sp>
         <p:nvSpPr>
-          <p:cNvPr id="31" name="Text 25"/>
-          <p:cNvSpPr txBox="1"/>
-          <p:nvPr/>
-        </p:nvSpPr>
-        <p:spPr>
-          <a:xfrm>
-            <a:off x="7370064" y="1481328"/>
-            <a:ext cx="1234440" cy="274320"/>
-          </a:xfrm>
-          <a:prstGeom prst="rect">
-            <a:avLst/>
-          </a:prstGeom>
-          <a:noFill/>
-          <a:ln/>
-        </p:spPr>
-        <p:txBody>
-          <a:bodyPr wrap="square" lIns="0" tIns="0" rIns="0" bIns="0" rtlCol="0" anchor="ctr"/>
-          <a:lstStyle/>
-          <a:p>
-            <a:pPr indent="0" marL="0">
-              <a:buNone/>
-            </a:pPr>
-            <a:r>
-              <a:rPr lang="en-US" sz="1250" b="1" dirty="0">
-                <a:solidFill>
-                  <a:srgbClr val="1F2933"/>
-                </a:solidFill>
-                <a:latin typeface="Calibri" pitchFamily="34" charset="0"/>
-                <a:ea typeface="Calibri" pitchFamily="34" charset="-122"/>
-                <a:cs typeface="Calibri" pitchFamily="34" charset="-120"/>
-              </a:rPr>
-              <a:t>The Use Cases</a:t>
-            </a:r>
-            <a:endParaRPr lang="en-US" sz="1250" dirty="0"/>
-          </a:p>
-        </p:txBody>
-      </p:sp>
-      <p:sp>
-        <p:nvSpPr>
-          <p:cNvPr id="32" name="Text 26"/>
-          <p:cNvSpPr txBox="1"/>
-          <p:nvPr/>
-        </p:nvSpPr>
-        <p:spPr>
-          <a:xfrm>
-            <a:off x="7370064" y="1737360"/>
-            <a:ext cx="1234440" cy="228600"/>
-          </a:xfrm>
-          <a:prstGeom prst="rect">
-            <a:avLst/>
-          </a:prstGeom>
-          <a:noFill/>
-          <a:ln/>
-        </p:spPr>
-        <p:txBody>
-          <a:bodyPr wrap="square" lIns="0" tIns="0" rIns="0" bIns="0" rtlCol="0" anchor="ctr"/>
-          <a:lstStyle/>
-          <a:p>
-            <a:pPr indent="0" marL="0">
-              <a:buNone/>
-            </a:pPr>
-            <a:r>
-              <a:rPr lang="en-US" sz="1000" i="1" dirty="0">
-                <a:solidFill>
-                  <a:srgbClr val="B86A1E"/>
-                </a:solidFill>
-                <a:latin typeface="Calibri" pitchFamily="34" charset="0"/>
-                <a:ea typeface="Calibri" pitchFamily="34" charset="-122"/>
-                <a:cs typeface="Calibri" pitchFamily="34" charset="-120"/>
-              </a:rPr>
-              <a:t>what you type</a:t>
+          <p:cNvPr id="6" name="Text 3"/>
+          <p:cNvSpPr txBox="1"/>
+          <p:nvPr/>
+        </p:nvSpPr>
+        <p:spPr>
+          <a:xfrm>
+            <a:off x="457200" y="1298448"/>
+            <a:ext cx="3383280" cy="1600200"/>
+          </a:xfrm>
+          <a:prstGeom prst="rect">
+            <a:avLst/>
+          </a:prstGeom>
+          <a:noFill/>
+          <a:ln/>
+        </p:spPr>
+        <p:txBody>
+          <a:bodyPr wrap="square" lIns="0" tIns="0" rIns="0" bIns="0" rtlCol="0" anchor="t"/>
+          <a:lstStyle/>
+          <a:p>
+            <a:pPr indent="0" marL="0">
+              <a:buNone/>
+            </a:pPr>
+            <a:r>
+              <a:rPr lang="en-US" sz="1100" dirty="0">
+                <a:solidFill>
+                  <a:srgbClr val="486581"/>
+                </a:solidFill>
+                <a:latin typeface="Calibri" pitchFamily="34" charset="0"/>
+                <a:ea typeface="Calibri" pitchFamily="34" charset="-122"/>
+                <a:cs typeface="Calibri" pitchFamily="34" charset="-120"/>
+              </a:rPr>
+              <a:t>The tactical layer that hangs off the models — and the shape adoption actually takes. Twelve questions people really ask, each answered with commands, and only then a ranked list of symptoms to rule out. The models are how you know which question you are in.</a:t>
+            </a:r>
+            <a:endParaRPr lang="en-US" sz="1100" dirty="0"/>
+          </a:p>
+        </p:txBody>
+      </p:sp>
+      <p:sp>
+        <p:nvSpPr>
+          <p:cNvPr id="7" name="Text 4"/>
+          <p:cNvSpPr txBox="1"/>
+          <p:nvPr/>
+        </p:nvSpPr>
+        <p:spPr>
+          <a:xfrm>
+            <a:off x="457200" y="2542032"/>
+            <a:ext cx="3383280" cy="731520"/>
+          </a:xfrm>
+          <a:prstGeom prst="rect">
+            <a:avLst/>
+          </a:prstGeom>
+          <a:noFill/>
+          <a:ln/>
+        </p:spPr>
+        <p:txBody>
+          <a:bodyPr wrap="square" lIns="0" tIns="0" rIns="0" bIns="0" rtlCol="0" anchor="t"/>
+          <a:lstStyle/>
+          <a:p>
+            <a:pPr indent="0" marL="0">
+              <a:buNone/>
+            </a:pPr>
+            <a:r>
+              <a:rPr lang="en-US" sz="1200" i="1" dirty="0">
+                <a:solidFill>
+                  <a:srgbClr val="102A43"/>
+                </a:solidFill>
+                <a:latin typeface="Calibri" pitchFamily="34" charset="0"/>
+                <a:ea typeface="Calibri" pitchFamily="34" charset="-122"/>
+                <a:cs typeface="Calibri" pitchFamily="34" charset="-120"/>
+              </a:rPr>
+              <a:t>“Start from the question, not from the graph.”</a:t>
+            </a:r>
+            <a:endParaRPr lang="en-US" sz="1200" dirty="0"/>
+          </a:p>
+        </p:txBody>
+      </p:sp>
+      <p:sp>
+        <p:nvSpPr>
+          <p:cNvPr id="8" name="Text 5"/>
+          <p:cNvSpPr txBox="1"/>
+          <p:nvPr/>
+        </p:nvSpPr>
+        <p:spPr>
+          <a:xfrm>
+            <a:off x="457200" y="3346704"/>
+            <a:ext cx="3383280" cy="914400"/>
+          </a:xfrm>
+          <a:prstGeom prst="rect">
+            <a:avLst/>
+          </a:prstGeom>
+          <a:noFill/>
+          <a:ln/>
+        </p:spPr>
+        <p:txBody>
+          <a:bodyPr wrap="square" lIns="0" tIns="0" rIns="0" bIns="0" rtlCol="0" anchor="t"/>
+          <a:lstStyle/>
+          <a:p>
+            <a:pPr indent="0" marL="0">
+              <a:buNone/>
+            </a:pPr>
+            <a:r>
+              <a:rPr lang="en-US" sz="1000" b="1" dirty="0">
+                <a:solidFill>
+                  <a:srgbClr val="0A558C"/>
+                </a:solidFill>
+                <a:latin typeface="Calibri" pitchFamily="34" charset="0"/>
+                <a:ea typeface="Calibri" pitchFamily="34" charset="-122"/>
+                <a:cs typeface="Calibri" pitchFamily="34" charset="-120"/>
+              </a:rPr>
+              <a:t>In practice: </a:t>
+            </a:r>
+            <a:pPr indent="0" marL="0">
+              <a:buNone/>
+            </a:pPr>
+            <a:r>
+              <a:rPr lang="en-US" sz="1000" dirty="0">
+                <a:solidFill>
+                  <a:srgbClr val="486581"/>
+                </a:solidFill>
+                <a:latin typeface="Calibri" pitchFamily="34" charset="0"/>
+                <a:ea typeface="Calibri" pitchFamily="34" charset="-122"/>
+                <a:cs typeface="Calibri" pitchFamily="34" charset="-120"/>
+              </a:rPr>
+              <a:t>Twelve questions, eight symptom walks, three sizing procedures — every command carrying the seat marker that says whose permission it needs.</a:t>
             </a:r>
             <a:endParaRPr lang="en-US" sz="1000" dirty="0"/>
           </a:p>
@@ -5321,38 +8540,128 @@
       </p:sp>
       <p:sp>
         <p:nvSpPr>
-          <p:cNvPr id="33" name="Text 27"/>
-          <p:cNvSpPr txBox="1"/>
-          <p:nvPr/>
-        </p:nvSpPr>
-        <p:spPr>
-          <a:xfrm>
-            <a:off x="6848856" y="2084832"/>
-            <a:ext cx="1691640" cy="1234440"/>
-          </a:xfrm>
-          <a:prstGeom prst="rect">
-            <a:avLst/>
-          </a:prstGeom>
-          <a:noFill/>
-          <a:ln/>
-        </p:spPr>
-        <p:txBody>
-          <a:bodyPr wrap="square" lIns="0" tIns="0" rIns="0" bIns="0" rtlCol="0" anchor="t"/>
-          <a:lstStyle/>
-          <a:p>
-            <a:pPr indent="0" marL="0">
+          <p:cNvPr id="9" name="Shape 6"/>
+          <p:cNvSpPr/>
+          <p:nvPr/>
+        </p:nvSpPr>
+        <p:spPr>
+          <a:xfrm>
+            <a:off x="4069080" y="1481328"/>
+            <a:ext cx="4572000" cy="530352"/>
+          </a:xfrm>
+          <a:prstGeom prst="roundRect">
+            <a:avLst>
+              <a:gd name="adj" fmla="val 12069"/>
+            </a:avLst>
+          </a:prstGeom>
+          <a:solidFill>
+            <a:srgbClr val="102A43"/>
+          </a:solidFill>
+          <a:ln w="12700">
+            <a:solidFill>
+              <a:srgbClr val="102A43"/>
+            </a:solidFill>
+            <a:prstDash val="solid"/>
+          </a:ln>
+        </p:spPr>
+      </p:sp>
+      <p:sp>
+        <p:nvSpPr>
+          <p:cNvPr id="10" name="Text 7"/>
+          <p:cNvSpPr txBox="1"/>
+          <p:nvPr/>
+        </p:nvSpPr>
+        <p:spPr>
+          <a:xfrm>
+            <a:off x="4069080" y="1481328"/>
+            <a:ext cx="4572000" cy="530352"/>
+          </a:xfrm>
+          <a:prstGeom prst="rect">
+            <a:avLst/>
+          </a:prstGeom>
+          <a:noFill/>
+          <a:ln/>
+        </p:spPr>
+        <p:txBody>
+          <a:bodyPr wrap="square" lIns="0" tIns="0" rIns="0" bIns="0" rtlCol="0" anchor="ctr"/>
+          <a:lstStyle/>
+          <a:p>
+            <a:pPr algn="ctr" indent="0" marL="0">
+              <a:buNone/>
+            </a:pPr>
+            <a:r>
+              <a:rPr lang="en-US" sz="1500" b="1" dirty="0">
+                <a:solidFill>
+                  <a:srgbClr val="FFFFFF"/>
+                </a:solidFill>
+                <a:latin typeface="Cambria" pitchFamily="34" charset="0"/>
+                <a:ea typeface="Cambria" pitchFamily="34" charset="-122"/>
+                <a:cs typeface="Cambria" pitchFamily="34" charset="-120"/>
+              </a:rPr>
+              <a:t>“Are customers happy?”</a:t>
+            </a:r>
+            <a:endParaRPr lang="en-US" sz="1500" dirty="0"/>
+          </a:p>
+        </p:txBody>
+      </p:sp>
+      <p:sp>
+        <p:nvSpPr>
+          <p:cNvPr id="11" name="Shape 8"/>
+          <p:cNvSpPr/>
+          <p:nvPr/>
+        </p:nvSpPr>
+        <p:spPr>
+          <a:xfrm>
+            <a:off x="6355080" y="2011680"/>
+            <a:ext cx="0" cy="237744"/>
+          </a:xfrm>
+          <a:prstGeom prst="line">
+            <a:avLst/>
+          </a:prstGeom>
+          <a:noFill/>
+          <a:ln w="15875">
+            <a:solidFill>
+              <a:srgbClr val="2680C2"/>
+            </a:solidFill>
+            <a:prstDash val="solid"/>
+            <a:tailEnd type="triangle"/>
+          </a:ln>
+        </p:spPr>
+      </p:sp>
+      <p:sp>
+        <p:nvSpPr>
+          <p:cNvPr id="12" name="Text 9"/>
+          <p:cNvSpPr txBox="1"/>
+          <p:nvPr/>
+        </p:nvSpPr>
+        <p:spPr>
+          <a:xfrm>
+            <a:off x="4069080" y="2267712"/>
+            <a:ext cx="4572000" cy="237744"/>
+          </a:xfrm>
+          <a:prstGeom prst="rect">
+            <a:avLst/>
+          </a:prstGeom>
+          <a:noFill/>
+          <a:ln/>
+        </p:spPr>
+        <p:txBody>
+          <a:bodyPr wrap="square" lIns="0" tIns="0" rIns="0" bIns="0" rtlCol="0" anchor="ctr"/>
+          <a:lstStyle/>
+          <a:p>
+            <a:pPr algn="ctr" indent="0" marL="0">
               <a:buNone/>
             </a:pPr>
             <a:r>
               <a:rPr lang="en-US" sz="950" dirty="0">
                 <a:solidFill>
-                  <a:srgbClr val="52606D"/>
-                </a:solidFill>
-                <a:latin typeface="Calibri" pitchFamily="34" charset="0"/>
-                <a:ea typeface="Calibri" pitchFamily="34" charset="-122"/>
-                <a:cs typeface="Calibri" pitchFamily="34" charset="-120"/>
-              </a:rPr>
-              <a:t>Twelve questions people actually ask — are customers happy? is it us or the platform? — each with the answering commands, then the symptoms to rule out, in order.</a:t>
+                  <a:srgbClr val="486581"/>
+                </a:solidFill>
+                <a:latin typeface="Calibri" pitchFamily="34" charset="0"/>
+                <a:ea typeface="Calibri" pitchFamily="34" charset="-122"/>
+                <a:cs typeface="Calibri" pitchFamily="34" charset="-120"/>
+              </a:rPr>
+              <a:t>the SLI at three scales · the burn rate · the worst route → the SLO card</a:t>
             </a:r>
             <a:endParaRPr lang="en-US" sz="950" dirty="0"/>
           </a:p>
@@ -5360,130 +8669,754 @@
       </p:sp>
       <p:sp>
         <p:nvSpPr>
-          <p:cNvPr id="34" name="Text 28"/>
-          <p:cNvSpPr txBox="1"/>
-          <p:nvPr/>
-        </p:nvSpPr>
-        <p:spPr>
-          <a:xfrm>
-            <a:off x="6848856" y="3337560"/>
-            <a:ext cx="1691640" cy="685800"/>
-          </a:xfrm>
-          <a:prstGeom prst="rect">
-            <a:avLst/>
-          </a:prstGeom>
-          <a:noFill/>
-          <a:ln/>
-        </p:spPr>
-        <p:txBody>
-          <a:bodyPr wrap="square" lIns="0" tIns="0" rIns="0" bIns="0" rtlCol="0" anchor="t"/>
-          <a:lstStyle/>
-          <a:p>
-            <a:pPr indent="0" marL="0">
+          <p:cNvPr id="13" name="Text 10"/>
+          <p:cNvSpPr txBox="1"/>
+          <p:nvPr/>
+        </p:nvSpPr>
+        <p:spPr>
+          <a:xfrm>
+            <a:off x="4069080" y="2615184"/>
+            <a:ext cx="4572000" cy="237744"/>
+          </a:xfrm>
+          <a:prstGeom prst="rect">
+            <a:avLst/>
+          </a:prstGeom>
+          <a:noFill/>
+          <a:ln/>
+        </p:spPr>
+        <p:txBody>
+          <a:bodyPr wrap="square" lIns="0" tIns="0" rIns="0" bIns="0" rtlCol="0" anchor="ctr"/>
+          <a:lstStyle/>
+          <a:p>
+            <a:pPr algn="ctr" indent="0" marL="0">
+              <a:buNone/>
+            </a:pPr>
+            <a:r>
+              <a:rPr lang="en-US" sz="900" b="1" dirty="0">
+                <a:solidFill>
+                  <a:srgbClr val="0A558C"/>
+                </a:solidFill>
+                <a:latin typeface="Calibri" pitchFamily="34" charset="0"/>
+                <a:ea typeface="Calibri" pitchFamily="34" charset="-122"/>
+                <a:cs typeface="Calibri" pitchFamily="34" charset="-120"/>
+              </a:rPr>
+              <a:t>if the answer is no, rule out — in this order</a:t>
+            </a:r>
+            <a:endParaRPr lang="en-US" sz="900" dirty="0"/>
+          </a:p>
+        </p:txBody>
+      </p:sp>
+      <p:sp>
+        <p:nvSpPr>
+          <p:cNvPr id="14" name="Shape 11"/>
+          <p:cNvSpPr/>
+          <p:nvPr/>
+        </p:nvSpPr>
+        <p:spPr>
+          <a:xfrm>
+            <a:off x="4315968" y="2926080"/>
+            <a:ext cx="457200" cy="457200"/>
+          </a:xfrm>
+          <a:prstGeom prst="ellipse">
+            <a:avLst/>
+          </a:prstGeom>
+          <a:solidFill>
+            <a:srgbClr val="2680C2"/>
+          </a:solidFill>
+          <a:ln w="12700">
+            <a:solidFill>
+              <a:srgbClr val="2680C2"/>
+            </a:solidFill>
+            <a:prstDash val="solid"/>
+          </a:ln>
+        </p:spPr>
+      </p:sp>
+      <p:sp>
+        <p:nvSpPr>
+          <p:cNvPr id="15" name="Text 12"/>
+          <p:cNvSpPr txBox="1"/>
+          <p:nvPr/>
+        </p:nvSpPr>
+        <p:spPr>
+          <a:xfrm>
+            <a:off x="4315968" y="2926080"/>
+            <a:ext cx="457200" cy="457200"/>
+          </a:xfrm>
+          <a:prstGeom prst="rect">
+            <a:avLst/>
+          </a:prstGeom>
+          <a:noFill/>
+          <a:ln/>
+        </p:spPr>
+        <p:txBody>
+          <a:bodyPr wrap="square" lIns="0" tIns="0" rIns="0" bIns="0" rtlCol="0" anchor="ctr"/>
+          <a:lstStyle/>
+          <a:p>
+            <a:pPr algn="ctr" indent="0" marL="0">
+              <a:buNone/>
+            </a:pPr>
+            <a:r>
+              <a:rPr lang="en-US" sz="1600" b="1" dirty="0">
+                <a:solidFill>
+                  <a:srgbClr val="FFFFFF"/>
+                </a:solidFill>
+                <a:latin typeface="Cambria" pitchFamily="34" charset="0"/>
+                <a:ea typeface="Cambria" pitchFamily="34" charset="-122"/>
+                <a:cs typeface="Cambria" pitchFamily="34" charset="-120"/>
+              </a:rPr>
+              <a:t>3</a:t>
+            </a:r>
+            <a:endParaRPr lang="en-US" sz="1600" dirty="0"/>
+          </a:p>
+        </p:txBody>
+      </p:sp>
+      <p:sp>
+        <p:nvSpPr>
+          <p:cNvPr id="16" name="Text 13"/>
+          <p:cNvSpPr txBox="1"/>
+          <p:nvPr/>
+        </p:nvSpPr>
+        <p:spPr>
+          <a:xfrm>
+            <a:off x="4142232" y="3419856"/>
+            <a:ext cx="804672" cy="219456"/>
+          </a:xfrm>
+          <a:prstGeom prst="rect">
+            <a:avLst/>
+          </a:prstGeom>
+          <a:noFill/>
+          <a:ln/>
+        </p:spPr>
+        <p:txBody>
+          <a:bodyPr wrap="square" lIns="0" tIns="0" rIns="0" bIns="0" rtlCol="0" anchor="ctr"/>
+          <a:lstStyle/>
+          <a:p>
+            <a:pPr algn="ctr" indent="0" marL="0">
+              <a:buNone/>
+            </a:pPr>
+            <a:r>
+              <a:rPr lang="en-US" sz="850" dirty="0">
+                <a:solidFill>
+                  <a:srgbClr val="486581"/>
+                </a:solidFill>
+                <a:latin typeface="Calibri" pitchFamily="34" charset="0"/>
+                <a:ea typeface="Calibri" pitchFamily="34" charset="-122"/>
+                <a:cs typeface="Calibri" pitchFamily="34" charset="-120"/>
+              </a:rPr>
+              <a:t>deploy</a:t>
+            </a:r>
+            <a:endParaRPr lang="en-US" sz="850" dirty="0"/>
+          </a:p>
+        </p:txBody>
+      </p:sp>
+      <p:sp>
+        <p:nvSpPr>
+          <p:cNvPr id="17" name="Shape 14"/>
+          <p:cNvSpPr/>
+          <p:nvPr/>
+        </p:nvSpPr>
+        <p:spPr>
+          <a:xfrm>
+            <a:off x="4855464" y="3154680"/>
+            <a:ext cx="338328" cy="0"/>
+          </a:xfrm>
+          <a:prstGeom prst="line">
+            <a:avLst/>
+          </a:prstGeom>
+          <a:noFill/>
+          <a:ln w="12700">
+            <a:solidFill>
+              <a:srgbClr val="829AB1"/>
+            </a:solidFill>
+            <a:prstDash val="solid"/>
+            <a:tailEnd type="triangle"/>
+          </a:ln>
+        </p:spPr>
+      </p:sp>
+      <p:sp>
+        <p:nvSpPr>
+          <p:cNvPr id="18" name="Shape 15"/>
+          <p:cNvSpPr/>
+          <p:nvPr/>
+        </p:nvSpPr>
+        <p:spPr>
+          <a:xfrm>
+            <a:off x="5276088" y="2926080"/>
+            <a:ext cx="457200" cy="457200"/>
+          </a:xfrm>
+          <a:prstGeom prst="ellipse">
+            <a:avLst/>
+          </a:prstGeom>
+          <a:solidFill>
+            <a:srgbClr val="102A43"/>
+          </a:solidFill>
+          <a:ln w="12700">
+            <a:solidFill>
+              <a:srgbClr val="102A43"/>
+            </a:solidFill>
+            <a:prstDash val="solid"/>
+          </a:ln>
+        </p:spPr>
+      </p:sp>
+      <p:sp>
+        <p:nvSpPr>
+          <p:cNvPr id="19" name="Text 16"/>
+          <p:cNvSpPr txBox="1"/>
+          <p:nvPr/>
+        </p:nvSpPr>
+        <p:spPr>
+          <a:xfrm>
+            <a:off x="5276088" y="2926080"/>
+            <a:ext cx="457200" cy="457200"/>
+          </a:xfrm>
+          <a:prstGeom prst="rect">
+            <a:avLst/>
+          </a:prstGeom>
+          <a:noFill/>
+          <a:ln/>
+        </p:spPr>
+        <p:txBody>
+          <a:bodyPr wrap="square" lIns="0" tIns="0" rIns="0" bIns="0" rtlCol="0" anchor="ctr"/>
+          <a:lstStyle/>
+          <a:p>
+            <a:pPr algn="ctr" indent="0" marL="0">
+              <a:buNone/>
+            </a:pPr>
+            <a:r>
+              <a:rPr lang="en-US" sz="1600" b="1" dirty="0">
+                <a:solidFill>
+                  <a:srgbClr val="FFFFFF"/>
+                </a:solidFill>
+                <a:latin typeface="Cambria" pitchFamily="34" charset="0"/>
+                <a:ea typeface="Cambria" pitchFamily="34" charset="-122"/>
+                <a:cs typeface="Cambria" pitchFamily="34" charset="-120"/>
+              </a:rPr>
+              <a:t>2</a:t>
+            </a:r>
+            <a:endParaRPr lang="en-US" sz="1600" dirty="0"/>
+          </a:p>
+        </p:txBody>
+      </p:sp>
+      <p:sp>
+        <p:nvSpPr>
+          <p:cNvPr id="20" name="Text 17"/>
+          <p:cNvSpPr txBox="1"/>
+          <p:nvPr/>
+        </p:nvSpPr>
+        <p:spPr>
+          <a:xfrm>
+            <a:off x="5102352" y="3419856"/>
+            <a:ext cx="804672" cy="219456"/>
+          </a:xfrm>
+          <a:prstGeom prst="rect">
+            <a:avLst/>
+          </a:prstGeom>
+          <a:noFill/>
+          <a:ln/>
+        </p:spPr>
+        <p:txBody>
+          <a:bodyPr wrap="square" lIns="0" tIns="0" rIns="0" bIns="0" rtlCol="0" anchor="ctr"/>
+          <a:lstStyle/>
+          <a:p>
+            <a:pPr algn="ctr" indent="0" marL="0">
+              <a:buNone/>
+            </a:pPr>
+            <a:r>
+              <a:rPr lang="en-US" sz="850" dirty="0">
+                <a:solidFill>
+                  <a:srgbClr val="486581"/>
+                </a:solidFill>
+                <a:latin typeface="Calibri" pitchFamily="34" charset="0"/>
+                <a:ea typeface="Calibri" pitchFamily="34" charset="-122"/>
+                <a:cs typeface="Calibri" pitchFamily="34" charset="-120"/>
+              </a:rPr>
+              <a:t>quota</a:t>
+            </a:r>
+            <a:endParaRPr lang="en-US" sz="850" dirty="0"/>
+          </a:p>
+        </p:txBody>
+      </p:sp>
+      <p:sp>
+        <p:nvSpPr>
+          <p:cNvPr id="21" name="Shape 18"/>
+          <p:cNvSpPr/>
+          <p:nvPr/>
+        </p:nvSpPr>
+        <p:spPr>
+          <a:xfrm>
+            <a:off x="5815584" y="3154680"/>
+            <a:ext cx="338328" cy="0"/>
+          </a:xfrm>
+          <a:prstGeom prst="line">
+            <a:avLst/>
+          </a:prstGeom>
+          <a:noFill/>
+          <a:ln w="12700">
+            <a:solidFill>
+              <a:srgbClr val="829AB1"/>
+            </a:solidFill>
+            <a:prstDash val="solid"/>
+            <a:tailEnd type="triangle"/>
+          </a:ln>
+        </p:spPr>
+      </p:sp>
+      <p:sp>
+        <p:nvSpPr>
+          <p:cNvPr id="22" name="Shape 19"/>
+          <p:cNvSpPr/>
+          <p:nvPr/>
+        </p:nvSpPr>
+        <p:spPr>
+          <a:xfrm>
+            <a:off x="6236208" y="2926080"/>
+            <a:ext cx="457200" cy="457200"/>
+          </a:xfrm>
+          <a:prstGeom prst="ellipse">
+            <a:avLst/>
+          </a:prstGeom>
+          <a:solidFill>
+            <a:srgbClr val="102A43"/>
+          </a:solidFill>
+          <a:ln w="12700">
+            <a:solidFill>
+              <a:srgbClr val="102A43"/>
+            </a:solidFill>
+            <a:prstDash val="solid"/>
+          </a:ln>
+        </p:spPr>
+      </p:sp>
+      <p:sp>
+        <p:nvSpPr>
+          <p:cNvPr id="23" name="Text 20"/>
+          <p:cNvSpPr txBox="1"/>
+          <p:nvPr/>
+        </p:nvSpPr>
+        <p:spPr>
+          <a:xfrm>
+            <a:off x="6236208" y="2926080"/>
+            <a:ext cx="457200" cy="457200"/>
+          </a:xfrm>
+          <a:prstGeom prst="rect">
+            <a:avLst/>
+          </a:prstGeom>
+          <a:noFill/>
+          <a:ln/>
+        </p:spPr>
+        <p:txBody>
+          <a:bodyPr wrap="square" lIns="0" tIns="0" rIns="0" bIns="0" rtlCol="0" anchor="ctr"/>
+          <a:lstStyle/>
+          <a:p>
+            <a:pPr algn="ctr" indent="0" marL="0">
+              <a:buNone/>
+            </a:pPr>
+            <a:r>
+              <a:rPr lang="en-US" sz="1600" b="1" dirty="0">
+                <a:solidFill>
+                  <a:srgbClr val="FFFFFF"/>
+                </a:solidFill>
+                <a:latin typeface="Cambria" pitchFamily="34" charset="0"/>
+                <a:ea typeface="Cambria" pitchFamily="34" charset="-122"/>
+                <a:cs typeface="Cambria" pitchFamily="34" charset="-120"/>
+              </a:rPr>
+              <a:t>6</a:t>
+            </a:r>
+            <a:endParaRPr lang="en-US" sz="1600" dirty="0"/>
+          </a:p>
+        </p:txBody>
+      </p:sp>
+      <p:sp>
+        <p:nvSpPr>
+          <p:cNvPr id="24" name="Text 21"/>
+          <p:cNvSpPr txBox="1"/>
+          <p:nvPr/>
+        </p:nvSpPr>
+        <p:spPr>
+          <a:xfrm>
+            <a:off x="6062472" y="3419856"/>
+            <a:ext cx="804672" cy="219456"/>
+          </a:xfrm>
+          <a:prstGeom prst="rect">
+            <a:avLst/>
+          </a:prstGeom>
+          <a:noFill/>
+          <a:ln/>
+        </p:spPr>
+        <p:txBody>
+          <a:bodyPr wrap="square" lIns="0" tIns="0" rIns="0" bIns="0" rtlCol="0" anchor="ctr"/>
+          <a:lstStyle/>
+          <a:p>
+            <a:pPr algn="ctr" indent="0" marL="0">
+              <a:buNone/>
+            </a:pPr>
+            <a:r>
+              <a:rPr lang="en-US" sz="850" dirty="0">
+                <a:solidFill>
+                  <a:srgbClr val="486581"/>
+                </a:solidFill>
+                <a:latin typeface="Calibri" pitchFamily="34" charset="0"/>
+                <a:ea typeface="Calibri" pitchFamily="34" charset="-122"/>
+                <a:cs typeface="Calibri" pitchFamily="34" charset="-120"/>
+              </a:rPr>
+              <a:t>pool</a:t>
+            </a:r>
+            <a:endParaRPr lang="en-US" sz="850" dirty="0"/>
+          </a:p>
+        </p:txBody>
+      </p:sp>
+      <p:sp>
+        <p:nvSpPr>
+          <p:cNvPr id="25" name="Shape 22"/>
+          <p:cNvSpPr/>
+          <p:nvPr/>
+        </p:nvSpPr>
+        <p:spPr>
+          <a:xfrm>
+            <a:off x="6775704" y="3154680"/>
+            <a:ext cx="338328" cy="0"/>
+          </a:xfrm>
+          <a:prstGeom prst="line">
+            <a:avLst/>
+          </a:prstGeom>
+          <a:noFill/>
+          <a:ln w="12700">
+            <a:solidFill>
+              <a:srgbClr val="829AB1"/>
+            </a:solidFill>
+            <a:prstDash val="solid"/>
+            <a:tailEnd type="triangle"/>
+          </a:ln>
+        </p:spPr>
+      </p:sp>
+      <p:sp>
+        <p:nvSpPr>
+          <p:cNvPr id="26" name="Shape 23"/>
+          <p:cNvSpPr/>
+          <p:nvPr/>
+        </p:nvSpPr>
+        <p:spPr>
+          <a:xfrm>
+            <a:off x="7196328" y="2926080"/>
+            <a:ext cx="457200" cy="457200"/>
+          </a:xfrm>
+          <a:prstGeom prst="ellipse">
+            <a:avLst/>
+          </a:prstGeom>
+          <a:solidFill>
+            <a:srgbClr val="102A43"/>
+          </a:solidFill>
+          <a:ln w="12700">
+            <a:solidFill>
+              <a:srgbClr val="102A43"/>
+            </a:solidFill>
+            <a:prstDash val="solid"/>
+          </a:ln>
+        </p:spPr>
+      </p:sp>
+      <p:sp>
+        <p:nvSpPr>
+          <p:cNvPr id="27" name="Text 24"/>
+          <p:cNvSpPr txBox="1"/>
+          <p:nvPr/>
+        </p:nvSpPr>
+        <p:spPr>
+          <a:xfrm>
+            <a:off x="7196328" y="2926080"/>
+            <a:ext cx="457200" cy="457200"/>
+          </a:xfrm>
+          <a:prstGeom prst="rect">
+            <a:avLst/>
+          </a:prstGeom>
+          <a:noFill/>
+          <a:ln/>
+        </p:spPr>
+        <p:txBody>
+          <a:bodyPr wrap="square" lIns="0" tIns="0" rIns="0" bIns="0" rtlCol="0" anchor="ctr"/>
+          <a:lstStyle/>
+          <a:p>
+            <a:pPr algn="ctr" indent="0" marL="0">
+              <a:buNone/>
+            </a:pPr>
+            <a:r>
+              <a:rPr lang="en-US" sz="1600" b="1" dirty="0">
+                <a:solidFill>
+                  <a:srgbClr val="FFFFFF"/>
+                </a:solidFill>
+                <a:latin typeface="Cambria" pitchFamily="34" charset="0"/>
+                <a:ea typeface="Cambria" pitchFamily="34" charset="-122"/>
+                <a:cs typeface="Cambria" pitchFamily="34" charset="-120"/>
+              </a:rPr>
+              <a:t>4</a:t>
+            </a:r>
+            <a:endParaRPr lang="en-US" sz="1600" dirty="0"/>
+          </a:p>
+        </p:txBody>
+      </p:sp>
+      <p:sp>
+        <p:nvSpPr>
+          <p:cNvPr id="28" name="Text 25"/>
+          <p:cNvSpPr txBox="1"/>
+          <p:nvPr/>
+        </p:nvSpPr>
+        <p:spPr>
+          <a:xfrm>
+            <a:off x="7022592" y="3419856"/>
+            <a:ext cx="804672" cy="219456"/>
+          </a:xfrm>
+          <a:prstGeom prst="rect">
+            <a:avLst/>
+          </a:prstGeom>
+          <a:noFill/>
+          <a:ln/>
+        </p:spPr>
+        <p:txBody>
+          <a:bodyPr wrap="square" lIns="0" tIns="0" rIns="0" bIns="0" rtlCol="0" anchor="ctr"/>
+          <a:lstStyle/>
+          <a:p>
+            <a:pPr algn="ctr" indent="0" marL="0">
+              <a:buNone/>
+            </a:pPr>
+            <a:r>
+              <a:rPr lang="en-US" sz="850" dirty="0">
+                <a:solidFill>
+                  <a:srgbClr val="486581"/>
+                </a:solidFill>
+                <a:latin typeface="Calibri" pitchFamily="34" charset="0"/>
+                <a:ea typeface="Calibri" pitchFamily="34" charset="-122"/>
+                <a:cs typeface="Calibri" pitchFamily="34" charset="-120"/>
+              </a:rPr>
+              <a:t>one pod</a:t>
+            </a:r>
+            <a:endParaRPr lang="en-US" sz="850" dirty="0"/>
+          </a:p>
+        </p:txBody>
+      </p:sp>
+      <p:sp>
+        <p:nvSpPr>
+          <p:cNvPr id="29" name="Shape 26"/>
+          <p:cNvSpPr/>
+          <p:nvPr/>
+        </p:nvSpPr>
+        <p:spPr>
+          <a:xfrm>
+            <a:off x="7735824" y="3154680"/>
+            <a:ext cx="338328" cy="0"/>
+          </a:xfrm>
+          <a:prstGeom prst="line">
+            <a:avLst/>
+          </a:prstGeom>
+          <a:noFill/>
+          <a:ln w="12700">
+            <a:solidFill>
+              <a:srgbClr val="829AB1"/>
+            </a:solidFill>
+            <a:prstDash val="solid"/>
+            <a:tailEnd type="triangle"/>
+          </a:ln>
+        </p:spPr>
+      </p:sp>
+      <p:sp>
+        <p:nvSpPr>
+          <p:cNvPr id="30" name="Shape 27"/>
+          <p:cNvSpPr/>
+          <p:nvPr/>
+        </p:nvSpPr>
+        <p:spPr>
+          <a:xfrm>
+            <a:off x="8156448" y="2926080"/>
+            <a:ext cx="457200" cy="457200"/>
+          </a:xfrm>
+          <a:prstGeom prst="ellipse">
+            <a:avLst/>
+          </a:prstGeom>
+          <a:solidFill>
+            <a:srgbClr val="102A43"/>
+          </a:solidFill>
+          <a:ln w="12700">
+            <a:solidFill>
+              <a:srgbClr val="102A43"/>
+            </a:solidFill>
+            <a:prstDash val="solid"/>
+          </a:ln>
+        </p:spPr>
+      </p:sp>
+      <p:sp>
+        <p:nvSpPr>
+          <p:cNvPr id="31" name="Text 28"/>
+          <p:cNvSpPr txBox="1"/>
+          <p:nvPr/>
+        </p:nvSpPr>
+        <p:spPr>
+          <a:xfrm>
+            <a:off x="8156448" y="2926080"/>
+            <a:ext cx="457200" cy="457200"/>
+          </a:xfrm>
+          <a:prstGeom prst="rect">
+            <a:avLst/>
+          </a:prstGeom>
+          <a:noFill/>
+          <a:ln/>
+        </p:spPr>
+        <p:txBody>
+          <a:bodyPr wrap="square" lIns="0" tIns="0" rIns="0" bIns="0" rtlCol="0" anchor="ctr"/>
+          <a:lstStyle/>
+          <a:p>
+            <a:pPr algn="ctr" indent="0" marL="0">
+              <a:buNone/>
+            </a:pPr>
+            <a:r>
+              <a:rPr lang="en-US" sz="1600" b="1" dirty="0">
+                <a:solidFill>
+                  <a:srgbClr val="FFFFFF"/>
+                </a:solidFill>
+                <a:latin typeface="Cambria" pitchFamily="34" charset="0"/>
+                <a:ea typeface="Cambria" pitchFamily="34" charset="-122"/>
+                <a:cs typeface="Cambria" pitchFamily="34" charset="-120"/>
+              </a:rPr>
+              <a:t>5</a:t>
+            </a:r>
+            <a:endParaRPr lang="en-US" sz="1600" dirty="0"/>
+          </a:p>
+        </p:txBody>
+      </p:sp>
+      <p:sp>
+        <p:nvSpPr>
+          <p:cNvPr id="32" name="Text 29"/>
+          <p:cNvSpPr txBox="1"/>
+          <p:nvPr/>
+        </p:nvSpPr>
+        <p:spPr>
+          <a:xfrm>
+            <a:off x="7982712" y="3419856"/>
+            <a:ext cx="804672" cy="219456"/>
+          </a:xfrm>
+          <a:prstGeom prst="rect">
+            <a:avLst/>
+          </a:prstGeom>
+          <a:noFill/>
+          <a:ln/>
+        </p:spPr>
+        <p:txBody>
+          <a:bodyPr wrap="square" lIns="0" tIns="0" rIns="0" bIns="0" rtlCol="0" anchor="ctr"/>
+          <a:lstStyle/>
+          <a:p>
+            <a:pPr algn="ctr" indent="0" marL="0">
+              <a:buNone/>
+            </a:pPr>
+            <a:r>
+              <a:rPr lang="en-US" sz="850" dirty="0">
+                <a:solidFill>
+                  <a:srgbClr val="486581"/>
+                </a:solidFill>
+                <a:latin typeface="Calibri" pitchFamily="34" charset="0"/>
+                <a:ea typeface="Calibri" pitchFamily="34" charset="-122"/>
+                <a:cs typeface="Calibri" pitchFamily="34" charset="-120"/>
+              </a:rPr>
+              <a:t>GC</a:t>
+            </a:r>
+            <a:endParaRPr lang="en-US" sz="850" dirty="0"/>
+          </a:p>
+        </p:txBody>
+      </p:sp>
+      <p:sp>
+        <p:nvSpPr>
+          <p:cNvPr id="33" name="Shape 30"/>
+          <p:cNvSpPr/>
+          <p:nvPr/>
+        </p:nvSpPr>
+        <p:spPr>
+          <a:xfrm>
+            <a:off x="4069080" y="3803904"/>
+            <a:ext cx="4572000" cy="457200"/>
+          </a:xfrm>
+          <a:prstGeom prst="roundRect">
+            <a:avLst>
+              <a:gd name="adj" fmla="val 12000"/>
+            </a:avLst>
+          </a:prstGeom>
+          <a:solidFill>
+            <a:srgbClr val="F0F4F8"/>
+          </a:solidFill>
+          <a:ln w="12700">
+            <a:solidFill>
+              <a:srgbClr val="D9E2EC"/>
+            </a:solidFill>
+            <a:prstDash val="solid"/>
+          </a:ln>
+        </p:spPr>
+      </p:sp>
+      <p:sp>
+        <p:nvSpPr>
+          <p:cNvPr id="34" name="Text 31"/>
+          <p:cNvSpPr txBox="1"/>
+          <p:nvPr/>
+        </p:nvSpPr>
+        <p:spPr>
+          <a:xfrm>
+            <a:off x="4069080" y="3803904"/>
+            <a:ext cx="4572000" cy="457200"/>
+          </a:xfrm>
+          <a:prstGeom prst="rect">
+            <a:avLst/>
+          </a:prstGeom>
+          <a:noFill/>
+          <a:ln/>
+        </p:spPr>
+        <p:txBody>
+          <a:bodyPr wrap="square" lIns="0" tIns="0" rIns="0" bIns="0" rtlCol="0" anchor="ctr"/>
+          <a:lstStyle/>
+          <a:p>
+            <a:pPr algn="ctr" indent="0" marL="0">
+              <a:buNone/>
+            </a:pPr>
+            <a:r>
+              <a:rPr lang="en-US" sz="1050" dirty="0">
+                <a:solidFill>
+                  <a:srgbClr val="102A43"/>
+                </a:solidFill>
+                <a:latin typeface="Calibri" pitchFamily="34" charset="0"/>
+                <a:ea typeface="Calibri" pitchFamily="34" charset="-122"/>
+                <a:cs typeface="Calibri" pitchFamily="34" charset="-120"/>
+              </a:rPr>
+              <a:t>the artifact you paste in the ticket  +  the decision rule</a:t>
+            </a:r>
+            <a:endParaRPr lang="en-US" sz="1050" dirty="0"/>
+          </a:p>
+        </p:txBody>
+      </p:sp>
+      <p:sp>
+        <p:nvSpPr>
+          <p:cNvPr id="35" name="Text 32"/>
+          <p:cNvSpPr txBox="1"/>
+          <p:nvPr/>
+        </p:nvSpPr>
+        <p:spPr>
+          <a:xfrm>
+            <a:off x="4069080" y="4370832"/>
+            <a:ext cx="4572000" cy="274320"/>
+          </a:xfrm>
+          <a:prstGeom prst="rect">
+            <a:avLst/>
+          </a:prstGeom>
+          <a:noFill/>
+          <a:ln/>
+        </p:spPr>
+        <p:txBody>
+          <a:bodyPr wrap="square" lIns="0" tIns="0" rIns="0" bIns="0" rtlCol="0" anchor="ctr"/>
+          <a:lstStyle/>
+          <a:p>
+            <a:pPr algn="ctr" indent="0" marL="0">
               <a:buNone/>
             </a:pPr>
             <a:r>
               <a:rPr lang="en-US" sz="950" i="1" dirty="0">
                 <a:solidFill>
-                  <a:srgbClr val="1F2933"/>
-                </a:solidFill>
-                <a:latin typeface="Calibri" pitchFamily="34" charset="0"/>
-                <a:ea typeface="Calibri" pitchFamily="34" charset="-122"/>
-                <a:cs typeface="Calibri" pitchFamily="34" charset="-120"/>
-              </a:rPr>
-              <a:t>“Start from the question, not from the graph.”</a:t>
-            </a:r>
-            <a:endParaRPr lang="en-US" sz="950" dirty="0"/>
-          </a:p>
-        </p:txBody>
-      </p:sp>
-      <p:sp>
-        <p:nvSpPr>
-          <p:cNvPr id="35" name="Text 29"/>
-          <p:cNvSpPr txBox="1"/>
-          <p:nvPr/>
-        </p:nvSpPr>
-        <p:spPr>
-          <a:xfrm>
-            <a:off x="6848856" y="4069080"/>
-            <a:ext cx="1691640" cy="640080"/>
-          </a:xfrm>
-          <a:prstGeom prst="rect">
-            <a:avLst/>
-          </a:prstGeom>
-          <a:noFill/>
-          <a:ln/>
-        </p:spPr>
-        <p:txBody>
-          <a:bodyPr wrap="square" lIns="0" tIns="0" rIns="0" bIns="0" rtlCol="0" anchor="t"/>
-          <a:lstStyle/>
-          <a:p>
-            <a:pPr indent="0" marL="0">
-              <a:buNone/>
-            </a:pPr>
-            <a:r>
-              <a:rPr lang="en-US" sz="950" b="1" dirty="0">
-                <a:solidFill>
-                  <a:srgbClr val="1F2933"/>
-                </a:solidFill>
-                <a:latin typeface="Calibri" pitchFamily="34" charset="0"/>
-                <a:ea typeface="Calibri" pitchFamily="34" charset="-122"/>
-                <a:cs typeface="Calibri" pitchFamily="34" charset="-120"/>
-              </a:rPr>
-              <a:t>Tactic: </a:t>
-            </a:r>
-            <a:pPr indent="0" marL="0">
-              <a:buNone/>
-            </a:pPr>
-            <a:r>
-              <a:rPr lang="en-US" sz="950" dirty="0">
-                <a:solidFill>
-                  <a:srgbClr val="52606D"/>
-                </a:solidFill>
-                <a:latin typeface="Calibri" pitchFamily="34" charset="0"/>
-                <a:ea typeface="Calibri" pitchFamily="34" charset="-122"/>
-                <a:cs typeface="Calibri" pitchFamily="34" charset="-120"/>
-              </a:rPr>
-              <a:t>One page per question; eight symptom walks; three sizing procedures.</a:t>
-            </a:r>
-            <a:endParaRPr lang="en-US" sz="950" dirty="0"/>
-          </a:p>
-        </p:txBody>
-      </p:sp>
-      <p:sp>
-        <p:nvSpPr>
-          <p:cNvPr id="36" name="Text 30"/>
-          <p:cNvSpPr txBox="1"/>
-          <p:nvPr/>
-        </p:nvSpPr>
-        <p:spPr>
-          <a:xfrm>
-            <a:off x="457200" y="4846320"/>
-            <a:ext cx="8229600" cy="228600"/>
-          </a:xfrm>
-          <a:prstGeom prst="rect">
-            <a:avLst/>
-          </a:prstGeom>
-          <a:noFill/>
-          <a:ln/>
-        </p:spPr>
-        <p:txBody>
-          <a:bodyPr wrap="square" lIns="0" tIns="0" rIns="0" bIns="0" rtlCol="0" anchor="ctr"/>
-          <a:lstStyle/>
-          <a:p>
-            <a:pPr indent="0" marL="0">
-              <a:buNone/>
-            </a:pPr>
-            <a:r>
-              <a:rPr lang="en-US" sz="950" dirty="0">
-                <a:solidFill>
-                  <a:srgbClr val="7B8794"/>
-                </a:solidFill>
-                <a:latin typeface="Calibri" pitchFamily="34" charset="0"/>
-                <a:ea typeface="Calibri" pitchFamily="34" charset="-122"/>
-                <a:cs typeface="Calibri" pitchFamily="34" charset="-120"/>
-              </a:rPr>
-              <a:t>Start Here: The Three Doors · The Three Lenses · The Two Roads   |   Java: Three Lenses, Tactically I–III</a:t>
+                  <a:srgbClr val="486581"/>
+                </a:solidFill>
+                <a:latin typeface="Calibri" pitchFamily="34" charset="0"/>
+                <a:ea typeface="Calibri" pitchFamily="34" charset="-122"/>
+                <a:cs typeface="Calibri" pitchFamily="34" charset="-120"/>
+              </a:rPr>
+              <a:t>the eight symptoms are the rule-out list, never the way in</a:t>
             </a:r>
             <a:endParaRPr lang="en-US" sz="950" dirty="0"/>
           </a:p>
